--- a/weekly_report/8_31/架构图.pptx
+++ b/weekly_report/8_31/架构图.pptx
@@ -6,6 +6,8 @@
   </p:sldMasterIdLst>
   <p:sldIdLst>
     <p:sldId id="256" r:id="rId2"/>
+    <p:sldId id="257" r:id="rId3"/>
+    <p:sldId id="258" r:id="rId4"/>
   </p:sldIdLst>
   <p:sldSz cx="45720000" cy="27432000"/>
   <p:notesSz cx="6858000" cy="9144000"/>
@@ -243,7 +245,7 @@
           <a:p>
             <a:fld id="{CF4BA9C3-62E2-4E40-AAD5-C67EE55B437A}" type="datetimeFigureOut">
               <a:rPr lang="en-US" smtClean="0"/>
-              <a:t>8/25/2026</a:t>
+              <a:t>8/27/2026</a:t>
             </a:fld>
             <a:endParaRPr lang="en-US"/>
           </a:p>
@@ -413,7 +415,7 @@
           <a:p>
             <a:fld id="{CF4BA9C3-62E2-4E40-AAD5-C67EE55B437A}" type="datetimeFigureOut">
               <a:rPr lang="en-US" smtClean="0"/>
-              <a:t>8/25/2026</a:t>
+              <a:t>8/27/2026</a:t>
             </a:fld>
             <a:endParaRPr lang="en-US"/>
           </a:p>
@@ -593,7 +595,7 @@
           <a:p>
             <a:fld id="{CF4BA9C3-62E2-4E40-AAD5-C67EE55B437A}" type="datetimeFigureOut">
               <a:rPr lang="en-US" smtClean="0"/>
-              <a:t>8/25/2026</a:t>
+              <a:t>8/27/2026</a:t>
             </a:fld>
             <a:endParaRPr lang="en-US"/>
           </a:p>
@@ -763,7 +765,7 @@
           <a:p>
             <a:fld id="{CF4BA9C3-62E2-4E40-AAD5-C67EE55B437A}" type="datetimeFigureOut">
               <a:rPr lang="en-US" smtClean="0"/>
-              <a:t>8/25/2026</a:t>
+              <a:t>8/27/2026</a:t>
             </a:fld>
             <a:endParaRPr lang="en-US"/>
           </a:p>
@@ -1009,7 +1011,7 @@
           <a:p>
             <a:fld id="{CF4BA9C3-62E2-4E40-AAD5-C67EE55B437A}" type="datetimeFigureOut">
               <a:rPr lang="en-US" smtClean="0"/>
-              <a:t>8/25/2026</a:t>
+              <a:t>8/27/2026</a:t>
             </a:fld>
             <a:endParaRPr lang="en-US"/>
           </a:p>
@@ -1241,7 +1243,7 @@
           <a:p>
             <a:fld id="{CF4BA9C3-62E2-4E40-AAD5-C67EE55B437A}" type="datetimeFigureOut">
               <a:rPr lang="en-US" smtClean="0"/>
-              <a:t>8/25/2026</a:t>
+              <a:t>8/27/2026</a:t>
             </a:fld>
             <a:endParaRPr lang="en-US"/>
           </a:p>
@@ -1608,7 +1610,7 @@
           <a:p>
             <a:fld id="{CF4BA9C3-62E2-4E40-AAD5-C67EE55B437A}" type="datetimeFigureOut">
               <a:rPr lang="en-US" smtClean="0"/>
-              <a:t>8/25/2026</a:t>
+              <a:t>8/27/2026</a:t>
             </a:fld>
             <a:endParaRPr lang="en-US"/>
           </a:p>
@@ -1726,7 +1728,7 @@
           <a:p>
             <a:fld id="{CF4BA9C3-62E2-4E40-AAD5-C67EE55B437A}" type="datetimeFigureOut">
               <a:rPr lang="en-US" smtClean="0"/>
-              <a:t>8/25/2026</a:t>
+              <a:t>8/27/2026</a:t>
             </a:fld>
             <a:endParaRPr lang="en-US"/>
           </a:p>
@@ -1821,7 +1823,7 @@
           <a:p>
             <a:fld id="{CF4BA9C3-62E2-4E40-AAD5-C67EE55B437A}" type="datetimeFigureOut">
               <a:rPr lang="en-US" smtClean="0"/>
-              <a:t>8/25/2026</a:t>
+              <a:t>8/27/2026</a:t>
             </a:fld>
             <a:endParaRPr lang="en-US"/>
           </a:p>
@@ -2098,7 +2100,7 @@
           <a:p>
             <a:fld id="{CF4BA9C3-62E2-4E40-AAD5-C67EE55B437A}" type="datetimeFigureOut">
               <a:rPr lang="en-US" smtClean="0"/>
-              <a:t>8/25/2026</a:t>
+              <a:t>8/27/2026</a:t>
             </a:fld>
             <a:endParaRPr lang="en-US"/>
           </a:p>
@@ -2355,7 +2357,7 @@
           <a:p>
             <a:fld id="{CF4BA9C3-62E2-4E40-AAD5-C67EE55B437A}" type="datetimeFigureOut">
               <a:rPr lang="en-US" smtClean="0"/>
-              <a:t>8/25/2026</a:t>
+              <a:t>8/27/2026</a:t>
             </a:fld>
             <a:endParaRPr lang="en-US"/>
           </a:p>
@@ -2568,7 +2570,7 @@
           <a:p>
             <a:fld id="{CF4BA9C3-62E2-4E40-AAD5-C67EE55B437A}" type="datetimeFigureOut">
               <a:rPr lang="en-US" smtClean="0"/>
-              <a:t>8/25/2026</a:t>
+              <a:t>8/27/2026</a:t>
             </a:fld>
             <a:endParaRPr lang="en-US"/>
           </a:p>
@@ -2981,12 +2983,1630 @@
           <a:chExt cx="0" cy="0"/>
         </a:xfrm>
       </p:grpSpPr>
+      <p:sp>
+        <p:nvSpPr>
+          <p:cNvPr id="21" name="Rectangle: Rounded Corners 20">
+            <a:extLst>
+              <a:ext uri="{FF2B5EF4-FFF2-40B4-BE49-F238E27FC236}">
+                <a16:creationId xmlns:a16="http://schemas.microsoft.com/office/drawing/2014/main" id="{2658D007-751C-FEFB-BF76-E0BF1C5A655E}"/>
+              </a:ext>
+            </a:extLst>
+          </p:cNvPr>
+          <p:cNvSpPr/>
+          <p:nvPr/>
+        </p:nvSpPr>
+        <p:spPr>
+          <a:xfrm>
+            <a:off x="12833874" y="13624526"/>
+            <a:ext cx="2462981" cy="1156273"/>
+          </a:xfrm>
+          <a:prstGeom prst="roundRect">
+            <a:avLst/>
+          </a:prstGeom>
+          <a:solidFill>
+            <a:srgbClr val="E59A32"/>
+          </a:solidFill>
+          <a:ln>
+            <a:solidFill>
+              <a:srgbClr val="94A3B8"/>
+            </a:solidFill>
+          </a:ln>
+        </p:spPr>
+        <p:style>
+          <a:lnRef idx="2">
+            <a:schemeClr val="accent1">
+              <a:shade val="15000"/>
+            </a:schemeClr>
+          </a:lnRef>
+          <a:fillRef idx="1">
+            <a:schemeClr val="accent1"/>
+          </a:fillRef>
+          <a:effectRef idx="0">
+            <a:schemeClr val="accent1"/>
+          </a:effectRef>
+          <a:fontRef idx="minor">
+            <a:schemeClr val="lt1"/>
+          </a:fontRef>
+        </p:style>
+        <p:txBody>
+          <a:bodyPr rtlCol="0" anchor="ctr"/>
+          <a:lstStyle/>
+          <a:p>
+            <a:pPr algn="ctr"/>
+            <a:r>
+              <a:rPr lang="en-US" sz="2770" dirty="0"/>
+              <a:t>Bottleneck</a:t>
+            </a:r>
+          </a:p>
+          <a:p>
+            <a:pPr algn="ctr"/>
+            <a:r>
+              <a:rPr lang="en-US" altLang="zh-CN" sz="2770" dirty="0"/>
+              <a:t>512×16×16</a:t>
+            </a:r>
+            <a:endParaRPr lang="en-US" sz="2770" dirty="0"/>
+          </a:p>
+        </p:txBody>
+      </p:sp>
+      <p:sp>
+        <p:nvSpPr>
+          <p:cNvPr id="8" name="Rectangle: Rounded Corners 7">
+            <a:extLst>
+              <a:ext uri="{FF2B5EF4-FFF2-40B4-BE49-F238E27FC236}">
+                <a16:creationId xmlns:a16="http://schemas.microsoft.com/office/drawing/2014/main" id="{9762C9A5-3786-B606-3515-21FB63706234}"/>
+              </a:ext>
+            </a:extLst>
+          </p:cNvPr>
+          <p:cNvSpPr/>
+          <p:nvPr/>
+        </p:nvSpPr>
+        <p:spPr>
+          <a:xfrm>
+            <a:off x="9747774" y="5507504"/>
+            <a:ext cx="2462981" cy="1156273"/>
+          </a:xfrm>
+          <a:prstGeom prst="roundRect">
+            <a:avLst/>
+          </a:prstGeom>
+          <a:ln>
+            <a:solidFill>
+              <a:srgbClr val="94A3B8"/>
+            </a:solidFill>
+          </a:ln>
+        </p:spPr>
+        <p:style>
+          <a:lnRef idx="2">
+            <a:schemeClr val="accent1">
+              <a:shade val="15000"/>
+            </a:schemeClr>
+          </a:lnRef>
+          <a:fillRef idx="1">
+            <a:schemeClr val="accent1"/>
+          </a:fillRef>
+          <a:effectRef idx="0">
+            <a:schemeClr val="accent1"/>
+          </a:effectRef>
+          <a:fontRef idx="minor">
+            <a:schemeClr val="lt1"/>
+          </a:fontRef>
+        </p:style>
+        <p:txBody>
+          <a:bodyPr rtlCol="0" anchor="ctr"/>
+          <a:lstStyle/>
+          <a:p>
+            <a:pPr algn="ctr"/>
+            <a:r>
+              <a:rPr lang="en-US" sz="2770" dirty="0" err="1"/>
+              <a:t>ResBlock</a:t>
+            </a:r>
+            <a:endParaRPr lang="en-US" sz="2770" dirty="0"/>
+          </a:p>
+          <a:p>
+            <a:pPr algn="ctr"/>
+            <a:r>
+              <a:rPr lang="en-US" sz="2770" dirty="0"/>
+              <a:t>32</a:t>
+            </a:r>
+            <a:r>
+              <a:rPr lang="en-US" altLang="zh-CN" sz="2770" dirty="0"/>
+              <a:t>×256×256</a:t>
+            </a:r>
+            <a:endParaRPr lang="en-US" sz="2770" dirty="0"/>
+          </a:p>
+        </p:txBody>
+      </p:sp>
+      <p:sp>
+        <p:nvSpPr>
+          <p:cNvPr id="17" name="Rectangle: Rounded Corners 16">
+            <a:extLst>
+              <a:ext uri="{FF2B5EF4-FFF2-40B4-BE49-F238E27FC236}">
+                <a16:creationId xmlns:a16="http://schemas.microsoft.com/office/drawing/2014/main" id="{C746DF68-8F5E-8383-69CE-84D3BE533045}"/>
+              </a:ext>
+            </a:extLst>
+          </p:cNvPr>
+          <p:cNvSpPr/>
+          <p:nvPr/>
+        </p:nvSpPr>
+        <p:spPr>
+          <a:xfrm>
+            <a:off x="9747774" y="7095169"/>
+            <a:ext cx="2462981" cy="1156273"/>
+          </a:xfrm>
+          <a:prstGeom prst="roundRect">
+            <a:avLst/>
+          </a:prstGeom>
+          <a:solidFill>
+            <a:srgbClr val="356D9A"/>
+          </a:solidFill>
+          <a:ln>
+            <a:solidFill>
+              <a:srgbClr val="94A3B8"/>
+            </a:solidFill>
+          </a:ln>
+        </p:spPr>
+        <p:style>
+          <a:lnRef idx="2">
+            <a:schemeClr val="accent1">
+              <a:shade val="15000"/>
+            </a:schemeClr>
+          </a:lnRef>
+          <a:fillRef idx="1">
+            <a:schemeClr val="accent1"/>
+          </a:fillRef>
+          <a:effectRef idx="0">
+            <a:schemeClr val="accent1"/>
+          </a:effectRef>
+          <a:fontRef idx="minor">
+            <a:schemeClr val="lt1"/>
+          </a:fontRef>
+        </p:style>
+        <p:txBody>
+          <a:bodyPr rtlCol="0" anchor="ctr"/>
+          <a:lstStyle/>
+          <a:p>
+            <a:pPr algn="ctr"/>
+            <a:r>
+              <a:rPr lang="en-US" sz="2770" dirty="0"/>
+              <a:t>Encoder1</a:t>
+            </a:r>
+          </a:p>
+          <a:p>
+            <a:pPr algn="ctr"/>
+            <a:r>
+              <a:rPr lang="en-US" altLang="zh-CN" sz="2770" dirty="0"/>
+              <a:t>64×128×128</a:t>
+            </a:r>
+            <a:endParaRPr lang="en-US" sz="2770" dirty="0"/>
+          </a:p>
+        </p:txBody>
+      </p:sp>
+      <p:sp>
+        <p:nvSpPr>
+          <p:cNvPr id="18" name="Rectangle: Rounded Corners 17">
+            <a:extLst>
+              <a:ext uri="{FF2B5EF4-FFF2-40B4-BE49-F238E27FC236}">
+                <a16:creationId xmlns:a16="http://schemas.microsoft.com/office/drawing/2014/main" id="{CF18315A-0321-213D-CCDF-E20E5F7A0FDD}"/>
+              </a:ext>
+            </a:extLst>
+          </p:cNvPr>
+          <p:cNvSpPr/>
+          <p:nvPr/>
+        </p:nvSpPr>
+        <p:spPr>
+          <a:xfrm>
+            <a:off x="9747774" y="8697582"/>
+            <a:ext cx="2462981" cy="1156273"/>
+          </a:xfrm>
+          <a:prstGeom prst="roundRect">
+            <a:avLst/>
+          </a:prstGeom>
+          <a:solidFill>
+            <a:srgbClr val="356D9A"/>
+          </a:solidFill>
+          <a:ln>
+            <a:solidFill>
+              <a:srgbClr val="94A3B8"/>
+            </a:solidFill>
+          </a:ln>
+        </p:spPr>
+        <p:style>
+          <a:lnRef idx="2">
+            <a:schemeClr val="accent1">
+              <a:shade val="15000"/>
+            </a:schemeClr>
+          </a:lnRef>
+          <a:fillRef idx="1">
+            <a:schemeClr val="accent1"/>
+          </a:fillRef>
+          <a:effectRef idx="0">
+            <a:schemeClr val="accent1"/>
+          </a:effectRef>
+          <a:fontRef idx="minor">
+            <a:schemeClr val="lt1"/>
+          </a:fontRef>
+        </p:style>
+        <p:txBody>
+          <a:bodyPr rtlCol="0" anchor="ctr"/>
+          <a:lstStyle/>
+          <a:p>
+            <a:pPr algn="ctr"/>
+            <a:r>
+              <a:rPr lang="en-US" sz="2770" dirty="0"/>
+              <a:t>Encoder2</a:t>
+            </a:r>
+          </a:p>
+          <a:p>
+            <a:pPr algn="ctr"/>
+            <a:r>
+              <a:rPr lang="en-US" altLang="zh-CN" sz="2770" dirty="0"/>
+              <a:t>128×64×64</a:t>
+            </a:r>
+            <a:endParaRPr lang="en-US" sz="2770" dirty="0"/>
+          </a:p>
+        </p:txBody>
+      </p:sp>
+      <p:sp>
+        <p:nvSpPr>
+          <p:cNvPr id="19" name="Rectangle: Rounded Corners 18">
+            <a:extLst>
+              <a:ext uri="{FF2B5EF4-FFF2-40B4-BE49-F238E27FC236}">
+                <a16:creationId xmlns:a16="http://schemas.microsoft.com/office/drawing/2014/main" id="{BB1CD5E3-FAB7-8FE5-EC95-3739011B1A0F}"/>
+              </a:ext>
+            </a:extLst>
+          </p:cNvPr>
+          <p:cNvSpPr/>
+          <p:nvPr/>
+        </p:nvSpPr>
+        <p:spPr>
+          <a:xfrm>
+            <a:off x="9747774" y="10299995"/>
+            <a:ext cx="2462980" cy="1156273"/>
+          </a:xfrm>
+          <a:prstGeom prst="roundRect">
+            <a:avLst/>
+          </a:prstGeom>
+          <a:solidFill>
+            <a:srgbClr val="356D9A"/>
+          </a:solidFill>
+          <a:ln>
+            <a:solidFill>
+              <a:srgbClr val="94A3B8"/>
+            </a:solidFill>
+          </a:ln>
+        </p:spPr>
+        <p:style>
+          <a:lnRef idx="2">
+            <a:schemeClr val="accent1">
+              <a:shade val="15000"/>
+            </a:schemeClr>
+          </a:lnRef>
+          <a:fillRef idx="1">
+            <a:schemeClr val="accent1"/>
+          </a:fillRef>
+          <a:effectRef idx="0">
+            <a:schemeClr val="accent1"/>
+          </a:effectRef>
+          <a:fontRef idx="minor">
+            <a:schemeClr val="lt1"/>
+          </a:fontRef>
+        </p:style>
+        <p:txBody>
+          <a:bodyPr rtlCol="0" anchor="ctr"/>
+          <a:lstStyle/>
+          <a:p>
+            <a:pPr algn="ctr"/>
+            <a:r>
+              <a:rPr lang="en-US" sz="2770" dirty="0"/>
+              <a:t>Encoder3</a:t>
+            </a:r>
+          </a:p>
+          <a:p>
+            <a:pPr algn="ctr"/>
+            <a:r>
+              <a:rPr lang="en-US" altLang="zh-CN" sz="2770" dirty="0"/>
+              <a:t>256×32×32</a:t>
+            </a:r>
+            <a:endParaRPr lang="en-US" sz="2770" dirty="0"/>
+          </a:p>
+        </p:txBody>
+      </p:sp>
+      <p:sp>
+        <p:nvSpPr>
+          <p:cNvPr id="20" name="Rectangle: Rounded Corners 19">
+            <a:extLst>
+              <a:ext uri="{FF2B5EF4-FFF2-40B4-BE49-F238E27FC236}">
+                <a16:creationId xmlns:a16="http://schemas.microsoft.com/office/drawing/2014/main" id="{25DDD7B7-EFCF-6E57-AD4A-C3F11647216D}"/>
+              </a:ext>
+            </a:extLst>
+          </p:cNvPr>
+          <p:cNvSpPr/>
+          <p:nvPr/>
+        </p:nvSpPr>
+        <p:spPr>
+          <a:xfrm>
+            <a:off x="9747774" y="11902406"/>
+            <a:ext cx="2462981" cy="1156273"/>
+          </a:xfrm>
+          <a:prstGeom prst="roundRect">
+            <a:avLst/>
+          </a:prstGeom>
+          <a:solidFill>
+            <a:srgbClr val="356D9A"/>
+          </a:solidFill>
+          <a:ln>
+            <a:solidFill>
+              <a:srgbClr val="94A3B8"/>
+            </a:solidFill>
+          </a:ln>
+        </p:spPr>
+        <p:style>
+          <a:lnRef idx="2">
+            <a:schemeClr val="accent1">
+              <a:shade val="15000"/>
+            </a:schemeClr>
+          </a:lnRef>
+          <a:fillRef idx="1">
+            <a:schemeClr val="accent1"/>
+          </a:fillRef>
+          <a:effectRef idx="0">
+            <a:schemeClr val="accent1"/>
+          </a:effectRef>
+          <a:fontRef idx="minor">
+            <a:schemeClr val="lt1"/>
+          </a:fontRef>
+        </p:style>
+        <p:txBody>
+          <a:bodyPr rtlCol="0" anchor="ctr"/>
+          <a:lstStyle/>
+          <a:p>
+            <a:pPr algn="ctr"/>
+            <a:r>
+              <a:rPr lang="en-US" sz="2770" dirty="0"/>
+              <a:t>Encoder4</a:t>
+            </a:r>
+          </a:p>
+          <a:p>
+            <a:pPr algn="ctr"/>
+            <a:r>
+              <a:rPr lang="en-US" altLang="zh-CN" sz="2770" dirty="0"/>
+              <a:t>512×16×16</a:t>
+            </a:r>
+            <a:endParaRPr lang="en-US" sz="2770" dirty="0"/>
+          </a:p>
+        </p:txBody>
+      </p:sp>
+      <p:cxnSp>
+        <p:nvCxnSpPr>
+          <p:cNvPr id="36" name="Straight Arrow Connector 35">
+            <a:extLst>
+              <a:ext uri="{FF2B5EF4-FFF2-40B4-BE49-F238E27FC236}">
+                <a16:creationId xmlns:a16="http://schemas.microsoft.com/office/drawing/2014/main" id="{53B2067C-C040-0F99-ED00-C7FC67A110EE}"/>
+              </a:ext>
+            </a:extLst>
+          </p:cNvPr>
+          <p:cNvCxnSpPr>
+            <a:cxnSpLocks/>
+          </p:cNvCxnSpPr>
+          <p:nvPr/>
+        </p:nvCxnSpPr>
+        <p:spPr>
+          <a:xfrm>
+            <a:off x="10979264" y="6658247"/>
+            <a:ext cx="0" cy="442452"/>
+          </a:xfrm>
+          <a:prstGeom prst="straightConnector1">
+            <a:avLst/>
+          </a:prstGeom>
+          <a:ln w="63500">
+            <a:solidFill>
+              <a:srgbClr val="94A3B8"/>
+            </a:solidFill>
+            <a:tailEnd type="triangle"/>
+          </a:ln>
+        </p:spPr>
+        <p:style>
+          <a:lnRef idx="2">
+            <a:schemeClr val="accent1"/>
+          </a:lnRef>
+          <a:fillRef idx="0">
+            <a:schemeClr val="accent1"/>
+          </a:fillRef>
+          <a:effectRef idx="1">
+            <a:schemeClr val="accent1"/>
+          </a:effectRef>
+          <a:fontRef idx="minor">
+            <a:schemeClr val="tx1"/>
+          </a:fontRef>
+        </p:style>
+      </p:cxnSp>
+      <p:cxnSp>
+        <p:nvCxnSpPr>
+          <p:cNvPr id="37" name="Straight Arrow Connector 36">
+            <a:extLst>
+              <a:ext uri="{FF2B5EF4-FFF2-40B4-BE49-F238E27FC236}">
+                <a16:creationId xmlns:a16="http://schemas.microsoft.com/office/drawing/2014/main" id="{38CFD7DD-1759-65C7-4FBC-F3E59188FB00}"/>
+              </a:ext>
+            </a:extLst>
+          </p:cNvPr>
+          <p:cNvCxnSpPr>
+            <a:cxnSpLocks/>
+          </p:cNvCxnSpPr>
+          <p:nvPr/>
+        </p:nvCxnSpPr>
+        <p:spPr>
+          <a:xfrm>
+            <a:off x="10979264" y="8245912"/>
+            <a:ext cx="0" cy="457200"/>
+          </a:xfrm>
+          <a:prstGeom prst="straightConnector1">
+            <a:avLst/>
+          </a:prstGeom>
+          <a:ln w="63500">
+            <a:solidFill>
+              <a:srgbClr val="94A3B8"/>
+            </a:solidFill>
+            <a:tailEnd type="triangle"/>
+          </a:ln>
+        </p:spPr>
+        <p:style>
+          <a:lnRef idx="2">
+            <a:schemeClr val="accent1"/>
+          </a:lnRef>
+          <a:fillRef idx="0">
+            <a:schemeClr val="accent1"/>
+          </a:fillRef>
+          <a:effectRef idx="1">
+            <a:schemeClr val="accent1"/>
+          </a:effectRef>
+          <a:fontRef idx="minor">
+            <a:schemeClr val="tx1"/>
+          </a:fontRef>
+        </p:style>
+      </p:cxnSp>
+      <p:cxnSp>
+        <p:nvCxnSpPr>
+          <p:cNvPr id="38" name="Straight Arrow Connector 37">
+            <a:extLst>
+              <a:ext uri="{FF2B5EF4-FFF2-40B4-BE49-F238E27FC236}">
+                <a16:creationId xmlns:a16="http://schemas.microsoft.com/office/drawing/2014/main" id="{F5D66311-C533-B03A-45E2-523BAD7BC62A}"/>
+              </a:ext>
+            </a:extLst>
+          </p:cNvPr>
+          <p:cNvCxnSpPr>
+            <a:cxnSpLocks/>
+          </p:cNvCxnSpPr>
+          <p:nvPr/>
+        </p:nvCxnSpPr>
+        <p:spPr>
+          <a:xfrm>
+            <a:off x="10979264" y="9848325"/>
+            <a:ext cx="0" cy="457200"/>
+          </a:xfrm>
+          <a:prstGeom prst="straightConnector1">
+            <a:avLst/>
+          </a:prstGeom>
+          <a:ln w="63500">
+            <a:solidFill>
+              <a:srgbClr val="94A3B8"/>
+            </a:solidFill>
+            <a:tailEnd type="triangle"/>
+          </a:ln>
+        </p:spPr>
+        <p:style>
+          <a:lnRef idx="2">
+            <a:schemeClr val="accent1"/>
+          </a:lnRef>
+          <a:fillRef idx="0">
+            <a:schemeClr val="accent1"/>
+          </a:fillRef>
+          <a:effectRef idx="1">
+            <a:schemeClr val="accent1"/>
+          </a:effectRef>
+          <a:fontRef idx="minor">
+            <a:schemeClr val="tx1"/>
+          </a:fontRef>
+        </p:style>
+      </p:cxnSp>
+      <p:cxnSp>
+        <p:nvCxnSpPr>
+          <p:cNvPr id="39" name="Straight Arrow Connector 38">
+            <a:extLst>
+              <a:ext uri="{FF2B5EF4-FFF2-40B4-BE49-F238E27FC236}">
+                <a16:creationId xmlns:a16="http://schemas.microsoft.com/office/drawing/2014/main" id="{409F9340-68CB-272A-B67C-90C4D706DF73}"/>
+              </a:ext>
+            </a:extLst>
+          </p:cNvPr>
+          <p:cNvCxnSpPr>
+            <a:cxnSpLocks/>
+          </p:cNvCxnSpPr>
+          <p:nvPr/>
+        </p:nvCxnSpPr>
+        <p:spPr>
+          <a:xfrm>
+            <a:off x="10979264" y="11450738"/>
+            <a:ext cx="0" cy="457200"/>
+          </a:xfrm>
+          <a:prstGeom prst="straightConnector1">
+            <a:avLst/>
+          </a:prstGeom>
+          <a:ln w="63500">
+            <a:solidFill>
+              <a:srgbClr val="94A3B8"/>
+            </a:solidFill>
+            <a:tailEnd type="triangle"/>
+          </a:ln>
+        </p:spPr>
+        <p:style>
+          <a:lnRef idx="2">
+            <a:schemeClr val="accent1"/>
+          </a:lnRef>
+          <a:fillRef idx="0">
+            <a:schemeClr val="accent1"/>
+          </a:fillRef>
+          <a:effectRef idx="1">
+            <a:schemeClr val="accent1"/>
+          </a:effectRef>
+          <a:fontRef idx="minor">
+            <a:schemeClr val="tx1"/>
+          </a:fontRef>
+        </p:style>
+      </p:cxnSp>
+      <p:sp>
+        <p:nvSpPr>
+          <p:cNvPr id="22" name="Rectangle: Rounded Corners 21">
+            <a:extLst>
+              <a:ext uri="{FF2B5EF4-FFF2-40B4-BE49-F238E27FC236}">
+                <a16:creationId xmlns:a16="http://schemas.microsoft.com/office/drawing/2014/main" id="{E019B51D-160C-EA71-C4B9-900F6E435A87}"/>
+              </a:ext>
+            </a:extLst>
+          </p:cNvPr>
+          <p:cNvSpPr/>
+          <p:nvPr/>
+        </p:nvSpPr>
+        <p:spPr>
+          <a:xfrm>
+            <a:off x="15919974" y="5507504"/>
+            <a:ext cx="2462981" cy="1156273"/>
+          </a:xfrm>
+          <a:prstGeom prst="roundRect">
+            <a:avLst/>
+          </a:prstGeom>
+          <a:solidFill>
+            <a:srgbClr val="5266A8"/>
+          </a:solidFill>
+          <a:ln>
+            <a:solidFill>
+              <a:srgbClr val="94A3B8"/>
+            </a:solidFill>
+          </a:ln>
+        </p:spPr>
+        <p:style>
+          <a:lnRef idx="2">
+            <a:schemeClr val="accent1">
+              <a:shade val="15000"/>
+            </a:schemeClr>
+          </a:lnRef>
+          <a:fillRef idx="1">
+            <a:schemeClr val="accent1"/>
+          </a:fillRef>
+          <a:effectRef idx="0">
+            <a:schemeClr val="accent1"/>
+          </a:effectRef>
+          <a:fontRef idx="minor">
+            <a:schemeClr val="lt1"/>
+          </a:fontRef>
+        </p:style>
+        <p:txBody>
+          <a:bodyPr rtlCol="0" anchor="ctr"/>
+          <a:lstStyle/>
+          <a:p>
+            <a:pPr algn="ctr"/>
+            <a:r>
+              <a:rPr lang="en-US" sz="2770" dirty="0"/>
+              <a:t>CNN</a:t>
+            </a:r>
+          </a:p>
+          <a:p>
+            <a:pPr algn="ctr"/>
+            <a:r>
+              <a:rPr lang="en-US" sz="2770" dirty="0"/>
+              <a:t>1</a:t>
+            </a:r>
+            <a:r>
+              <a:rPr lang="en-US" altLang="zh-CN" sz="2770" dirty="0"/>
+              <a:t>×1×1</a:t>
+            </a:r>
+            <a:endParaRPr lang="en-US" sz="2770" dirty="0"/>
+          </a:p>
+        </p:txBody>
+      </p:sp>
+      <p:sp>
+        <p:nvSpPr>
+          <p:cNvPr id="23" name="Rectangle: Rounded Corners 22">
+            <a:extLst>
+              <a:ext uri="{FF2B5EF4-FFF2-40B4-BE49-F238E27FC236}">
+                <a16:creationId xmlns:a16="http://schemas.microsoft.com/office/drawing/2014/main" id="{69643496-F24F-DEF2-84FA-F35569DEF956}"/>
+              </a:ext>
+            </a:extLst>
+          </p:cNvPr>
+          <p:cNvSpPr/>
+          <p:nvPr/>
+        </p:nvSpPr>
+        <p:spPr>
+          <a:xfrm>
+            <a:off x="15919974" y="7106229"/>
+            <a:ext cx="2462981" cy="1156273"/>
+          </a:xfrm>
+          <a:prstGeom prst="roundRect">
+            <a:avLst/>
+          </a:prstGeom>
+          <a:solidFill>
+            <a:srgbClr val="238A8D"/>
+          </a:solidFill>
+          <a:ln>
+            <a:solidFill>
+              <a:srgbClr val="94A3B8"/>
+            </a:solidFill>
+          </a:ln>
+        </p:spPr>
+        <p:style>
+          <a:lnRef idx="2">
+            <a:schemeClr val="accent1">
+              <a:shade val="15000"/>
+            </a:schemeClr>
+          </a:lnRef>
+          <a:fillRef idx="1">
+            <a:schemeClr val="accent1"/>
+          </a:fillRef>
+          <a:effectRef idx="0">
+            <a:schemeClr val="accent1"/>
+          </a:effectRef>
+          <a:fontRef idx="minor">
+            <a:schemeClr val="lt1"/>
+          </a:fontRef>
+        </p:style>
+        <p:txBody>
+          <a:bodyPr rtlCol="0" anchor="ctr"/>
+          <a:lstStyle/>
+          <a:p>
+            <a:pPr algn="ctr"/>
+            <a:r>
+              <a:rPr lang="en-US" sz="2770" dirty="0"/>
+              <a:t>Decoder4</a:t>
+            </a:r>
+          </a:p>
+          <a:p>
+            <a:pPr algn="ctr"/>
+            <a:r>
+              <a:rPr lang="en-US" altLang="zh-CN" sz="2770" dirty="0"/>
+              <a:t>64×128×128</a:t>
+            </a:r>
+            <a:endParaRPr lang="en-US" sz="2770" dirty="0"/>
+          </a:p>
+        </p:txBody>
+      </p:sp>
+      <p:sp>
+        <p:nvSpPr>
+          <p:cNvPr id="24" name="Rectangle: Rounded Corners 23">
+            <a:extLst>
+              <a:ext uri="{FF2B5EF4-FFF2-40B4-BE49-F238E27FC236}">
+                <a16:creationId xmlns:a16="http://schemas.microsoft.com/office/drawing/2014/main" id="{4E7FA3A8-BC71-C8D8-F566-1832F78860BC}"/>
+              </a:ext>
+            </a:extLst>
+          </p:cNvPr>
+          <p:cNvSpPr/>
+          <p:nvPr/>
+        </p:nvSpPr>
+        <p:spPr>
+          <a:xfrm>
+            <a:off x="15919974" y="8704954"/>
+            <a:ext cx="2462981" cy="1156273"/>
+          </a:xfrm>
+          <a:prstGeom prst="roundRect">
+            <a:avLst/>
+          </a:prstGeom>
+          <a:solidFill>
+            <a:srgbClr val="238A8D"/>
+          </a:solidFill>
+          <a:ln>
+            <a:solidFill>
+              <a:srgbClr val="94A3B8"/>
+            </a:solidFill>
+          </a:ln>
+        </p:spPr>
+        <p:style>
+          <a:lnRef idx="2">
+            <a:schemeClr val="accent1">
+              <a:shade val="15000"/>
+            </a:schemeClr>
+          </a:lnRef>
+          <a:fillRef idx="1">
+            <a:schemeClr val="accent1"/>
+          </a:fillRef>
+          <a:effectRef idx="0">
+            <a:schemeClr val="accent1"/>
+          </a:effectRef>
+          <a:fontRef idx="minor">
+            <a:schemeClr val="lt1"/>
+          </a:fontRef>
+        </p:style>
+        <p:txBody>
+          <a:bodyPr rtlCol="0" anchor="ctr"/>
+          <a:lstStyle/>
+          <a:p>
+            <a:pPr algn="ctr"/>
+            <a:r>
+              <a:rPr lang="en-US" sz="2770" dirty="0"/>
+              <a:t>Decoder3</a:t>
+            </a:r>
+          </a:p>
+          <a:p>
+            <a:pPr algn="ctr"/>
+            <a:r>
+              <a:rPr lang="en-US" altLang="zh-CN" sz="2770" dirty="0"/>
+              <a:t>128×64×64</a:t>
+            </a:r>
+            <a:endParaRPr lang="en-US" sz="2770" dirty="0"/>
+          </a:p>
+        </p:txBody>
+      </p:sp>
+      <p:sp>
+        <p:nvSpPr>
+          <p:cNvPr id="25" name="Rectangle: Rounded Corners 24">
+            <a:extLst>
+              <a:ext uri="{FF2B5EF4-FFF2-40B4-BE49-F238E27FC236}">
+                <a16:creationId xmlns:a16="http://schemas.microsoft.com/office/drawing/2014/main" id="{5701B72B-D8C9-988A-CE31-DDD975B0B1F0}"/>
+              </a:ext>
+            </a:extLst>
+          </p:cNvPr>
+          <p:cNvSpPr/>
+          <p:nvPr/>
+        </p:nvSpPr>
+        <p:spPr>
+          <a:xfrm>
+            <a:off x="15919975" y="10303679"/>
+            <a:ext cx="2462980" cy="1156273"/>
+          </a:xfrm>
+          <a:prstGeom prst="roundRect">
+            <a:avLst/>
+          </a:prstGeom>
+          <a:solidFill>
+            <a:srgbClr val="238A8D"/>
+          </a:solidFill>
+          <a:ln>
+            <a:solidFill>
+              <a:srgbClr val="94A3B8"/>
+            </a:solidFill>
+          </a:ln>
+        </p:spPr>
+        <p:style>
+          <a:lnRef idx="2">
+            <a:schemeClr val="accent1">
+              <a:shade val="15000"/>
+            </a:schemeClr>
+          </a:lnRef>
+          <a:fillRef idx="1">
+            <a:schemeClr val="accent1"/>
+          </a:fillRef>
+          <a:effectRef idx="0">
+            <a:schemeClr val="accent1"/>
+          </a:effectRef>
+          <a:fontRef idx="minor">
+            <a:schemeClr val="lt1"/>
+          </a:fontRef>
+        </p:style>
+        <p:txBody>
+          <a:bodyPr rtlCol="0" anchor="ctr"/>
+          <a:lstStyle/>
+          <a:p>
+            <a:pPr algn="ctr"/>
+            <a:r>
+              <a:rPr lang="en-US" sz="2770" dirty="0"/>
+              <a:t>Decoder2</a:t>
+            </a:r>
+          </a:p>
+          <a:p>
+            <a:pPr algn="ctr"/>
+            <a:r>
+              <a:rPr lang="en-US" altLang="zh-CN" sz="2770" dirty="0"/>
+              <a:t>256×32×32</a:t>
+            </a:r>
+            <a:endParaRPr lang="en-US" sz="2770" dirty="0"/>
+          </a:p>
+        </p:txBody>
+      </p:sp>
+      <p:sp>
+        <p:nvSpPr>
+          <p:cNvPr id="26" name="Rectangle: Rounded Corners 25">
+            <a:extLst>
+              <a:ext uri="{FF2B5EF4-FFF2-40B4-BE49-F238E27FC236}">
+                <a16:creationId xmlns:a16="http://schemas.microsoft.com/office/drawing/2014/main" id="{22051E0F-C3FC-E1A1-7BAA-A5193C7F47C5}"/>
+              </a:ext>
+            </a:extLst>
+          </p:cNvPr>
+          <p:cNvSpPr/>
+          <p:nvPr/>
+        </p:nvSpPr>
+        <p:spPr>
+          <a:xfrm>
+            <a:off x="15919974" y="11902406"/>
+            <a:ext cx="2462981" cy="1156273"/>
+          </a:xfrm>
+          <a:prstGeom prst="roundRect">
+            <a:avLst/>
+          </a:prstGeom>
+          <a:solidFill>
+            <a:srgbClr val="238A8D"/>
+          </a:solidFill>
+          <a:ln>
+            <a:solidFill>
+              <a:srgbClr val="94A3B8"/>
+            </a:solidFill>
+          </a:ln>
+        </p:spPr>
+        <p:style>
+          <a:lnRef idx="2">
+            <a:schemeClr val="accent1">
+              <a:shade val="15000"/>
+            </a:schemeClr>
+          </a:lnRef>
+          <a:fillRef idx="1">
+            <a:schemeClr val="accent1"/>
+          </a:fillRef>
+          <a:effectRef idx="0">
+            <a:schemeClr val="accent1"/>
+          </a:effectRef>
+          <a:fontRef idx="minor">
+            <a:schemeClr val="lt1"/>
+          </a:fontRef>
+        </p:style>
+        <p:txBody>
+          <a:bodyPr rtlCol="0" anchor="ctr"/>
+          <a:lstStyle/>
+          <a:p>
+            <a:pPr algn="ctr"/>
+            <a:r>
+              <a:rPr lang="en-US" sz="2770" dirty="0"/>
+              <a:t>Decoder1</a:t>
+            </a:r>
+          </a:p>
+          <a:p>
+            <a:pPr algn="ctr"/>
+            <a:r>
+              <a:rPr lang="en-US" altLang="zh-CN" sz="2770" dirty="0"/>
+              <a:t>512×16×16</a:t>
+            </a:r>
+            <a:endParaRPr lang="en-US" sz="2770" dirty="0"/>
+          </a:p>
+        </p:txBody>
+      </p:sp>
+      <p:cxnSp>
+        <p:nvCxnSpPr>
+          <p:cNvPr id="40" name="Straight Arrow Connector 39">
+            <a:extLst>
+              <a:ext uri="{FF2B5EF4-FFF2-40B4-BE49-F238E27FC236}">
+                <a16:creationId xmlns:a16="http://schemas.microsoft.com/office/drawing/2014/main" id="{0C42977B-1B22-6283-987C-E8DBBC0423B5}"/>
+              </a:ext>
+            </a:extLst>
+          </p:cNvPr>
+          <p:cNvCxnSpPr>
+            <a:cxnSpLocks/>
+          </p:cNvCxnSpPr>
+          <p:nvPr/>
+        </p:nvCxnSpPr>
+        <p:spPr>
+          <a:xfrm rot="10800000">
+            <a:off x="17151464" y="6663777"/>
+            <a:ext cx="0" cy="457200"/>
+          </a:xfrm>
+          <a:prstGeom prst="straightConnector1">
+            <a:avLst/>
+          </a:prstGeom>
+          <a:ln w="63500">
+            <a:solidFill>
+              <a:srgbClr val="94A3B8"/>
+            </a:solidFill>
+            <a:tailEnd type="triangle"/>
+          </a:ln>
+        </p:spPr>
+        <p:style>
+          <a:lnRef idx="2">
+            <a:schemeClr val="accent1"/>
+          </a:lnRef>
+          <a:fillRef idx="0">
+            <a:schemeClr val="accent1"/>
+          </a:fillRef>
+          <a:effectRef idx="1">
+            <a:schemeClr val="accent1"/>
+          </a:effectRef>
+          <a:fontRef idx="minor">
+            <a:schemeClr val="tx1"/>
+          </a:fontRef>
+        </p:style>
+      </p:cxnSp>
+      <p:cxnSp>
+        <p:nvCxnSpPr>
+          <p:cNvPr id="41" name="Straight Arrow Connector 40">
+            <a:extLst>
+              <a:ext uri="{FF2B5EF4-FFF2-40B4-BE49-F238E27FC236}">
+                <a16:creationId xmlns:a16="http://schemas.microsoft.com/office/drawing/2014/main" id="{F9A1680C-CCDD-268A-DA04-48977EF681AD}"/>
+              </a:ext>
+            </a:extLst>
+          </p:cNvPr>
+          <p:cNvCxnSpPr>
+            <a:cxnSpLocks/>
+          </p:cNvCxnSpPr>
+          <p:nvPr/>
+        </p:nvCxnSpPr>
+        <p:spPr>
+          <a:xfrm rot="10800000">
+            <a:off x="17151464" y="8247754"/>
+            <a:ext cx="0" cy="457200"/>
+          </a:xfrm>
+          <a:prstGeom prst="straightConnector1">
+            <a:avLst/>
+          </a:prstGeom>
+          <a:ln w="63500">
+            <a:solidFill>
+              <a:srgbClr val="94A3B8"/>
+            </a:solidFill>
+            <a:tailEnd type="triangle"/>
+          </a:ln>
+        </p:spPr>
+        <p:style>
+          <a:lnRef idx="2">
+            <a:schemeClr val="accent1"/>
+          </a:lnRef>
+          <a:fillRef idx="0">
+            <a:schemeClr val="accent1"/>
+          </a:fillRef>
+          <a:effectRef idx="1">
+            <a:schemeClr val="accent1"/>
+          </a:effectRef>
+          <a:fontRef idx="minor">
+            <a:schemeClr val="tx1"/>
+          </a:fontRef>
+        </p:style>
+      </p:cxnSp>
+      <p:cxnSp>
+        <p:nvCxnSpPr>
+          <p:cNvPr id="42" name="Straight Arrow Connector 41">
+            <a:extLst>
+              <a:ext uri="{FF2B5EF4-FFF2-40B4-BE49-F238E27FC236}">
+                <a16:creationId xmlns:a16="http://schemas.microsoft.com/office/drawing/2014/main" id="{3287A2E5-B9CC-9971-1DBF-CA0C36FA7E91}"/>
+              </a:ext>
+            </a:extLst>
+          </p:cNvPr>
+          <p:cNvCxnSpPr>
+            <a:cxnSpLocks/>
+          </p:cNvCxnSpPr>
+          <p:nvPr/>
+        </p:nvCxnSpPr>
+        <p:spPr>
+          <a:xfrm rot="10800000">
+            <a:off x="17151464" y="9861227"/>
+            <a:ext cx="0" cy="457200"/>
+          </a:xfrm>
+          <a:prstGeom prst="straightConnector1">
+            <a:avLst/>
+          </a:prstGeom>
+          <a:ln w="63500">
+            <a:solidFill>
+              <a:srgbClr val="94A3B8"/>
+            </a:solidFill>
+            <a:tailEnd type="triangle"/>
+          </a:ln>
+        </p:spPr>
+        <p:style>
+          <a:lnRef idx="2">
+            <a:schemeClr val="accent1"/>
+          </a:lnRef>
+          <a:fillRef idx="0">
+            <a:schemeClr val="accent1"/>
+          </a:fillRef>
+          <a:effectRef idx="1">
+            <a:schemeClr val="accent1"/>
+          </a:effectRef>
+          <a:fontRef idx="minor">
+            <a:schemeClr val="tx1"/>
+          </a:fontRef>
+        </p:style>
+      </p:cxnSp>
+      <p:cxnSp>
+        <p:nvCxnSpPr>
+          <p:cNvPr id="43" name="Straight Arrow Connector 42">
+            <a:extLst>
+              <a:ext uri="{FF2B5EF4-FFF2-40B4-BE49-F238E27FC236}">
+                <a16:creationId xmlns:a16="http://schemas.microsoft.com/office/drawing/2014/main" id="{E013238F-1101-E6C6-D61F-8E4DF5DA8A8C}"/>
+              </a:ext>
+            </a:extLst>
+          </p:cNvPr>
+          <p:cNvCxnSpPr>
+            <a:cxnSpLocks/>
+          </p:cNvCxnSpPr>
+          <p:nvPr/>
+        </p:nvCxnSpPr>
+        <p:spPr>
+          <a:xfrm rot="10800000">
+            <a:off x="17151464" y="11459952"/>
+            <a:ext cx="0" cy="457200"/>
+          </a:xfrm>
+          <a:prstGeom prst="straightConnector1">
+            <a:avLst/>
+          </a:prstGeom>
+          <a:ln w="63500">
+            <a:solidFill>
+              <a:srgbClr val="94A3B8"/>
+            </a:solidFill>
+            <a:tailEnd type="triangle"/>
+          </a:ln>
+        </p:spPr>
+        <p:style>
+          <a:lnRef idx="2">
+            <a:schemeClr val="accent1"/>
+          </a:lnRef>
+          <a:fillRef idx="0">
+            <a:schemeClr val="accent1"/>
+          </a:fillRef>
+          <a:effectRef idx="1">
+            <a:schemeClr val="accent1"/>
+          </a:effectRef>
+          <a:fontRef idx="minor">
+            <a:schemeClr val="tx1"/>
+          </a:fontRef>
+        </p:style>
+      </p:cxnSp>
+      <p:cxnSp>
+        <p:nvCxnSpPr>
+          <p:cNvPr id="47" name="Connector: Elbow 46">
+            <a:extLst>
+              <a:ext uri="{FF2B5EF4-FFF2-40B4-BE49-F238E27FC236}">
+                <a16:creationId xmlns:a16="http://schemas.microsoft.com/office/drawing/2014/main" id="{8910A8F6-7195-4E13-EE1A-BDBDF2203E3C}"/>
+              </a:ext>
+            </a:extLst>
+          </p:cNvPr>
+          <p:cNvCxnSpPr>
+            <a:stCxn id="20" idx="2"/>
+            <a:endCxn id="21" idx="1"/>
+          </p:cNvCxnSpPr>
+          <p:nvPr/>
+        </p:nvCxnSpPr>
+        <p:spPr>
+          <a:xfrm rot="16200000" flipH="1">
+            <a:off x="11334577" y="12703366"/>
+            <a:ext cx="1143984" cy="1854609"/>
+          </a:xfrm>
+          <a:prstGeom prst="bentConnector2">
+            <a:avLst/>
+          </a:prstGeom>
+          <a:ln w="63500">
+            <a:solidFill>
+              <a:srgbClr val="94A3B8"/>
+            </a:solidFill>
+            <a:tailEnd type="triangle"/>
+          </a:ln>
+        </p:spPr>
+        <p:style>
+          <a:lnRef idx="2">
+            <a:schemeClr val="accent1"/>
+          </a:lnRef>
+          <a:fillRef idx="0">
+            <a:schemeClr val="accent1"/>
+          </a:fillRef>
+          <a:effectRef idx="1">
+            <a:schemeClr val="accent1"/>
+          </a:effectRef>
+          <a:fontRef idx="minor">
+            <a:schemeClr val="tx1"/>
+          </a:fontRef>
+        </p:style>
+      </p:cxnSp>
+      <p:cxnSp>
+        <p:nvCxnSpPr>
+          <p:cNvPr id="48" name="Connector: Elbow 47">
+            <a:extLst>
+              <a:ext uri="{FF2B5EF4-FFF2-40B4-BE49-F238E27FC236}">
+                <a16:creationId xmlns:a16="http://schemas.microsoft.com/office/drawing/2014/main" id="{379D1BE7-6228-3D8B-4BC4-12ADFD83FEC5}"/>
+              </a:ext>
+            </a:extLst>
+          </p:cNvPr>
+          <p:cNvCxnSpPr>
+            <a:cxnSpLocks/>
+            <a:stCxn id="21" idx="3"/>
+            <a:endCxn id="26" idx="2"/>
+          </p:cNvCxnSpPr>
+          <p:nvPr/>
+        </p:nvCxnSpPr>
+        <p:spPr>
+          <a:xfrm flipV="1">
+            <a:off x="15296855" y="13058679"/>
+            <a:ext cx="1854610" cy="1143984"/>
+          </a:xfrm>
+          <a:prstGeom prst="bentConnector2">
+            <a:avLst/>
+          </a:prstGeom>
+          <a:ln w="63500">
+            <a:solidFill>
+              <a:srgbClr val="94A3B8"/>
+            </a:solidFill>
+            <a:tailEnd type="triangle"/>
+          </a:ln>
+        </p:spPr>
+        <p:style>
+          <a:lnRef idx="2">
+            <a:schemeClr val="accent1"/>
+          </a:lnRef>
+          <a:fillRef idx="0">
+            <a:schemeClr val="accent1"/>
+          </a:fillRef>
+          <a:effectRef idx="1">
+            <a:schemeClr val="accent1"/>
+          </a:effectRef>
+          <a:fontRef idx="minor">
+            <a:schemeClr val="tx1"/>
+          </a:fontRef>
+        </p:style>
+      </p:cxnSp>
+      <p:cxnSp>
+        <p:nvCxnSpPr>
+          <p:cNvPr id="52" name="Straight Arrow Connector 51">
+            <a:extLst>
+              <a:ext uri="{FF2B5EF4-FFF2-40B4-BE49-F238E27FC236}">
+                <a16:creationId xmlns:a16="http://schemas.microsoft.com/office/drawing/2014/main" id="{757F07D8-8F4F-B13B-754E-AFA6FEA3F9DA}"/>
+              </a:ext>
+            </a:extLst>
+          </p:cNvPr>
+          <p:cNvCxnSpPr>
+            <a:stCxn id="20" idx="3"/>
+            <a:endCxn id="26" idx="1"/>
+          </p:cNvCxnSpPr>
+          <p:nvPr/>
+        </p:nvCxnSpPr>
+        <p:spPr>
+          <a:xfrm>
+            <a:off x="12210755" y="12480543"/>
+            <a:ext cx="3709219" cy="0"/>
+          </a:xfrm>
+          <a:prstGeom prst="straightConnector1">
+            <a:avLst/>
+          </a:prstGeom>
+          <a:ln w="63500">
+            <a:solidFill>
+              <a:srgbClr val="94A3B8"/>
+            </a:solidFill>
+            <a:tailEnd type="triangle"/>
+          </a:ln>
+        </p:spPr>
+        <p:style>
+          <a:lnRef idx="2">
+            <a:schemeClr val="accent1"/>
+          </a:lnRef>
+          <a:fillRef idx="0">
+            <a:schemeClr val="accent1"/>
+          </a:fillRef>
+          <a:effectRef idx="1">
+            <a:schemeClr val="accent1"/>
+          </a:effectRef>
+          <a:fontRef idx="minor">
+            <a:schemeClr val="tx1"/>
+          </a:fontRef>
+        </p:style>
+      </p:cxnSp>
+      <p:cxnSp>
+        <p:nvCxnSpPr>
+          <p:cNvPr id="53" name="Straight Arrow Connector 52">
+            <a:extLst>
+              <a:ext uri="{FF2B5EF4-FFF2-40B4-BE49-F238E27FC236}">
+                <a16:creationId xmlns:a16="http://schemas.microsoft.com/office/drawing/2014/main" id="{6E38F242-0485-DE60-0054-7AA409B11259}"/>
+              </a:ext>
+            </a:extLst>
+          </p:cNvPr>
+          <p:cNvCxnSpPr/>
+          <p:nvPr/>
+        </p:nvCxnSpPr>
+        <p:spPr>
+          <a:xfrm>
+            <a:off x="12210753" y="10878131"/>
+            <a:ext cx="3709219" cy="0"/>
+          </a:xfrm>
+          <a:prstGeom prst="straightConnector1">
+            <a:avLst/>
+          </a:prstGeom>
+          <a:ln w="63500">
+            <a:solidFill>
+              <a:srgbClr val="94A3B8"/>
+            </a:solidFill>
+            <a:tailEnd type="triangle"/>
+          </a:ln>
+        </p:spPr>
+        <p:style>
+          <a:lnRef idx="2">
+            <a:schemeClr val="accent1"/>
+          </a:lnRef>
+          <a:fillRef idx="0">
+            <a:schemeClr val="accent1"/>
+          </a:fillRef>
+          <a:effectRef idx="1">
+            <a:schemeClr val="accent1"/>
+          </a:effectRef>
+          <a:fontRef idx="minor">
+            <a:schemeClr val="tx1"/>
+          </a:fontRef>
+        </p:style>
+      </p:cxnSp>
+      <p:cxnSp>
+        <p:nvCxnSpPr>
+          <p:cNvPr id="54" name="Straight Arrow Connector 53">
+            <a:extLst>
+              <a:ext uri="{FF2B5EF4-FFF2-40B4-BE49-F238E27FC236}">
+                <a16:creationId xmlns:a16="http://schemas.microsoft.com/office/drawing/2014/main" id="{7D0EEA6A-ABAC-D4CB-3FE3-27D09E5A6978}"/>
+              </a:ext>
+            </a:extLst>
+          </p:cNvPr>
+          <p:cNvCxnSpPr/>
+          <p:nvPr/>
+        </p:nvCxnSpPr>
+        <p:spPr>
+          <a:xfrm>
+            <a:off x="12210754" y="9275718"/>
+            <a:ext cx="3709219" cy="0"/>
+          </a:xfrm>
+          <a:prstGeom prst="straightConnector1">
+            <a:avLst/>
+          </a:prstGeom>
+          <a:ln w="63500">
+            <a:solidFill>
+              <a:srgbClr val="94A3B8"/>
+            </a:solidFill>
+            <a:tailEnd type="triangle"/>
+          </a:ln>
+        </p:spPr>
+        <p:style>
+          <a:lnRef idx="2">
+            <a:schemeClr val="accent1"/>
+          </a:lnRef>
+          <a:fillRef idx="0">
+            <a:schemeClr val="accent1"/>
+          </a:fillRef>
+          <a:effectRef idx="1">
+            <a:schemeClr val="accent1"/>
+          </a:effectRef>
+          <a:fontRef idx="minor">
+            <a:schemeClr val="tx1"/>
+          </a:fontRef>
+        </p:style>
+      </p:cxnSp>
+      <p:cxnSp>
+        <p:nvCxnSpPr>
+          <p:cNvPr id="55" name="Straight Arrow Connector 54">
+            <a:extLst>
+              <a:ext uri="{FF2B5EF4-FFF2-40B4-BE49-F238E27FC236}">
+                <a16:creationId xmlns:a16="http://schemas.microsoft.com/office/drawing/2014/main" id="{CB6D47B4-04E6-2011-1AC0-CAE60F1D0443}"/>
+              </a:ext>
+            </a:extLst>
+          </p:cNvPr>
+          <p:cNvCxnSpPr/>
+          <p:nvPr/>
+        </p:nvCxnSpPr>
+        <p:spPr>
+          <a:xfrm>
+            <a:off x="12210754" y="7684365"/>
+            <a:ext cx="3709219" cy="0"/>
+          </a:xfrm>
+          <a:prstGeom prst="straightConnector1">
+            <a:avLst/>
+          </a:prstGeom>
+          <a:ln w="63500">
+            <a:solidFill>
+              <a:srgbClr val="94A3B8"/>
+            </a:solidFill>
+            <a:tailEnd type="triangle"/>
+          </a:ln>
+        </p:spPr>
+        <p:style>
+          <a:lnRef idx="2">
+            <a:schemeClr val="accent1"/>
+          </a:lnRef>
+          <a:fillRef idx="0">
+            <a:schemeClr val="accent1"/>
+          </a:fillRef>
+          <a:effectRef idx="1">
+            <a:schemeClr val="accent1"/>
+          </a:effectRef>
+          <a:fontRef idx="minor">
+            <a:schemeClr val="tx1"/>
+          </a:fontRef>
+        </p:style>
+      </p:cxnSp>
+      <p:cxnSp>
+        <p:nvCxnSpPr>
+          <p:cNvPr id="56" name="Straight Arrow Connector 55">
+            <a:extLst>
+              <a:ext uri="{FF2B5EF4-FFF2-40B4-BE49-F238E27FC236}">
+                <a16:creationId xmlns:a16="http://schemas.microsoft.com/office/drawing/2014/main" id="{C491CCB5-AB85-EFEC-2E93-D0A4B8A2CFDD}"/>
+              </a:ext>
+            </a:extLst>
+          </p:cNvPr>
+          <p:cNvCxnSpPr/>
+          <p:nvPr/>
+        </p:nvCxnSpPr>
+        <p:spPr>
+          <a:xfrm>
+            <a:off x="12210752" y="6085640"/>
+            <a:ext cx="3709219" cy="0"/>
+          </a:xfrm>
+          <a:prstGeom prst="straightConnector1">
+            <a:avLst/>
+          </a:prstGeom>
+          <a:ln w="63500">
+            <a:solidFill>
+              <a:srgbClr val="94A3B8"/>
+            </a:solidFill>
+            <a:tailEnd type="triangle"/>
+          </a:ln>
+        </p:spPr>
+        <p:style>
+          <a:lnRef idx="2">
+            <a:schemeClr val="accent1"/>
+          </a:lnRef>
+          <a:fillRef idx="0">
+            <a:schemeClr val="accent1"/>
+          </a:fillRef>
+          <a:effectRef idx="1">
+            <a:schemeClr val="accent1"/>
+          </a:effectRef>
+          <a:fontRef idx="minor">
+            <a:schemeClr val="tx1"/>
+          </a:fontRef>
+        </p:style>
+      </p:cxnSp>
+      <p:sp>
+        <p:nvSpPr>
+          <p:cNvPr id="58" name="TextBox 57">
+            <a:extLst>
+              <a:ext uri="{FF2B5EF4-FFF2-40B4-BE49-F238E27FC236}">
+                <a16:creationId xmlns:a16="http://schemas.microsoft.com/office/drawing/2014/main" id="{7858F297-0164-CEC0-799D-35C54468F236}"/>
+              </a:ext>
+            </a:extLst>
+          </p:cNvPr>
+          <p:cNvSpPr txBox="1"/>
+          <p:nvPr/>
+        </p:nvSpPr>
+        <p:spPr>
+          <a:xfrm>
+            <a:off x="12968268" y="5500132"/>
+            <a:ext cx="2194190" cy="523220"/>
+          </a:xfrm>
+          <a:prstGeom prst="rect">
+            <a:avLst/>
+          </a:prstGeom>
+          <a:noFill/>
+        </p:spPr>
+        <p:txBody>
+          <a:bodyPr wrap="none" rtlCol="0">
+            <a:spAutoFit/>
+          </a:bodyPr>
+          <a:lstStyle/>
+          <a:p>
+            <a:r>
+              <a:rPr lang="en-US" sz="2770" dirty="0">
+                <a:solidFill>
+                  <a:srgbClr val="64748B"/>
+                </a:solidFill>
+              </a:rPr>
+              <a:t>Concatenate</a:t>
+            </a:r>
+          </a:p>
+        </p:txBody>
+      </p:sp>
+      <p:cxnSp>
+        <p:nvCxnSpPr>
+          <p:cNvPr id="72" name="Connector: Elbow 71">
+            <a:extLst>
+              <a:ext uri="{FF2B5EF4-FFF2-40B4-BE49-F238E27FC236}">
+                <a16:creationId xmlns:a16="http://schemas.microsoft.com/office/drawing/2014/main" id="{78896FF7-A696-1F27-CF76-2FAD06C10940}"/>
+              </a:ext>
+            </a:extLst>
+          </p:cNvPr>
+          <p:cNvCxnSpPr>
+            <a:cxnSpLocks/>
+            <a:stCxn id="103" idx="3"/>
+            <a:endCxn id="8" idx="0"/>
+          </p:cNvCxnSpPr>
+          <p:nvPr/>
+        </p:nvCxnSpPr>
+        <p:spPr>
+          <a:xfrm>
+            <a:off x="9093540" y="4410489"/>
+            <a:ext cx="1885725" cy="1097015"/>
+          </a:xfrm>
+          <a:prstGeom prst="bentConnector2">
+            <a:avLst/>
+          </a:prstGeom>
+          <a:ln w="63500">
+            <a:solidFill>
+              <a:srgbClr val="94A3B8"/>
+            </a:solidFill>
+            <a:tailEnd type="triangle"/>
+          </a:ln>
+        </p:spPr>
+        <p:style>
+          <a:lnRef idx="2">
+            <a:schemeClr val="accent1"/>
+          </a:lnRef>
+          <a:fillRef idx="0">
+            <a:schemeClr val="accent1"/>
+          </a:fillRef>
+          <a:effectRef idx="1">
+            <a:schemeClr val="accent1"/>
+          </a:effectRef>
+          <a:fontRef idx="minor">
+            <a:schemeClr val="tx1"/>
+          </a:fontRef>
+        </p:style>
+      </p:cxnSp>
+      <p:sp>
+        <p:nvSpPr>
+          <p:cNvPr id="75" name="TextBox 74">
+            <a:extLst>
+              <a:ext uri="{FF2B5EF4-FFF2-40B4-BE49-F238E27FC236}">
+                <a16:creationId xmlns:a16="http://schemas.microsoft.com/office/drawing/2014/main" id="{440C12B5-E80B-2FCC-B3F6-597FD387197A}"/>
+              </a:ext>
+            </a:extLst>
+          </p:cNvPr>
+          <p:cNvSpPr txBox="1"/>
+          <p:nvPr/>
+        </p:nvSpPr>
+        <p:spPr>
+          <a:xfrm>
+            <a:off x="12968268" y="7120977"/>
+            <a:ext cx="2194190" cy="523220"/>
+          </a:xfrm>
+          <a:prstGeom prst="rect">
+            <a:avLst/>
+          </a:prstGeom>
+          <a:noFill/>
+        </p:spPr>
+        <p:txBody>
+          <a:bodyPr wrap="none" rtlCol="0">
+            <a:spAutoFit/>
+          </a:bodyPr>
+          <a:lstStyle/>
+          <a:p>
+            <a:r>
+              <a:rPr lang="en-US" sz="2770" dirty="0">
+                <a:solidFill>
+                  <a:srgbClr val="64748B"/>
+                </a:solidFill>
+              </a:rPr>
+              <a:t>Concatenate</a:t>
+            </a:r>
+          </a:p>
+        </p:txBody>
+      </p:sp>
+      <p:sp>
+        <p:nvSpPr>
+          <p:cNvPr id="76" name="TextBox 75">
+            <a:extLst>
+              <a:ext uri="{FF2B5EF4-FFF2-40B4-BE49-F238E27FC236}">
+                <a16:creationId xmlns:a16="http://schemas.microsoft.com/office/drawing/2014/main" id="{2139DCE6-ED10-D476-E457-487D6AFEA05D}"/>
+              </a:ext>
+            </a:extLst>
+          </p:cNvPr>
+          <p:cNvSpPr txBox="1"/>
+          <p:nvPr/>
+        </p:nvSpPr>
+        <p:spPr>
+          <a:xfrm>
+            <a:off x="12968268" y="8719701"/>
+            <a:ext cx="2194190" cy="523220"/>
+          </a:xfrm>
+          <a:prstGeom prst="rect">
+            <a:avLst/>
+          </a:prstGeom>
+          <a:noFill/>
+        </p:spPr>
+        <p:txBody>
+          <a:bodyPr wrap="none" rtlCol="0">
+            <a:spAutoFit/>
+          </a:bodyPr>
+          <a:lstStyle/>
+          <a:p>
+            <a:r>
+              <a:rPr lang="en-US" sz="2770" dirty="0">
+                <a:solidFill>
+                  <a:srgbClr val="64748B"/>
+                </a:solidFill>
+              </a:rPr>
+              <a:t>Concatenate</a:t>
+            </a:r>
+          </a:p>
+        </p:txBody>
+      </p:sp>
+      <p:sp>
+        <p:nvSpPr>
+          <p:cNvPr id="77" name="TextBox 76">
+            <a:extLst>
+              <a:ext uri="{FF2B5EF4-FFF2-40B4-BE49-F238E27FC236}">
+                <a16:creationId xmlns:a16="http://schemas.microsoft.com/office/drawing/2014/main" id="{1574E929-D4DE-2BBB-89F4-C5F300AAA7DA}"/>
+              </a:ext>
+            </a:extLst>
+          </p:cNvPr>
+          <p:cNvSpPr txBox="1"/>
+          <p:nvPr/>
+        </p:nvSpPr>
+        <p:spPr>
+          <a:xfrm>
+            <a:off x="12968268" y="10351223"/>
+            <a:ext cx="2194190" cy="523220"/>
+          </a:xfrm>
+          <a:prstGeom prst="rect">
+            <a:avLst/>
+          </a:prstGeom>
+          <a:noFill/>
+        </p:spPr>
+        <p:txBody>
+          <a:bodyPr wrap="none" rtlCol="0">
+            <a:spAutoFit/>
+          </a:bodyPr>
+          <a:lstStyle/>
+          <a:p>
+            <a:r>
+              <a:rPr lang="en-US" sz="2770" dirty="0">
+                <a:solidFill>
+                  <a:srgbClr val="64748B"/>
+                </a:solidFill>
+              </a:rPr>
+              <a:t>Concatenate</a:t>
+            </a:r>
+          </a:p>
+        </p:txBody>
+      </p:sp>
+      <p:sp>
+        <p:nvSpPr>
+          <p:cNvPr id="78" name="TextBox 77">
+            <a:extLst>
+              <a:ext uri="{FF2B5EF4-FFF2-40B4-BE49-F238E27FC236}">
+                <a16:creationId xmlns:a16="http://schemas.microsoft.com/office/drawing/2014/main" id="{687762A2-F363-C31E-CDC1-EC02EEDBCAA1}"/>
+              </a:ext>
+            </a:extLst>
+          </p:cNvPr>
+          <p:cNvSpPr txBox="1"/>
+          <p:nvPr/>
+        </p:nvSpPr>
+        <p:spPr>
+          <a:xfrm>
+            <a:off x="12968268" y="11949947"/>
+            <a:ext cx="2194190" cy="523220"/>
+          </a:xfrm>
+          <a:prstGeom prst="rect">
+            <a:avLst/>
+          </a:prstGeom>
+          <a:noFill/>
+        </p:spPr>
+        <p:txBody>
+          <a:bodyPr wrap="none" rtlCol="0">
+            <a:spAutoFit/>
+          </a:bodyPr>
+          <a:lstStyle/>
+          <a:p>
+            <a:r>
+              <a:rPr lang="en-US" sz="2770" dirty="0">
+                <a:solidFill>
+                  <a:srgbClr val="64748B"/>
+                </a:solidFill>
+              </a:rPr>
+              <a:t>Concatenate</a:t>
+            </a:r>
+          </a:p>
+        </p:txBody>
+      </p:sp>
       <p:grpSp>
         <p:nvGrpSpPr>
-          <p:cNvPr id="2" name="Group 1">
+          <p:cNvPr id="112" name="Group 111">
             <a:extLst>
               <a:ext uri="{FF2B5EF4-FFF2-40B4-BE49-F238E27FC236}">
-                <a16:creationId xmlns:a16="http://schemas.microsoft.com/office/drawing/2014/main" id="{6CB36369-0B42-E86C-74C4-816D14710F66}"/>
+                <a16:creationId xmlns:a16="http://schemas.microsoft.com/office/drawing/2014/main" id="{46EDCFDC-58A5-444D-60D3-393E84E8FCB3}"/>
               </a:ext>
             </a:extLst>
           </p:cNvPr>
@@ -2996,17 +4616,2113 @@
         <p:grpSpPr>
           <a:xfrm>
             <a:off x="6942531" y="3177407"/>
-            <a:ext cx="13738219" cy="11603392"/>
-            <a:chOff x="6942531" y="3177407"/>
-            <a:chExt cx="13738219" cy="11603392"/>
+            <a:ext cx="2151009" cy="2147482"/>
+            <a:chOff x="3960955" y="5881915"/>
+            <a:chExt cx="2151009" cy="2147482"/>
+          </a:xfrm>
+        </p:grpSpPr>
+        <p:pic>
+          <p:nvPicPr>
+            <p:cNvPr id="105" name="Picture 104" descr="A colorful dots on a black background&#10;&#10;Description automatically generated">
+              <a:extLst>
+                <a:ext uri="{FF2B5EF4-FFF2-40B4-BE49-F238E27FC236}">
+                  <a16:creationId xmlns:a16="http://schemas.microsoft.com/office/drawing/2014/main" id="{EB2C7843-B592-84C5-8E11-8E88FC90C24F}"/>
+                </a:ext>
+              </a:extLst>
+            </p:cNvPr>
+            <p:cNvPicPr>
+              <a:picLocks noChangeAspect="1"/>
+            </p:cNvPicPr>
+            <p:nvPr/>
+          </p:nvPicPr>
+          <p:blipFill>
+            <a:blip r:embed="rId2">
+              <a:extLst>
+                <a:ext uri="{28A0092B-C50C-407E-A947-70E740481C1C}">
+                  <a14:useLocalDpi xmlns:a14="http://schemas.microsoft.com/office/drawing/2010/main" val="0"/>
+                </a:ext>
+              </a:extLst>
+            </a:blip>
+            <a:stretch>
+              <a:fillRect/>
+            </a:stretch>
+          </p:blipFill>
+          <p:spPr>
+            <a:xfrm>
+              <a:off x="3960955" y="5881915"/>
+              <a:ext cx="1828800" cy="1828800"/>
+            </a:xfrm>
+            <a:prstGeom prst="rect">
+              <a:avLst/>
+            </a:prstGeom>
+          </p:spPr>
+        </p:pic>
+        <p:pic>
+          <p:nvPicPr>
+            <p:cNvPr id="107" name="Picture 106" descr="A black and white speckled background&#10;&#10;Description automatically generated">
+              <a:extLst>
+                <a:ext uri="{FF2B5EF4-FFF2-40B4-BE49-F238E27FC236}">
+                  <a16:creationId xmlns:a16="http://schemas.microsoft.com/office/drawing/2014/main" id="{B4F202AD-EA3B-7678-FFF1-2B7E984AED13}"/>
+                </a:ext>
+              </a:extLst>
+            </p:cNvPr>
+            <p:cNvPicPr>
+              <a:picLocks noChangeAspect="1"/>
+            </p:cNvPicPr>
+            <p:nvPr/>
+          </p:nvPicPr>
+          <p:blipFill>
+            <a:blip r:embed="rId3">
+              <a:extLst>
+                <a:ext uri="{28A0092B-C50C-407E-A947-70E740481C1C}">
+                  <a14:useLocalDpi xmlns:a14="http://schemas.microsoft.com/office/drawing/2010/main" val="0"/>
+                </a:ext>
+              </a:extLst>
+            </a:blip>
+            <a:stretch>
+              <a:fillRect/>
+            </a:stretch>
+          </p:blipFill>
+          <p:spPr>
+            <a:xfrm>
+              <a:off x="4068358" y="5988142"/>
+              <a:ext cx="1828800" cy="1828800"/>
+            </a:xfrm>
+            <a:prstGeom prst="rect">
+              <a:avLst/>
+            </a:prstGeom>
+          </p:spPr>
+        </p:pic>
+        <p:pic>
+          <p:nvPicPr>
+            <p:cNvPr id="109" name="Picture 108" descr="A map of a city&#10;&#10;Description automatically generated">
+              <a:extLst>
+                <a:ext uri="{FF2B5EF4-FFF2-40B4-BE49-F238E27FC236}">
+                  <a16:creationId xmlns:a16="http://schemas.microsoft.com/office/drawing/2014/main" id="{7F68C620-1047-B982-1ACF-82AAFADBD487}"/>
+                </a:ext>
+              </a:extLst>
+            </p:cNvPr>
+            <p:cNvPicPr>
+              <a:picLocks noChangeAspect="1"/>
+            </p:cNvPicPr>
+            <p:nvPr/>
+          </p:nvPicPr>
+          <p:blipFill>
+            <a:blip r:embed="rId4">
+              <a:extLst>
+                <a:ext uri="{28A0092B-C50C-407E-A947-70E740481C1C}">
+                  <a14:useLocalDpi xmlns:a14="http://schemas.microsoft.com/office/drawing/2010/main" val="0"/>
+                </a:ext>
+              </a:extLst>
+            </a:blip>
+            <a:stretch>
+              <a:fillRect/>
+            </a:stretch>
+          </p:blipFill>
+          <p:spPr>
+            <a:xfrm>
+              <a:off x="4175761" y="6094369"/>
+              <a:ext cx="1828800" cy="1828800"/>
+            </a:xfrm>
+            <a:prstGeom prst="rect">
+              <a:avLst/>
+            </a:prstGeom>
+          </p:spPr>
+        </p:pic>
+        <p:pic>
+          <p:nvPicPr>
+            <p:cNvPr id="103" name="Picture 102" descr="A black and white image of a grid&#10;&#10;Description automatically generated with medium confidence">
+              <a:extLst>
+                <a:ext uri="{FF2B5EF4-FFF2-40B4-BE49-F238E27FC236}">
+                  <a16:creationId xmlns:a16="http://schemas.microsoft.com/office/drawing/2014/main" id="{AFFF8F49-1746-4DC7-04F2-20291270E705}"/>
+                </a:ext>
+              </a:extLst>
+            </p:cNvPr>
+            <p:cNvPicPr>
+              <a:picLocks noChangeAspect="1"/>
+            </p:cNvPicPr>
+            <p:nvPr/>
+          </p:nvPicPr>
+          <p:blipFill>
+            <a:blip r:embed="rId5">
+              <a:extLst>
+                <a:ext uri="{28A0092B-C50C-407E-A947-70E740481C1C}">
+                  <a14:useLocalDpi xmlns:a14="http://schemas.microsoft.com/office/drawing/2010/main" val="0"/>
+                </a:ext>
+              </a:extLst>
+            </a:blip>
+            <a:stretch>
+              <a:fillRect/>
+            </a:stretch>
+          </p:blipFill>
+          <p:spPr>
+            <a:xfrm>
+              <a:off x="4283164" y="6200597"/>
+              <a:ext cx="1828800" cy="1828800"/>
+            </a:xfrm>
+            <a:prstGeom prst="rect">
+              <a:avLst/>
+            </a:prstGeom>
+          </p:spPr>
+        </p:pic>
+      </p:grpSp>
+      <p:pic>
+        <p:nvPicPr>
+          <p:cNvPr id="116" name="Picture 115" descr="A colorful image of a building&#10;&#10;Description automatically generated with medium confidence">
+            <a:extLst>
+              <a:ext uri="{FF2B5EF4-FFF2-40B4-BE49-F238E27FC236}">
+                <a16:creationId xmlns:a16="http://schemas.microsoft.com/office/drawing/2014/main" id="{749793FC-BCA2-D16D-1927-43F8F471F41D}"/>
+              </a:ext>
+            </a:extLst>
+          </p:cNvPr>
+          <p:cNvPicPr>
+            <a:picLocks noChangeAspect="1"/>
+          </p:cNvPicPr>
+          <p:nvPr/>
+        </p:nvPicPr>
+        <p:blipFill>
+          <a:blip r:embed="rId6">
+            <a:extLst>
+              <a:ext uri="{28A0092B-C50C-407E-A947-70E740481C1C}">
+                <a14:useLocalDpi xmlns:a14="http://schemas.microsoft.com/office/drawing/2010/main" val="0"/>
+              </a:ext>
+            </a:extLst>
+          </a:blip>
+          <a:stretch>
+            <a:fillRect/>
+          </a:stretch>
+        </p:blipFill>
+        <p:spPr>
+          <a:xfrm>
+            <a:off x="18851950" y="3496089"/>
+            <a:ext cx="1828800" cy="1828800"/>
+          </a:xfrm>
+          <a:prstGeom prst="rect">
+            <a:avLst/>
+          </a:prstGeom>
+        </p:spPr>
+      </p:pic>
+      <p:cxnSp>
+        <p:nvCxnSpPr>
+          <p:cNvPr id="117" name="Connector: Elbow 116">
+            <a:extLst>
+              <a:ext uri="{FF2B5EF4-FFF2-40B4-BE49-F238E27FC236}">
+                <a16:creationId xmlns:a16="http://schemas.microsoft.com/office/drawing/2014/main" id="{5A791787-1AAA-DA55-6465-57F1D0D2AD0B}"/>
+              </a:ext>
+            </a:extLst>
+          </p:cNvPr>
+          <p:cNvCxnSpPr>
+            <a:cxnSpLocks/>
+            <a:stCxn id="22" idx="0"/>
+            <a:endCxn id="116" idx="1"/>
+          </p:cNvCxnSpPr>
+          <p:nvPr/>
+        </p:nvCxnSpPr>
+        <p:spPr>
+          <a:xfrm rot="5400000" flipH="1" flipV="1">
+            <a:off x="17453200" y="4108755"/>
+            <a:ext cx="1097015" cy="1700485"/>
+          </a:xfrm>
+          <a:prstGeom prst="bentConnector2">
+            <a:avLst/>
+          </a:prstGeom>
+          <a:ln w="63500">
+            <a:solidFill>
+              <a:srgbClr val="94A3B8"/>
+            </a:solidFill>
+            <a:tailEnd type="triangle"/>
+          </a:ln>
+        </p:spPr>
+        <p:style>
+          <a:lnRef idx="2">
+            <a:schemeClr val="accent1"/>
+          </a:lnRef>
+          <a:fillRef idx="0">
+            <a:schemeClr val="accent1"/>
+          </a:fillRef>
+          <a:effectRef idx="1">
+            <a:schemeClr val="accent1"/>
+          </a:effectRef>
+          <a:fontRef idx="minor">
+            <a:schemeClr val="tx1"/>
+          </a:fontRef>
+        </p:style>
+      </p:cxnSp>
+    </p:spTree>
+    <p:extLst>
+      <p:ext uri="{BB962C8B-B14F-4D97-AF65-F5344CB8AC3E}">
+        <p14:creationId xmlns:p14="http://schemas.microsoft.com/office/powerpoint/2010/main" val="2889124335"/>
+      </p:ext>
+    </p:extLst>
+  </p:cSld>
+  <p:clrMapOvr>
+    <a:masterClrMapping/>
+  </p:clrMapOvr>
+</p:sld>
+</file>
+
+<file path=ppt/slides/slide2.xml><?xml version="1.0" encoding="utf-8"?>
+<p:sld xmlns:a="http://schemas.openxmlformats.org/drawingml/2006/main" xmlns:r="http://schemas.openxmlformats.org/officeDocument/2006/relationships" xmlns:p="http://schemas.openxmlformats.org/presentationml/2006/main">
+  <p:cSld>
+    <p:spTree>
+      <p:nvGrpSpPr>
+        <p:cNvPr id="1" name=""/>
+        <p:cNvGrpSpPr/>
+        <p:nvPr/>
+      </p:nvGrpSpPr>
+      <p:grpSpPr>
+        <a:xfrm>
+          <a:off x="0" y="0"/>
+          <a:ext cx="0" cy="0"/>
+          <a:chOff x="0" y="0"/>
+          <a:chExt cx="0" cy="0"/>
+        </a:xfrm>
+      </p:grpSpPr>
+      <p:sp>
+        <p:nvSpPr>
+          <p:cNvPr id="6" name="Rectangle: Rounded Corners 5">
+            <a:extLst>
+              <a:ext uri="{FF2B5EF4-FFF2-40B4-BE49-F238E27FC236}">
+                <a16:creationId xmlns:a16="http://schemas.microsoft.com/office/drawing/2014/main" id="{3073B442-FD38-7E71-7E91-E33E5CD4B7C9}"/>
+              </a:ext>
+            </a:extLst>
+          </p:cNvPr>
+          <p:cNvSpPr/>
+          <p:nvPr/>
+        </p:nvSpPr>
+        <p:spPr>
+          <a:xfrm>
+            <a:off x="14647434" y="14980886"/>
+            <a:ext cx="2462981" cy="1156273"/>
+          </a:xfrm>
+          <a:prstGeom prst="roundRect">
+            <a:avLst/>
+          </a:prstGeom>
+          <a:solidFill>
+            <a:srgbClr val="E59A32"/>
+          </a:solidFill>
+          <a:ln>
+            <a:solidFill>
+              <a:srgbClr val="94A3B8"/>
+            </a:solidFill>
+          </a:ln>
+        </p:spPr>
+        <p:style>
+          <a:lnRef idx="2">
+            <a:schemeClr val="accent1">
+              <a:shade val="15000"/>
+            </a:schemeClr>
+          </a:lnRef>
+          <a:fillRef idx="1">
+            <a:schemeClr val="accent1"/>
+          </a:fillRef>
+          <a:effectRef idx="0">
+            <a:schemeClr val="accent1"/>
+          </a:effectRef>
+          <a:fontRef idx="minor">
+            <a:schemeClr val="lt1"/>
+          </a:fontRef>
+        </p:style>
+        <p:txBody>
+          <a:bodyPr rtlCol="0" anchor="ctr"/>
+          <a:lstStyle/>
+          <a:p>
+            <a:pPr algn="ctr"/>
+            <a:r>
+              <a:rPr lang="en-US" sz="2770" dirty="0"/>
+              <a:t>Bottleneck</a:t>
+            </a:r>
+          </a:p>
+          <a:p>
+            <a:pPr algn="ctr"/>
+            <a:r>
+              <a:rPr lang="en-US" altLang="zh-CN" sz="2770" dirty="0"/>
+              <a:t>256×16×16</a:t>
+            </a:r>
+            <a:endParaRPr lang="en-US" sz="2770" dirty="0"/>
+          </a:p>
+        </p:txBody>
+      </p:sp>
+      <p:sp>
+        <p:nvSpPr>
+          <p:cNvPr id="7" name="Rectangle: Rounded Corners 6">
+            <a:extLst>
+              <a:ext uri="{FF2B5EF4-FFF2-40B4-BE49-F238E27FC236}">
+                <a16:creationId xmlns:a16="http://schemas.microsoft.com/office/drawing/2014/main" id="{31AAA3E5-8C2C-5F4C-38E5-B15B566EF939}"/>
+              </a:ext>
+            </a:extLst>
+          </p:cNvPr>
+          <p:cNvSpPr/>
+          <p:nvPr/>
+        </p:nvSpPr>
+        <p:spPr>
+          <a:xfrm>
+            <a:off x="11561334" y="6863864"/>
+            <a:ext cx="2462981" cy="1156273"/>
+          </a:xfrm>
+          <a:prstGeom prst="roundRect">
+            <a:avLst/>
+          </a:prstGeom>
+          <a:ln>
+            <a:solidFill>
+              <a:srgbClr val="94A3B8"/>
+            </a:solidFill>
+          </a:ln>
+        </p:spPr>
+        <p:style>
+          <a:lnRef idx="2">
+            <a:schemeClr val="accent1">
+              <a:shade val="15000"/>
+            </a:schemeClr>
+          </a:lnRef>
+          <a:fillRef idx="1">
+            <a:schemeClr val="accent1"/>
+          </a:fillRef>
+          <a:effectRef idx="0">
+            <a:schemeClr val="accent1"/>
+          </a:effectRef>
+          <a:fontRef idx="minor">
+            <a:schemeClr val="lt1"/>
+          </a:fontRef>
+        </p:style>
+        <p:txBody>
+          <a:bodyPr rtlCol="0" anchor="ctr"/>
+          <a:lstStyle/>
+          <a:p>
+            <a:pPr algn="ctr"/>
+            <a:r>
+              <a:rPr lang="en-US" sz="2770" dirty="0" err="1"/>
+              <a:t>ResBlock</a:t>
+            </a:r>
+            <a:endParaRPr lang="en-US" sz="2770" dirty="0"/>
+          </a:p>
+          <a:p>
+            <a:pPr algn="ctr"/>
+            <a:r>
+              <a:rPr lang="en-US" altLang="zh-CN" sz="2770" dirty="0"/>
+              <a:t>16×256×256</a:t>
+            </a:r>
+            <a:endParaRPr lang="en-US" sz="2770" dirty="0"/>
+          </a:p>
+        </p:txBody>
+      </p:sp>
+      <p:sp>
+        <p:nvSpPr>
+          <p:cNvPr id="8" name="Rectangle: Rounded Corners 7">
+            <a:extLst>
+              <a:ext uri="{FF2B5EF4-FFF2-40B4-BE49-F238E27FC236}">
+                <a16:creationId xmlns:a16="http://schemas.microsoft.com/office/drawing/2014/main" id="{F3277498-B908-2D94-7D68-518940A34E8E}"/>
+              </a:ext>
+            </a:extLst>
+          </p:cNvPr>
+          <p:cNvSpPr/>
+          <p:nvPr/>
+        </p:nvSpPr>
+        <p:spPr>
+          <a:xfrm>
+            <a:off x="11561334" y="8451529"/>
+            <a:ext cx="2462981" cy="1156273"/>
+          </a:xfrm>
+          <a:prstGeom prst="roundRect">
+            <a:avLst/>
+          </a:prstGeom>
+          <a:solidFill>
+            <a:srgbClr val="356D9A"/>
+          </a:solidFill>
+          <a:ln>
+            <a:solidFill>
+              <a:srgbClr val="94A3B8"/>
+            </a:solidFill>
+          </a:ln>
+        </p:spPr>
+        <p:style>
+          <a:lnRef idx="2">
+            <a:schemeClr val="accent1">
+              <a:shade val="15000"/>
+            </a:schemeClr>
+          </a:lnRef>
+          <a:fillRef idx="1">
+            <a:schemeClr val="accent1"/>
+          </a:fillRef>
+          <a:effectRef idx="0">
+            <a:schemeClr val="accent1"/>
+          </a:effectRef>
+          <a:fontRef idx="minor">
+            <a:schemeClr val="lt1"/>
+          </a:fontRef>
+        </p:style>
+        <p:txBody>
+          <a:bodyPr rtlCol="0" anchor="ctr"/>
+          <a:lstStyle/>
+          <a:p>
+            <a:pPr algn="ctr"/>
+            <a:r>
+              <a:rPr lang="en-US" sz="2770" dirty="0"/>
+              <a:t>Encoder1</a:t>
+            </a:r>
+          </a:p>
+          <a:p>
+            <a:pPr algn="ctr"/>
+            <a:r>
+              <a:rPr lang="en-US" altLang="zh-CN" sz="2770" dirty="0"/>
+              <a:t>32×128×128</a:t>
+            </a:r>
+            <a:endParaRPr lang="en-US" sz="2770" dirty="0"/>
+          </a:p>
+        </p:txBody>
+      </p:sp>
+      <p:sp>
+        <p:nvSpPr>
+          <p:cNvPr id="9" name="Rectangle: Rounded Corners 8">
+            <a:extLst>
+              <a:ext uri="{FF2B5EF4-FFF2-40B4-BE49-F238E27FC236}">
+                <a16:creationId xmlns:a16="http://schemas.microsoft.com/office/drawing/2014/main" id="{EFB15062-1A16-42C5-C055-751D62481FF9}"/>
+              </a:ext>
+            </a:extLst>
+          </p:cNvPr>
+          <p:cNvSpPr/>
+          <p:nvPr/>
+        </p:nvSpPr>
+        <p:spPr>
+          <a:xfrm>
+            <a:off x="11561334" y="10053942"/>
+            <a:ext cx="2462981" cy="1156273"/>
+          </a:xfrm>
+          <a:prstGeom prst="roundRect">
+            <a:avLst/>
+          </a:prstGeom>
+          <a:solidFill>
+            <a:srgbClr val="356D9A"/>
+          </a:solidFill>
+          <a:ln>
+            <a:solidFill>
+              <a:srgbClr val="94A3B8"/>
+            </a:solidFill>
+          </a:ln>
+        </p:spPr>
+        <p:style>
+          <a:lnRef idx="2">
+            <a:schemeClr val="accent1">
+              <a:shade val="15000"/>
+            </a:schemeClr>
+          </a:lnRef>
+          <a:fillRef idx="1">
+            <a:schemeClr val="accent1"/>
+          </a:fillRef>
+          <a:effectRef idx="0">
+            <a:schemeClr val="accent1"/>
+          </a:effectRef>
+          <a:fontRef idx="minor">
+            <a:schemeClr val="lt1"/>
+          </a:fontRef>
+        </p:style>
+        <p:txBody>
+          <a:bodyPr rtlCol="0" anchor="ctr"/>
+          <a:lstStyle/>
+          <a:p>
+            <a:pPr algn="ctr"/>
+            <a:r>
+              <a:rPr lang="en-US" sz="2770" dirty="0"/>
+              <a:t>Encoder2</a:t>
+            </a:r>
+          </a:p>
+          <a:p>
+            <a:pPr algn="ctr"/>
+            <a:r>
+              <a:rPr lang="en-US" altLang="zh-CN" sz="2770" dirty="0"/>
+              <a:t>64×64×64</a:t>
+            </a:r>
+            <a:endParaRPr lang="en-US" sz="2770" dirty="0"/>
+          </a:p>
+        </p:txBody>
+      </p:sp>
+      <p:sp>
+        <p:nvSpPr>
+          <p:cNvPr id="10" name="Rectangle: Rounded Corners 9">
+            <a:extLst>
+              <a:ext uri="{FF2B5EF4-FFF2-40B4-BE49-F238E27FC236}">
+                <a16:creationId xmlns:a16="http://schemas.microsoft.com/office/drawing/2014/main" id="{36785A65-BD3A-FA0B-AE59-20418403B834}"/>
+              </a:ext>
+            </a:extLst>
+          </p:cNvPr>
+          <p:cNvSpPr/>
+          <p:nvPr/>
+        </p:nvSpPr>
+        <p:spPr>
+          <a:xfrm>
+            <a:off x="11561334" y="11656355"/>
+            <a:ext cx="2462980" cy="1156273"/>
+          </a:xfrm>
+          <a:prstGeom prst="roundRect">
+            <a:avLst/>
+          </a:prstGeom>
+          <a:solidFill>
+            <a:srgbClr val="356D9A"/>
+          </a:solidFill>
+          <a:ln>
+            <a:solidFill>
+              <a:srgbClr val="94A3B8"/>
+            </a:solidFill>
+          </a:ln>
+        </p:spPr>
+        <p:style>
+          <a:lnRef idx="2">
+            <a:schemeClr val="accent1">
+              <a:shade val="15000"/>
+            </a:schemeClr>
+          </a:lnRef>
+          <a:fillRef idx="1">
+            <a:schemeClr val="accent1"/>
+          </a:fillRef>
+          <a:effectRef idx="0">
+            <a:schemeClr val="accent1"/>
+          </a:effectRef>
+          <a:fontRef idx="minor">
+            <a:schemeClr val="lt1"/>
+          </a:fontRef>
+        </p:style>
+        <p:txBody>
+          <a:bodyPr rtlCol="0" anchor="ctr"/>
+          <a:lstStyle/>
+          <a:p>
+            <a:pPr algn="ctr"/>
+            <a:r>
+              <a:rPr lang="en-US" sz="2770" dirty="0"/>
+              <a:t>Encoder3</a:t>
+            </a:r>
+          </a:p>
+          <a:p>
+            <a:pPr algn="ctr"/>
+            <a:r>
+              <a:rPr lang="en-US" altLang="zh-CN" sz="2770" dirty="0"/>
+              <a:t>128×32×32</a:t>
+            </a:r>
+            <a:endParaRPr lang="en-US" sz="2770" dirty="0"/>
+          </a:p>
+        </p:txBody>
+      </p:sp>
+      <p:sp>
+        <p:nvSpPr>
+          <p:cNvPr id="11" name="Rectangle: Rounded Corners 10">
+            <a:extLst>
+              <a:ext uri="{FF2B5EF4-FFF2-40B4-BE49-F238E27FC236}">
+                <a16:creationId xmlns:a16="http://schemas.microsoft.com/office/drawing/2014/main" id="{14725720-960E-B743-79A9-3D6D84C20626}"/>
+              </a:ext>
+            </a:extLst>
+          </p:cNvPr>
+          <p:cNvSpPr/>
+          <p:nvPr/>
+        </p:nvSpPr>
+        <p:spPr>
+          <a:xfrm>
+            <a:off x="11561334" y="13258766"/>
+            <a:ext cx="2462981" cy="1156273"/>
+          </a:xfrm>
+          <a:prstGeom prst="roundRect">
+            <a:avLst/>
+          </a:prstGeom>
+          <a:solidFill>
+            <a:srgbClr val="356D9A"/>
+          </a:solidFill>
+          <a:ln>
+            <a:solidFill>
+              <a:srgbClr val="94A3B8"/>
+            </a:solidFill>
+          </a:ln>
+        </p:spPr>
+        <p:style>
+          <a:lnRef idx="2">
+            <a:schemeClr val="accent1">
+              <a:shade val="15000"/>
+            </a:schemeClr>
+          </a:lnRef>
+          <a:fillRef idx="1">
+            <a:schemeClr val="accent1"/>
+          </a:fillRef>
+          <a:effectRef idx="0">
+            <a:schemeClr val="accent1"/>
+          </a:effectRef>
+          <a:fontRef idx="minor">
+            <a:schemeClr val="lt1"/>
+          </a:fontRef>
+        </p:style>
+        <p:txBody>
+          <a:bodyPr rtlCol="0" anchor="ctr"/>
+          <a:lstStyle/>
+          <a:p>
+            <a:pPr algn="ctr"/>
+            <a:r>
+              <a:rPr lang="en-US" sz="2770" dirty="0"/>
+              <a:t>Encoder4</a:t>
+            </a:r>
+          </a:p>
+          <a:p>
+            <a:pPr algn="ctr"/>
+            <a:r>
+              <a:rPr lang="en-US" altLang="zh-CN" sz="2770" dirty="0"/>
+              <a:t>256×16×16</a:t>
+            </a:r>
+            <a:endParaRPr lang="en-US" sz="2770" dirty="0"/>
+          </a:p>
+        </p:txBody>
+      </p:sp>
+      <p:cxnSp>
+        <p:nvCxnSpPr>
+          <p:cNvPr id="12" name="Straight Arrow Connector 11">
+            <a:extLst>
+              <a:ext uri="{FF2B5EF4-FFF2-40B4-BE49-F238E27FC236}">
+                <a16:creationId xmlns:a16="http://schemas.microsoft.com/office/drawing/2014/main" id="{9BBC57EE-C889-CD3C-D13E-BB12E2B1E288}"/>
+              </a:ext>
+            </a:extLst>
+          </p:cNvPr>
+          <p:cNvCxnSpPr>
+            <a:cxnSpLocks/>
+          </p:cNvCxnSpPr>
+          <p:nvPr/>
+        </p:nvCxnSpPr>
+        <p:spPr>
+          <a:xfrm>
+            <a:off x="12792824" y="8014607"/>
+            <a:ext cx="0" cy="442452"/>
+          </a:xfrm>
+          <a:prstGeom prst="straightConnector1">
+            <a:avLst/>
+          </a:prstGeom>
+          <a:ln w="63500">
+            <a:solidFill>
+              <a:srgbClr val="94A3B8"/>
+            </a:solidFill>
+            <a:tailEnd type="triangle"/>
+          </a:ln>
+        </p:spPr>
+        <p:style>
+          <a:lnRef idx="2">
+            <a:schemeClr val="accent1"/>
+          </a:lnRef>
+          <a:fillRef idx="0">
+            <a:schemeClr val="accent1"/>
+          </a:fillRef>
+          <a:effectRef idx="1">
+            <a:schemeClr val="accent1"/>
+          </a:effectRef>
+          <a:fontRef idx="minor">
+            <a:schemeClr val="tx1"/>
+          </a:fontRef>
+        </p:style>
+      </p:cxnSp>
+      <p:cxnSp>
+        <p:nvCxnSpPr>
+          <p:cNvPr id="13" name="Straight Arrow Connector 12">
+            <a:extLst>
+              <a:ext uri="{FF2B5EF4-FFF2-40B4-BE49-F238E27FC236}">
+                <a16:creationId xmlns:a16="http://schemas.microsoft.com/office/drawing/2014/main" id="{A188BA45-379E-B7FD-B0C1-C8DC0AE49EED}"/>
+              </a:ext>
+            </a:extLst>
+          </p:cNvPr>
+          <p:cNvCxnSpPr>
+            <a:cxnSpLocks/>
+          </p:cNvCxnSpPr>
+          <p:nvPr/>
+        </p:nvCxnSpPr>
+        <p:spPr>
+          <a:xfrm>
+            <a:off x="12792824" y="9602272"/>
+            <a:ext cx="0" cy="457200"/>
+          </a:xfrm>
+          <a:prstGeom prst="straightConnector1">
+            <a:avLst/>
+          </a:prstGeom>
+          <a:ln w="63500">
+            <a:solidFill>
+              <a:srgbClr val="94A3B8"/>
+            </a:solidFill>
+            <a:tailEnd type="triangle"/>
+          </a:ln>
+        </p:spPr>
+        <p:style>
+          <a:lnRef idx="2">
+            <a:schemeClr val="accent1"/>
+          </a:lnRef>
+          <a:fillRef idx="0">
+            <a:schemeClr val="accent1"/>
+          </a:fillRef>
+          <a:effectRef idx="1">
+            <a:schemeClr val="accent1"/>
+          </a:effectRef>
+          <a:fontRef idx="minor">
+            <a:schemeClr val="tx1"/>
+          </a:fontRef>
+        </p:style>
+      </p:cxnSp>
+      <p:cxnSp>
+        <p:nvCxnSpPr>
+          <p:cNvPr id="14" name="Straight Arrow Connector 13">
+            <a:extLst>
+              <a:ext uri="{FF2B5EF4-FFF2-40B4-BE49-F238E27FC236}">
+                <a16:creationId xmlns:a16="http://schemas.microsoft.com/office/drawing/2014/main" id="{2DC1129C-02CE-3E05-BE46-5CE84E361588}"/>
+              </a:ext>
+            </a:extLst>
+          </p:cNvPr>
+          <p:cNvCxnSpPr>
+            <a:cxnSpLocks/>
+          </p:cNvCxnSpPr>
+          <p:nvPr/>
+        </p:nvCxnSpPr>
+        <p:spPr>
+          <a:xfrm>
+            <a:off x="12792824" y="11204685"/>
+            <a:ext cx="0" cy="457200"/>
+          </a:xfrm>
+          <a:prstGeom prst="straightConnector1">
+            <a:avLst/>
+          </a:prstGeom>
+          <a:ln w="63500">
+            <a:solidFill>
+              <a:srgbClr val="94A3B8"/>
+            </a:solidFill>
+            <a:tailEnd type="triangle"/>
+          </a:ln>
+        </p:spPr>
+        <p:style>
+          <a:lnRef idx="2">
+            <a:schemeClr val="accent1"/>
+          </a:lnRef>
+          <a:fillRef idx="0">
+            <a:schemeClr val="accent1"/>
+          </a:fillRef>
+          <a:effectRef idx="1">
+            <a:schemeClr val="accent1"/>
+          </a:effectRef>
+          <a:fontRef idx="minor">
+            <a:schemeClr val="tx1"/>
+          </a:fontRef>
+        </p:style>
+      </p:cxnSp>
+      <p:cxnSp>
+        <p:nvCxnSpPr>
+          <p:cNvPr id="15" name="Straight Arrow Connector 14">
+            <a:extLst>
+              <a:ext uri="{FF2B5EF4-FFF2-40B4-BE49-F238E27FC236}">
+                <a16:creationId xmlns:a16="http://schemas.microsoft.com/office/drawing/2014/main" id="{27855FE2-1985-3B5F-F709-82214FE857E5}"/>
+              </a:ext>
+            </a:extLst>
+          </p:cNvPr>
+          <p:cNvCxnSpPr>
+            <a:cxnSpLocks/>
+          </p:cNvCxnSpPr>
+          <p:nvPr/>
+        </p:nvCxnSpPr>
+        <p:spPr>
+          <a:xfrm>
+            <a:off x="12792824" y="12807098"/>
+            <a:ext cx="0" cy="457200"/>
+          </a:xfrm>
+          <a:prstGeom prst="straightConnector1">
+            <a:avLst/>
+          </a:prstGeom>
+          <a:ln w="63500">
+            <a:solidFill>
+              <a:srgbClr val="94A3B8"/>
+            </a:solidFill>
+            <a:tailEnd type="triangle"/>
+          </a:ln>
+        </p:spPr>
+        <p:style>
+          <a:lnRef idx="2">
+            <a:schemeClr val="accent1"/>
+          </a:lnRef>
+          <a:fillRef idx="0">
+            <a:schemeClr val="accent1"/>
+          </a:fillRef>
+          <a:effectRef idx="1">
+            <a:schemeClr val="accent1"/>
+          </a:effectRef>
+          <a:fontRef idx="minor">
+            <a:schemeClr val="tx1"/>
+          </a:fontRef>
+        </p:style>
+      </p:cxnSp>
+      <p:sp>
+        <p:nvSpPr>
+          <p:cNvPr id="16" name="Rectangle: Rounded Corners 15">
+            <a:extLst>
+              <a:ext uri="{FF2B5EF4-FFF2-40B4-BE49-F238E27FC236}">
+                <a16:creationId xmlns:a16="http://schemas.microsoft.com/office/drawing/2014/main" id="{C4A88248-89FD-B7EF-A52F-7ECF63F6B744}"/>
+              </a:ext>
+            </a:extLst>
+          </p:cNvPr>
+          <p:cNvSpPr/>
+          <p:nvPr/>
+        </p:nvSpPr>
+        <p:spPr>
+          <a:xfrm>
+            <a:off x="17733534" y="6863864"/>
+            <a:ext cx="2462981" cy="1156273"/>
+          </a:xfrm>
+          <a:prstGeom prst="roundRect">
+            <a:avLst/>
+          </a:prstGeom>
+          <a:solidFill>
+            <a:srgbClr val="5266A8"/>
+          </a:solidFill>
+          <a:ln>
+            <a:solidFill>
+              <a:srgbClr val="94A3B8"/>
+            </a:solidFill>
+          </a:ln>
+        </p:spPr>
+        <p:style>
+          <a:lnRef idx="2">
+            <a:schemeClr val="accent1">
+              <a:shade val="15000"/>
+            </a:schemeClr>
+          </a:lnRef>
+          <a:fillRef idx="1">
+            <a:schemeClr val="accent1"/>
+          </a:fillRef>
+          <a:effectRef idx="0">
+            <a:schemeClr val="accent1"/>
+          </a:effectRef>
+          <a:fontRef idx="minor">
+            <a:schemeClr val="lt1"/>
+          </a:fontRef>
+        </p:style>
+        <p:txBody>
+          <a:bodyPr rtlCol="0" anchor="ctr"/>
+          <a:lstStyle/>
+          <a:p>
+            <a:pPr algn="ctr"/>
+            <a:r>
+              <a:rPr lang="en-US" sz="2770" dirty="0"/>
+              <a:t>CNN</a:t>
+            </a:r>
+          </a:p>
+          <a:p>
+            <a:pPr algn="ctr"/>
+            <a:r>
+              <a:rPr lang="en-US" sz="2770" dirty="0"/>
+              <a:t>1</a:t>
+            </a:r>
+            <a:r>
+              <a:rPr lang="en-US" altLang="zh-CN" sz="2770" dirty="0"/>
+              <a:t>×1×1</a:t>
+            </a:r>
+            <a:endParaRPr lang="en-US" sz="2770" dirty="0"/>
+          </a:p>
+        </p:txBody>
+      </p:sp>
+      <p:sp>
+        <p:nvSpPr>
+          <p:cNvPr id="17" name="Rectangle: Rounded Corners 16">
+            <a:extLst>
+              <a:ext uri="{FF2B5EF4-FFF2-40B4-BE49-F238E27FC236}">
+                <a16:creationId xmlns:a16="http://schemas.microsoft.com/office/drawing/2014/main" id="{DB09938F-9283-FD3E-1411-BD2CCA6F5449}"/>
+              </a:ext>
+            </a:extLst>
+          </p:cNvPr>
+          <p:cNvSpPr/>
+          <p:nvPr/>
+        </p:nvSpPr>
+        <p:spPr>
+          <a:xfrm>
+            <a:off x="17733534" y="8462589"/>
+            <a:ext cx="2462981" cy="1156273"/>
+          </a:xfrm>
+          <a:prstGeom prst="roundRect">
+            <a:avLst/>
+          </a:prstGeom>
+          <a:solidFill>
+            <a:srgbClr val="238A8D"/>
+          </a:solidFill>
+          <a:ln>
+            <a:solidFill>
+              <a:srgbClr val="94A3B8"/>
+            </a:solidFill>
+          </a:ln>
+        </p:spPr>
+        <p:style>
+          <a:lnRef idx="2">
+            <a:schemeClr val="accent1">
+              <a:shade val="15000"/>
+            </a:schemeClr>
+          </a:lnRef>
+          <a:fillRef idx="1">
+            <a:schemeClr val="accent1"/>
+          </a:fillRef>
+          <a:effectRef idx="0">
+            <a:schemeClr val="accent1"/>
+          </a:effectRef>
+          <a:fontRef idx="minor">
+            <a:schemeClr val="lt1"/>
+          </a:fontRef>
+        </p:style>
+        <p:txBody>
+          <a:bodyPr rtlCol="0" anchor="ctr"/>
+          <a:lstStyle/>
+          <a:p>
+            <a:pPr algn="ctr"/>
+            <a:r>
+              <a:rPr lang="en-US" sz="2770" dirty="0"/>
+              <a:t>Decoder4</a:t>
+            </a:r>
+          </a:p>
+          <a:p>
+            <a:pPr algn="ctr"/>
+            <a:r>
+              <a:rPr lang="en-US" altLang="zh-CN" sz="2770" dirty="0"/>
+              <a:t>32×128×128</a:t>
+            </a:r>
+            <a:endParaRPr lang="en-US" sz="2770" dirty="0"/>
+          </a:p>
+        </p:txBody>
+      </p:sp>
+      <p:sp>
+        <p:nvSpPr>
+          <p:cNvPr id="18" name="Rectangle: Rounded Corners 17">
+            <a:extLst>
+              <a:ext uri="{FF2B5EF4-FFF2-40B4-BE49-F238E27FC236}">
+                <a16:creationId xmlns:a16="http://schemas.microsoft.com/office/drawing/2014/main" id="{E82CDD23-2068-0485-29FA-FF86D15B9A5E}"/>
+              </a:ext>
+            </a:extLst>
+          </p:cNvPr>
+          <p:cNvSpPr/>
+          <p:nvPr/>
+        </p:nvSpPr>
+        <p:spPr>
+          <a:xfrm>
+            <a:off x="17733534" y="10061314"/>
+            <a:ext cx="2462981" cy="1156273"/>
+          </a:xfrm>
+          <a:prstGeom prst="roundRect">
+            <a:avLst/>
+          </a:prstGeom>
+          <a:solidFill>
+            <a:srgbClr val="238A8D"/>
+          </a:solidFill>
+          <a:ln>
+            <a:solidFill>
+              <a:srgbClr val="94A3B8"/>
+            </a:solidFill>
+          </a:ln>
+        </p:spPr>
+        <p:style>
+          <a:lnRef idx="2">
+            <a:schemeClr val="accent1">
+              <a:shade val="15000"/>
+            </a:schemeClr>
+          </a:lnRef>
+          <a:fillRef idx="1">
+            <a:schemeClr val="accent1"/>
+          </a:fillRef>
+          <a:effectRef idx="0">
+            <a:schemeClr val="accent1"/>
+          </a:effectRef>
+          <a:fontRef idx="minor">
+            <a:schemeClr val="lt1"/>
+          </a:fontRef>
+        </p:style>
+        <p:txBody>
+          <a:bodyPr rtlCol="0" anchor="ctr"/>
+          <a:lstStyle/>
+          <a:p>
+            <a:pPr algn="ctr"/>
+            <a:r>
+              <a:rPr lang="en-US" sz="2770" dirty="0"/>
+              <a:t>Decoder3</a:t>
+            </a:r>
+          </a:p>
+          <a:p>
+            <a:pPr algn="ctr"/>
+            <a:r>
+              <a:rPr lang="en-US" altLang="zh-CN" sz="2770" dirty="0"/>
+              <a:t>64×64×64</a:t>
+            </a:r>
+            <a:endParaRPr lang="en-US" sz="2770" dirty="0"/>
+          </a:p>
+        </p:txBody>
+      </p:sp>
+      <p:sp>
+        <p:nvSpPr>
+          <p:cNvPr id="19" name="Rectangle: Rounded Corners 18">
+            <a:extLst>
+              <a:ext uri="{FF2B5EF4-FFF2-40B4-BE49-F238E27FC236}">
+                <a16:creationId xmlns:a16="http://schemas.microsoft.com/office/drawing/2014/main" id="{AB6268CB-D0AA-E9FB-40AE-E4308EA55D5F}"/>
+              </a:ext>
+            </a:extLst>
+          </p:cNvPr>
+          <p:cNvSpPr/>
+          <p:nvPr/>
+        </p:nvSpPr>
+        <p:spPr>
+          <a:xfrm>
+            <a:off x="17733535" y="11660039"/>
+            <a:ext cx="2462980" cy="1156273"/>
+          </a:xfrm>
+          <a:prstGeom prst="roundRect">
+            <a:avLst/>
+          </a:prstGeom>
+          <a:solidFill>
+            <a:srgbClr val="238A8D"/>
+          </a:solidFill>
+          <a:ln>
+            <a:solidFill>
+              <a:srgbClr val="94A3B8"/>
+            </a:solidFill>
+          </a:ln>
+        </p:spPr>
+        <p:style>
+          <a:lnRef idx="2">
+            <a:schemeClr val="accent1">
+              <a:shade val="15000"/>
+            </a:schemeClr>
+          </a:lnRef>
+          <a:fillRef idx="1">
+            <a:schemeClr val="accent1"/>
+          </a:fillRef>
+          <a:effectRef idx="0">
+            <a:schemeClr val="accent1"/>
+          </a:effectRef>
+          <a:fontRef idx="minor">
+            <a:schemeClr val="lt1"/>
+          </a:fontRef>
+        </p:style>
+        <p:txBody>
+          <a:bodyPr rtlCol="0" anchor="ctr"/>
+          <a:lstStyle/>
+          <a:p>
+            <a:pPr algn="ctr"/>
+            <a:r>
+              <a:rPr lang="en-US" sz="2770" dirty="0"/>
+              <a:t>Decoder2</a:t>
+            </a:r>
+          </a:p>
+          <a:p>
+            <a:pPr algn="ctr"/>
+            <a:r>
+              <a:rPr lang="en-US" altLang="zh-CN" sz="2770" dirty="0"/>
+              <a:t>128×32×32</a:t>
+            </a:r>
+            <a:endParaRPr lang="en-US" sz="2770" dirty="0"/>
+          </a:p>
+        </p:txBody>
+      </p:sp>
+      <p:sp>
+        <p:nvSpPr>
+          <p:cNvPr id="20" name="Rectangle: Rounded Corners 19">
+            <a:extLst>
+              <a:ext uri="{FF2B5EF4-FFF2-40B4-BE49-F238E27FC236}">
+                <a16:creationId xmlns:a16="http://schemas.microsoft.com/office/drawing/2014/main" id="{89CCB7A2-E4D8-D8D3-6AB9-D8365FCFA4D2}"/>
+              </a:ext>
+            </a:extLst>
+          </p:cNvPr>
+          <p:cNvSpPr/>
+          <p:nvPr/>
+        </p:nvSpPr>
+        <p:spPr>
+          <a:xfrm>
+            <a:off x="17733534" y="13258766"/>
+            <a:ext cx="2462981" cy="1156273"/>
+          </a:xfrm>
+          <a:prstGeom prst="roundRect">
+            <a:avLst/>
+          </a:prstGeom>
+          <a:solidFill>
+            <a:srgbClr val="238A8D"/>
+          </a:solidFill>
+          <a:ln>
+            <a:solidFill>
+              <a:srgbClr val="94A3B8"/>
+            </a:solidFill>
+          </a:ln>
+        </p:spPr>
+        <p:style>
+          <a:lnRef idx="2">
+            <a:schemeClr val="accent1">
+              <a:shade val="15000"/>
+            </a:schemeClr>
+          </a:lnRef>
+          <a:fillRef idx="1">
+            <a:schemeClr val="accent1"/>
+          </a:fillRef>
+          <a:effectRef idx="0">
+            <a:schemeClr val="accent1"/>
+          </a:effectRef>
+          <a:fontRef idx="minor">
+            <a:schemeClr val="lt1"/>
+          </a:fontRef>
+        </p:style>
+        <p:txBody>
+          <a:bodyPr rtlCol="0" anchor="ctr"/>
+          <a:lstStyle/>
+          <a:p>
+            <a:pPr algn="ctr"/>
+            <a:r>
+              <a:rPr lang="en-US" sz="2770" dirty="0"/>
+              <a:t>Decoder1</a:t>
+            </a:r>
+          </a:p>
+          <a:p>
+            <a:pPr algn="ctr"/>
+            <a:r>
+              <a:rPr lang="en-US" altLang="zh-CN" sz="2770" dirty="0"/>
+              <a:t>256×16×16</a:t>
+            </a:r>
+            <a:endParaRPr lang="en-US" sz="2770" dirty="0"/>
+          </a:p>
+        </p:txBody>
+      </p:sp>
+      <p:cxnSp>
+        <p:nvCxnSpPr>
+          <p:cNvPr id="21" name="Straight Arrow Connector 20">
+            <a:extLst>
+              <a:ext uri="{FF2B5EF4-FFF2-40B4-BE49-F238E27FC236}">
+                <a16:creationId xmlns:a16="http://schemas.microsoft.com/office/drawing/2014/main" id="{191F8BE6-A8ED-C6C7-CEE3-9645A197DA7F}"/>
+              </a:ext>
+            </a:extLst>
+          </p:cNvPr>
+          <p:cNvCxnSpPr>
+            <a:cxnSpLocks/>
+          </p:cNvCxnSpPr>
+          <p:nvPr/>
+        </p:nvCxnSpPr>
+        <p:spPr>
+          <a:xfrm rot="10800000">
+            <a:off x="18965024" y="8020137"/>
+            <a:ext cx="0" cy="457200"/>
+          </a:xfrm>
+          <a:prstGeom prst="straightConnector1">
+            <a:avLst/>
+          </a:prstGeom>
+          <a:ln w="63500">
+            <a:solidFill>
+              <a:srgbClr val="94A3B8"/>
+            </a:solidFill>
+            <a:tailEnd type="triangle"/>
+          </a:ln>
+        </p:spPr>
+        <p:style>
+          <a:lnRef idx="2">
+            <a:schemeClr val="accent1"/>
+          </a:lnRef>
+          <a:fillRef idx="0">
+            <a:schemeClr val="accent1"/>
+          </a:fillRef>
+          <a:effectRef idx="1">
+            <a:schemeClr val="accent1"/>
+          </a:effectRef>
+          <a:fontRef idx="minor">
+            <a:schemeClr val="tx1"/>
+          </a:fontRef>
+        </p:style>
+      </p:cxnSp>
+      <p:cxnSp>
+        <p:nvCxnSpPr>
+          <p:cNvPr id="22" name="Straight Arrow Connector 21">
+            <a:extLst>
+              <a:ext uri="{FF2B5EF4-FFF2-40B4-BE49-F238E27FC236}">
+                <a16:creationId xmlns:a16="http://schemas.microsoft.com/office/drawing/2014/main" id="{74253E89-743B-84B9-53BA-AAA371B01730}"/>
+              </a:ext>
+            </a:extLst>
+          </p:cNvPr>
+          <p:cNvCxnSpPr>
+            <a:cxnSpLocks/>
+          </p:cNvCxnSpPr>
+          <p:nvPr/>
+        </p:nvCxnSpPr>
+        <p:spPr>
+          <a:xfrm rot="10800000">
+            <a:off x="18965024" y="9604114"/>
+            <a:ext cx="0" cy="457200"/>
+          </a:xfrm>
+          <a:prstGeom prst="straightConnector1">
+            <a:avLst/>
+          </a:prstGeom>
+          <a:ln w="63500">
+            <a:solidFill>
+              <a:srgbClr val="94A3B8"/>
+            </a:solidFill>
+            <a:tailEnd type="triangle"/>
+          </a:ln>
+        </p:spPr>
+        <p:style>
+          <a:lnRef idx="2">
+            <a:schemeClr val="accent1"/>
+          </a:lnRef>
+          <a:fillRef idx="0">
+            <a:schemeClr val="accent1"/>
+          </a:fillRef>
+          <a:effectRef idx="1">
+            <a:schemeClr val="accent1"/>
+          </a:effectRef>
+          <a:fontRef idx="minor">
+            <a:schemeClr val="tx1"/>
+          </a:fontRef>
+        </p:style>
+      </p:cxnSp>
+      <p:cxnSp>
+        <p:nvCxnSpPr>
+          <p:cNvPr id="23" name="Straight Arrow Connector 22">
+            <a:extLst>
+              <a:ext uri="{FF2B5EF4-FFF2-40B4-BE49-F238E27FC236}">
+                <a16:creationId xmlns:a16="http://schemas.microsoft.com/office/drawing/2014/main" id="{4F845723-D2AE-F9D6-3AD6-90719B597C2F}"/>
+              </a:ext>
+            </a:extLst>
+          </p:cNvPr>
+          <p:cNvCxnSpPr>
+            <a:cxnSpLocks/>
+          </p:cNvCxnSpPr>
+          <p:nvPr/>
+        </p:nvCxnSpPr>
+        <p:spPr>
+          <a:xfrm rot="10800000">
+            <a:off x="18965024" y="11217587"/>
+            <a:ext cx="0" cy="457200"/>
+          </a:xfrm>
+          <a:prstGeom prst="straightConnector1">
+            <a:avLst/>
+          </a:prstGeom>
+          <a:ln w="63500">
+            <a:solidFill>
+              <a:srgbClr val="94A3B8"/>
+            </a:solidFill>
+            <a:tailEnd type="triangle"/>
+          </a:ln>
+        </p:spPr>
+        <p:style>
+          <a:lnRef idx="2">
+            <a:schemeClr val="accent1"/>
+          </a:lnRef>
+          <a:fillRef idx="0">
+            <a:schemeClr val="accent1"/>
+          </a:fillRef>
+          <a:effectRef idx="1">
+            <a:schemeClr val="accent1"/>
+          </a:effectRef>
+          <a:fontRef idx="minor">
+            <a:schemeClr val="tx1"/>
+          </a:fontRef>
+        </p:style>
+      </p:cxnSp>
+      <p:cxnSp>
+        <p:nvCxnSpPr>
+          <p:cNvPr id="24" name="Straight Arrow Connector 23">
+            <a:extLst>
+              <a:ext uri="{FF2B5EF4-FFF2-40B4-BE49-F238E27FC236}">
+                <a16:creationId xmlns:a16="http://schemas.microsoft.com/office/drawing/2014/main" id="{E63DD14F-CC12-997F-B8D2-BB87E9F4DF82}"/>
+              </a:ext>
+            </a:extLst>
+          </p:cNvPr>
+          <p:cNvCxnSpPr>
+            <a:cxnSpLocks/>
+          </p:cNvCxnSpPr>
+          <p:nvPr/>
+        </p:nvCxnSpPr>
+        <p:spPr>
+          <a:xfrm rot="10800000">
+            <a:off x="18965024" y="12816312"/>
+            <a:ext cx="0" cy="457200"/>
+          </a:xfrm>
+          <a:prstGeom prst="straightConnector1">
+            <a:avLst/>
+          </a:prstGeom>
+          <a:ln w="63500">
+            <a:solidFill>
+              <a:srgbClr val="94A3B8"/>
+            </a:solidFill>
+            <a:tailEnd type="triangle"/>
+          </a:ln>
+        </p:spPr>
+        <p:style>
+          <a:lnRef idx="2">
+            <a:schemeClr val="accent1"/>
+          </a:lnRef>
+          <a:fillRef idx="0">
+            <a:schemeClr val="accent1"/>
+          </a:fillRef>
+          <a:effectRef idx="1">
+            <a:schemeClr val="accent1"/>
+          </a:effectRef>
+          <a:fontRef idx="minor">
+            <a:schemeClr val="tx1"/>
+          </a:fontRef>
+        </p:style>
+      </p:cxnSp>
+      <p:cxnSp>
+        <p:nvCxnSpPr>
+          <p:cNvPr id="25" name="Connector: Elbow 24">
+            <a:extLst>
+              <a:ext uri="{FF2B5EF4-FFF2-40B4-BE49-F238E27FC236}">
+                <a16:creationId xmlns:a16="http://schemas.microsoft.com/office/drawing/2014/main" id="{C7CDD71A-E956-8AA3-5C1A-7E27EC968A3D}"/>
+              </a:ext>
+            </a:extLst>
+          </p:cNvPr>
+          <p:cNvCxnSpPr>
+            <a:stCxn id="11" idx="2"/>
+            <a:endCxn id="6" idx="1"/>
+          </p:cNvCxnSpPr>
+          <p:nvPr/>
+        </p:nvCxnSpPr>
+        <p:spPr>
+          <a:xfrm rot="16200000" flipH="1">
+            <a:off x="13148137" y="14059726"/>
+            <a:ext cx="1143984" cy="1854609"/>
+          </a:xfrm>
+          <a:prstGeom prst="bentConnector2">
+            <a:avLst/>
+          </a:prstGeom>
+          <a:ln w="63500">
+            <a:solidFill>
+              <a:srgbClr val="94A3B8"/>
+            </a:solidFill>
+            <a:tailEnd type="triangle"/>
+          </a:ln>
+        </p:spPr>
+        <p:style>
+          <a:lnRef idx="2">
+            <a:schemeClr val="accent1"/>
+          </a:lnRef>
+          <a:fillRef idx="0">
+            <a:schemeClr val="accent1"/>
+          </a:fillRef>
+          <a:effectRef idx="1">
+            <a:schemeClr val="accent1"/>
+          </a:effectRef>
+          <a:fontRef idx="minor">
+            <a:schemeClr val="tx1"/>
+          </a:fontRef>
+        </p:style>
+      </p:cxnSp>
+      <p:cxnSp>
+        <p:nvCxnSpPr>
+          <p:cNvPr id="26" name="Connector: Elbow 25">
+            <a:extLst>
+              <a:ext uri="{FF2B5EF4-FFF2-40B4-BE49-F238E27FC236}">
+                <a16:creationId xmlns:a16="http://schemas.microsoft.com/office/drawing/2014/main" id="{C24C53F1-C5B6-35E0-C7F3-6DA637A60511}"/>
+              </a:ext>
+            </a:extLst>
+          </p:cNvPr>
+          <p:cNvCxnSpPr>
+            <a:cxnSpLocks/>
+            <a:stCxn id="6" idx="3"/>
+            <a:endCxn id="20" idx="2"/>
+          </p:cNvCxnSpPr>
+          <p:nvPr/>
+        </p:nvCxnSpPr>
+        <p:spPr>
+          <a:xfrm flipV="1">
+            <a:off x="17110415" y="14415039"/>
+            <a:ext cx="1854610" cy="1143984"/>
+          </a:xfrm>
+          <a:prstGeom prst="bentConnector2">
+            <a:avLst/>
+          </a:prstGeom>
+          <a:ln w="63500">
+            <a:solidFill>
+              <a:srgbClr val="94A3B8"/>
+            </a:solidFill>
+            <a:tailEnd type="triangle"/>
+          </a:ln>
+        </p:spPr>
+        <p:style>
+          <a:lnRef idx="2">
+            <a:schemeClr val="accent1"/>
+          </a:lnRef>
+          <a:fillRef idx="0">
+            <a:schemeClr val="accent1"/>
+          </a:fillRef>
+          <a:effectRef idx="1">
+            <a:schemeClr val="accent1"/>
+          </a:effectRef>
+          <a:fontRef idx="minor">
+            <a:schemeClr val="tx1"/>
+          </a:fontRef>
+        </p:style>
+      </p:cxnSp>
+      <p:cxnSp>
+        <p:nvCxnSpPr>
+          <p:cNvPr id="27" name="Straight Arrow Connector 26">
+            <a:extLst>
+              <a:ext uri="{FF2B5EF4-FFF2-40B4-BE49-F238E27FC236}">
+                <a16:creationId xmlns:a16="http://schemas.microsoft.com/office/drawing/2014/main" id="{7DB6D63B-6F1E-11D0-102C-D9F5091F6F51}"/>
+              </a:ext>
+            </a:extLst>
+          </p:cNvPr>
+          <p:cNvCxnSpPr>
+            <a:stCxn id="11" idx="3"/>
+            <a:endCxn id="20" idx="1"/>
+          </p:cNvCxnSpPr>
+          <p:nvPr/>
+        </p:nvCxnSpPr>
+        <p:spPr>
+          <a:xfrm>
+            <a:off x="14024315" y="13836903"/>
+            <a:ext cx="3709219" cy="0"/>
+          </a:xfrm>
+          <a:prstGeom prst="straightConnector1">
+            <a:avLst/>
+          </a:prstGeom>
+          <a:ln w="63500">
+            <a:solidFill>
+              <a:srgbClr val="94A3B8"/>
+            </a:solidFill>
+            <a:tailEnd type="triangle"/>
+          </a:ln>
+        </p:spPr>
+        <p:style>
+          <a:lnRef idx="2">
+            <a:schemeClr val="accent1"/>
+          </a:lnRef>
+          <a:fillRef idx="0">
+            <a:schemeClr val="accent1"/>
+          </a:fillRef>
+          <a:effectRef idx="1">
+            <a:schemeClr val="accent1"/>
+          </a:effectRef>
+          <a:fontRef idx="minor">
+            <a:schemeClr val="tx1"/>
+          </a:fontRef>
+        </p:style>
+      </p:cxnSp>
+      <p:cxnSp>
+        <p:nvCxnSpPr>
+          <p:cNvPr id="28" name="Straight Arrow Connector 27">
+            <a:extLst>
+              <a:ext uri="{FF2B5EF4-FFF2-40B4-BE49-F238E27FC236}">
+                <a16:creationId xmlns:a16="http://schemas.microsoft.com/office/drawing/2014/main" id="{4AC90089-67A3-B75E-4B24-DD1D1531C826}"/>
+              </a:ext>
+            </a:extLst>
+          </p:cNvPr>
+          <p:cNvCxnSpPr/>
+          <p:nvPr/>
+        </p:nvCxnSpPr>
+        <p:spPr>
+          <a:xfrm>
+            <a:off x="14024313" y="12234491"/>
+            <a:ext cx="3709219" cy="0"/>
+          </a:xfrm>
+          <a:prstGeom prst="straightConnector1">
+            <a:avLst/>
+          </a:prstGeom>
+          <a:ln w="63500">
+            <a:solidFill>
+              <a:srgbClr val="94A3B8"/>
+            </a:solidFill>
+            <a:tailEnd type="triangle"/>
+          </a:ln>
+        </p:spPr>
+        <p:style>
+          <a:lnRef idx="2">
+            <a:schemeClr val="accent1"/>
+          </a:lnRef>
+          <a:fillRef idx="0">
+            <a:schemeClr val="accent1"/>
+          </a:fillRef>
+          <a:effectRef idx="1">
+            <a:schemeClr val="accent1"/>
+          </a:effectRef>
+          <a:fontRef idx="minor">
+            <a:schemeClr val="tx1"/>
+          </a:fontRef>
+        </p:style>
+      </p:cxnSp>
+      <p:cxnSp>
+        <p:nvCxnSpPr>
+          <p:cNvPr id="29" name="Straight Arrow Connector 28">
+            <a:extLst>
+              <a:ext uri="{FF2B5EF4-FFF2-40B4-BE49-F238E27FC236}">
+                <a16:creationId xmlns:a16="http://schemas.microsoft.com/office/drawing/2014/main" id="{BAF3EE3A-34C1-08E7-2795-A15778917015}"/>
+              </a:ext>
+            </a:extLst>
+          </p:cNvPr>
+          <p:cNvCxnSpPr/>
+          <p:nvPr/>
+        </p:nvCxnSpPr>
+        <p:spPr>
+          <a:xfrm>
+            <a:off x="14024314" y="10632078"/>
+            <a:ext cx="3709219" cy="0"/>
+          </a:xfrm>
+          <a:prstGeom prst="straightConnector1">
+            <a:avLst/>
+          </a:prstGeom>
+          <a:ln w="63500">
+            <a:solidFill>
+              <a:srgbClr val="94A3B8"/>
+            </a:solidFill>
+            <a:tailEnd type="triangle"/>
+          </a:ln>
+        </p:spPr>
+        <p:style>
+          <a:lnRef idx="2">
+            <a:schemeClr val="accent1"/>
+          </a:lnRef>
+          <a:fillRef idx="0">
+            <a:schemeClr val="accent1"/>
+          </a:fillRef>
+          <a:effectRef idx="1">
+            <a:schemeClr val="accent1"/>
+          </a:effectRef>
+          <a:fontRef idx="minor">
+            <a:schemeClr val="tx1"/>
+          </a:fontRef>
+        </p:style>
+      </p:cxnSp>
+      <p:cxnSp>
+        <p:nvCxnSpPr>
+          <p:cNvPr id="30" name="Straight Arrow Connector 29">
+            <a:extLst>
+              <a:ext uri="{FF2B5EF4-FFF2-40B4-BE49-F238E27FC236}">
+                <a16:creationId xmlns:a16="http://schemas.microsoft.com/office/drawing/2014/main" id="{25264B92-E11C-15B1-0122-E3474F0E7498}"/>
+              </a:ext>
+            </a:extLst>
+          </p:cNvPr>
+          <p:cNvCxnSpPr/>
+          <p:nvPr/>
+        </p:nvCxnSpPr>
+        <p:spPr>
+          <a:xfrm>
+            <a:off x="14024314" y="9040725"/>
+            <a:ext cx="3709219" cy="0"/>
+          </a:xfrm>
+          <a:prstGeom prst="straightConnector1">
+            <a:avLst/>
+          </a:prstGeom>
+          <a:ln w="63500">
+            <a:solidFill>
+              <a:srgbClr val="94A3B8"/>
+            </a:solidFill>
+            <a:tailEnd type="triangle"/>
+          </a:ln>
+        </p:spPr>
+        <p:style>
+          <a:lnRef idx="2">
+            <a:schemeClr val="accent1"/>
+          </a:lnRef>
+          <a:fillRef idx="0">
+            <a:schemeClr val="accent1"/>
+          </a:fillRef>
+          <a:effectRef idx="1">
+            <a:schemeClr val="accent1"/>
+          </a:effectRef>
+          <a:fontRef idx="minor">
+            <a:schemeClr val="tx1"/>
+          </a:fontRef>
+        </p:style>
+      </p:cxnSp>
+      <p:cxnSp>
+        <p:nvCxnSpPr>
+          <p:cNvPr id="31" name="Straight Arrow Connector 30">
+            <a:extLst>
+              <a:ext uri="{FF2B5EF4-FFF2-40B4-BE49-F238E27FC236}">
+                <a16:creationId xmlns:a16="http://schemas.microsoft.com/office/drawing/2014/main" id="{AAB8F102-75A9-6562-E6D7-B55C561B99BC}"/>
+              </a:ext>
+            </a:extLst>
+          </p:cNvPr>
+          <p:cNvCxnSpPr/>
+          <p:nvPr/>
+        </p:nvCxnSpPr>
+        <p:spPr>
+          <a:xfrm>
+            <a:off x="14024312" y="7442000"/>
+            <a:ext cx="3709219" cy="0"/>
+          </a:xfrm>
+          <a:prstGeom prst="straightConnector1">
+            <a:avLst/>
+          </a:prstGeom>
+          <a:ln w="63500">
+            <a:solidFill>
+              <a:srgbClr val="94A3B8"/>
+            </a:solidFill>
+            <a:tailEnd type="triangle"/>
+          </a:ln>
+        </p:spPr>
+        <p:style>
+          <a:lnRef idx="2">
+            <a:schemeClr val="accent1"/>
+          </a:lnRef>
+          <a:fillRef idx="0">
+            <a:schemeClr val="accent1"/>
+          </a:fillRef>
+          <a:effectRef idx="1">
+            <a:schemeClr val="accent1"/>
+          </a:effectRef>
+          <a:fontRef idx="minor">
+            <a:schemeClr val="tx1"/>
+          </a:fontRef>
+        </p:style>
+      </p:cxnSp>
+      <p:sp>
+        <p:nvSpPr>
+          <p:cNvPr id="32" name="TextBox 31">
+            <a:extLst>
+              <a:ext uri="{FF2B5EF4-FFF2-40B4-BE49-F238E27FC236}">
+                <a16:creationId xmlns:a16="http://schemas.microsoft.com/office/drawing/2014/main" id="{86D2F06F-FA42-CBD5-2149-800C682A6DB2}"/>
+              </a:ext>
+            </a:extLst>
+          </p:cNvPr>
+          <p:cNvSpPr txBox="1"/>
+          <p:nvPr/>
+        </p:nvSpPr>
+        <p:spPr>
+          <a:xfrm>
+            <a:off x="14781828" y="6856492"/>
+            <a:ext cx="2194190" cy="523220"/>
+          </a:xfrm>
+          <a:prstGeom prst="rect">
+            <a:avLst/>
+          </a:prstGeom>
+          <a:noFill/>
+        </p:spPr>
+        <p:txBody>
+          <a:bodyPr wrap="none" rtlCol="0">
+            <a:spAutoFit/>
+          </a:bodyPr>
+          <a:lstStyle/>
+          <a:p>
+            <a:r>
+              <a:rPr lang="en-US" sz="2770" dirty="0">
+                <a:solidFill>
+                  <a:srgbClr val="64748B"/>
+                </a:solidFill>
+              </a:rPr>
+              <a:t>Concatenate</a:t>
+            </a:r>
+          </a:p>
+        </p:txBody>
+      </p:sp>
+      <p:cxnSp>
+        <p:nvCxnSpPr>
+          <p:cNvPr id="33" name="Connector: Elbow 32">
+            <a:extLst>
+              <a:ext uri="{FF2B5EF4-FFF2-40B4-BE49-F238E27FC236}">
+                <a16:creationId xmlns:a16="http://schemas.microsoft.com/office/drawing/2014/main" id="{F550849F-CBDD-DCA7-6A3F-9A957EB636EF}"/>
+              </a:ext>
+            </a:extLst>
+          </p:cNvPr>
+          <p:cNvCxnSpPr>
+            <a:cxnSpLocks/>
+            <a:stCxn id="46" idx="3"/>
+            <a:endCxn id="7" idx="0"/>
+          </p:cNvCxnSpPr>
+          <p:nvPr/>
+        </p:nvCxnSpPr>
+        <p:spPr>
+          <a:xfrm>
+            <a:off x="10900418" y="5799101"/>
+            <a:ext cx="1892407" cy="1064763"/>
+          </a:xfrm>
+          <a:prstGeom prst="bentConnector2">
+            <a:avLst/>
+          </a:prstGeom>
+          <a:ln w="63500">
+            <a:solidFill>
+              <a:srgbClr val="94A3B8"/>
+            </a:solidFill>
+            <a:tailEnd type="triangle"/>
+          </a:ln>
+        </p:spPr>
+        <p:style>
+          <a:lnRef idx="2">
+            <a:schemeClr val="accent1"/>
+          </a:lnRef>
+          <a:fillRef idx="0">
+            <a:schemeClr val="accent1"/>
+          </a:fillRef>
+          <a:effectRef idx="1">
+            <a:schemeClr val="accent1"/>
+          </a:effectRef>
+          <a:fontRef idx="minor">
+            <a:schemeClr val="tx1"/>
+          </a:fontRef>
+        </p:style>
+      </p:cxnSp>
+      <p:sp>
+        <p:nvSpPr>
+          <p:cNvPr id="34" name="TextBox 33">
+            <a:extLst>
+              <a:ext uri="{FF2B5EF4-FFF2-40B4-BE49-F238E27FC236}">
+                <a16:creationId xmlns:a16="http://schemas.microsoft.com/office/drawing/2014/main" id="{C5BAB035-8DE8-6BD9-B148-EAC2F5760E87}"/>
+              </a:ext>
+            </a:extLst>
+          </p:cNvPr>
+          <p:cNvSpPr txBox="1"/>
+          <p:nvPr/>
+        </p:nvSpPr>
+        <p:spPr>
+          <a:xfrm>
+            <a:off x="14781828" y="8477337"/>
+            <a:ext cx="2194190" cy="523220"/>
+          </a:xfrm>
+          <a:prstGeom prst="rect">
+            <a:avLst/>
+          </a:prstGeom>
+          <a:noFill/>
+        </p:spPr>
+        <p:txBody>
+          <a:bodyPr wrap="none" rtlCol="0">
+            <a:spAutoFit/>
+          </a:bodyPr>
+          <a:lstStyle/>
+          <a:p>
+            <a:r>
+              <a:rPr lang="en-US" sz="2770" dirty="0">
+                <a:solidFill>
+                  <a:srgbClr val="64748B"/>
+                </a:solidFill>
+              </a:rPr>
+              <a:t>Concatenate</a:t>
+            </a:r>
+          </a:p>
+        </p:txBody>
+      </p:sp>
+      <p:sp>
+        <p:nvSpPr>
+          <p:cNvPr id="35" name="TextBox 34">
+            <a:extLst>
+              <a:ext uri="{FF2B5EF4-FFF2-40B4-BE49-F238E27FC236}">
+                <a16:creationId xmlns:a16="http://schemas.microsoft.com/office/drawing/2014/main" id="{D66BD2F4-6741-A869-CCAC-87E73DA6FACD}"/>
+              </a:ext>
+            </a:extLst>
+          </p:cNvPr>
+          <p:cNvSpPr txBox="1"/>
+          <p:nvPr/>
+        </p:nvSpPr>
+        <p:spPr>
+          <a:xfrm>
+            <a:off x="14781828" y="10076061"/>
+            <a:ext cx="2194190" cy="523220"/>
+          </a:xfrm>
+          <a:prstGeom prst="rect">
+            <a:avLst/>
+          </a:prstGeom>
+          <a:noFill/>
+        </p:spPr>
+        <p:txBody>
+          <a:bodyPr wrap="none" rtlCol="0">
+            <a:spAutoFit/>
+          </a:bodyPr>
+          <a:lstStyle/>
+          <a:p>
+            <a:r>
+              <a:rPr lang="en-US" sz="2770" dirty="0">
+                <a:solidFill>
+                  <a:srgbClr val="64748B"/>
+                </a:solidFill>
+              </a:rPr>
+              <a:t>Concatenate</a:t>
+            </a:r>
+          </a:p>
+        </p:txBody>
+      </p:sp>
+      <p:sp>
+        <p:nvSpPr>
+          <p:cNvPr id="36" name="TextBox 35">
+            <a:extLst>
+              <a:ext uri="{FF2B5EF4-FFF2-40B4-BE49-F238E27FC236}">
+                <a16:creationId xmlns:a16="http://schemas.microsoft.com/office/drawing/2014/main" id="{E5BF893D-9FE0-D7FE-63D2-411C64FFF302}"/>
+              </a:ext>
+            </a:extLst>
+          </p:cNvPr>
+          <p:cNvSpPr txBox="1"/>
+          <p:nvPr/>
+        </p:nvSpPr>
+        <p:spPr>
+          <a:xfrm>
+            <a:off x="14781828" y="11707583"/>
+            <a:ext cx="2194190" cy="523220"/>
+          </a:xfrm>
+          <a:prstGeom prst="rect">
+            <a:avLst/>
+          </a:prstGeom>
+          <a:noFill/>
+        </p:spPr>
+        <p:txBody>
+          <a:bodyPr wrap="none" rtlCol="0">
+            <a:spAutoFit/>
+          </a:bodyPr>
+          <a:lstStyle/>
+          <a:p>
+            <a:r>
+              <a:rPr lang="en-US" sz="2770" dirty="0">
+                <a:solidFill>
+                  <a:srgbClr val="64748B"/>
+                </a:solidFill>
+              </a:rPr>
+              <a:t>Concatenate</a:t>
+            </a:r>
+          </a:p>
+        </p:txBody>
+      </p:sp>
+      <p:sp>
+        <p:nvSpPr>
+          <p:cNvPr id="37" name="TextBox 36">
+            <a:extLst>
+              <a:ext uri="{FF2B5EF4-FFF2-40B4-BE49-F238E27FC236}">
+                <a16:creationId xmlns:a16="http://schemas.microsoft.com/office/drawing/2014/main" id="{8688DACB-C144-4894-9BC8-1B1F6F817F62}"/>
+              </a:ext>
+            </a:extLst>
+          </p:cNvPr>
+          <p:cNvSpPr txBox="1"/>
+          <p:nvPr/>
+        </p:nvSpPr>
+        <p:spPr>
+          <a:xfrm>
+            <a:off x="14781828" y="13306307"/>
+            <a:ext cx="2194190" cy="523220"/>
+          </a:xfrm>
+          <a:prstGeom prst="rect">
+            <a:avLst/>
+          </a:prstGeom>
+          <a:noFill/>
+        </p:spPr>
+        <p:txBody>
+          <a:bodyPr wrap="none" rtlCol="0">
+            <a:spAutoFit/>
+          </a:bodyPr>
+          <a:lstStyle/>
+          <a:p>
+            <a:r>
+              <a:rPr lang="en-US" sz="2770" dirty="0">
+                <a:solidFill>
+                  <a:srgbClr val="64748B"/>
+                </a:solidFill>
+              </a:rPr>
+              <a:t>Concatenate</a:t>
+            </a:r>
+          </a:p>
+        </p:txBody>
+      </p:sp>
+      <p:cxnSp>
+        <p:nvCxnSpPr>
+          <p:cNvPr id="40" name="Connector: Elbow 39">
+            <a:extLst>
+              <a:ext uri="{FF2B5EF4-FFF2-40B4-BE49-F238E27FC236}">
+                <a16:creationId xmlns:a16="http://schemas.microsoft.com/office/drawing/2014/main" id="{D6BC57F1-1486-6057-C83C-0C0F1F970919}"/>
+              </a:ext>
+            </a:extLst>
+          </p:cNvPr>
+          <p:cNvCxnSpPr>
+            <a:cxnSpLocks/>
+            <a:stCxn id="16" idx="0"/>
+            <a:endCxn id="52" idx="1"/>
+          </p:cNvCxnSpPr>
+          <p:nvPr/>
+        </p:nvCxnSpPr>
+        <p:spPr>
+          <a:xfrm rot="5400000" flipH="1" flipV="1">
+            <a:off x="19279526" y="5482265"/>
+            <a:ext cx="1067098" cy="1696100"/>
+          </a:xfrm>
+          <a:prstGeom prst="bentConnector2">
+            <a:avLst/>
+          </a:prstGeom>
+          <a:ln w="63500">
+            <a:solidFill>
+              <a:srgbClr val="94A3B8"/>
+            </a:solidFill>
+            <a:tailEnd type="triangle"/>
+          </a:ln>
+        </p:spPr>
+        <p:style>
+          <a:lnRef idx="2">
+            <a:schemeClr val="accent1"/>
+          </a:lnRef>
+          <a:fillRef idx="0">
+            <a:schemeClr val="accent1"/>
+          </a:fillRef>
+          <a:effectRef idx="1">
+            <a:schemeClr val="accent1"/>
+          </a:effectRef>
+          <a:fontRef idx="minor">
+            <a:schemeClr val="tx1"/>
+          </a:fontRef>
+        </p:style>
+      </p:cxnSp>
+      <p:grpSp>
+        <p:nvGrpSpPr>
+          <p:cNvPr id="49" name="Group 48">
+            <a:extLst>
+              <a:ext uri="{FF2B5EF4-FFF2-40B4-BE49-F238E27FC236}">
+                <a16:creationId xmlns:a16="http://schemas.microsoft.com/office/drawing/2014/main" id="{7BB2CF9B-4A36-EBB5-4110-8F22CF132AA2}"/>
+              </a:ext>
+            </a:extLst>
+          </p:cNvPr>
+          <p:cNvGrpSpPr/>
+          <p:nvPr/>
+        </p:nvGrpSpPr>
+        <p:grpSpPr>
+          <a:xfrm>
+            <a:off x="8992731" y="4820199"/>
+            <a:ext cx="1907687" cy="1893302"/>
+            <a:chOff x="25604210" y="10801090"/>
+            <a:chExt cx="1907687" cy="1893302"/>
+          </a:xfrm>
+        </p:grpSpPr>
+        <p:pic>
+          <p:nvPicPr>
+            <p:cNvPr id="48" name="Picture 47" descr="A map of a city&#10;&#10;Description automatically generated">
+              <a:extLst>
+                <a:ext uri="{FF2B5EF4-FFF2-40B4-BE49-F238E27FC236}">
+                  <a16:creationId xmlns:a16="http://schemas.microsoft.com/office/drawing/2014/main" id="{216BA7CB-A2FC-6084-8907-E938C300277B}"/>
+                </a:ext>
+              </a:extLst>
+            </p:cNvPr>
+            <p:cNvPicPr>
+              <a:picLocks noChangeAspect="1"/>
+            </p:cNvPicPr>
+            <p:nvPr/>
+          </p:nvPicPr>
+          <p:blipFill>
+            <a:blip r:embed="rId2">
+              <a:extLst>
+                <a:ext uri="{28A0092B-C50C-407E-A947-70E740481C1C}">
+                  <a14:useLocalDpi xmlns:a14="http://schemas.microsoft.com/office/drawing/2010/main" val="0"/>
+                </a:ext>
+              </a:extLst>
+            </a:blip>
+            <a:stretch>
+              <a:fillRect/>
+            </a:stretch>
+          </p:blipFill>
+          <p:spPr>
+            <a:xfrm>
+              <a:off x="25604210" y="10801090"/>
+              <a:ext cx="1828800" cy="1828800"/>
+            </a:xfrm>
+            <a:prstGeom prst="rect">
+              <a:avLst/>
+            </a:prstGeom>
+          </p:spPr>
+        </p:pic>
+        <p:pic>
+          <p:nvPicPr>
+            <p:cNvPr id="46" name="Picture 45" descr="A black and white image of a grid&#10;&#10;Description automatically generated with medium confidence">
+              <a:extLst>
+                <a:ext uri="{FF2B5EF4-FFF2-40B4-BE49-F238E27FC236}">
+                  <a16:creationId xmlns:a16="http://schemas.microsoft.com/office/drawing/2014/main" id="{9F942E84-917F-11EF-4697-50B08EF68974}"/>
+                </a:ext>
+              </a:extLst>
+            </p:cNvPr>
+            <p:cNvPicPr>
+              <a:picLocks noChangeAspect="1"/>
+            </p:cNvPicPr>
+            <p:nvPr/>
+          </p:nvPicPr>
+          <p:blipFill>
+            <a:blip r:embed="rId3">
+              <a:extLst>
+                <a:ext uri="{28A0092B-C50C-407E-A947-70E740481C1C}">
+                  <a14:useLocalDpi xmlns:a14="http://schemas.microsoft.com/office/drawing/2010/main" val="0"/>
+                </a:ext>
+              </a:extLst>
+            </a:blip>
+            <a:stretch>
+              <a:fillRect/>
+            </a:stretch>
+          </p:blipFill>
+          <p:spPr>
+            <a:xfrm>
+              <a:off x="25683097" y="10865592"/>
+              <a:ext cx="1828800" cy="1828800"/>
+            </a:xfrm>
+            <a:prstGeom prst="rect">
+              <a:avLst/>
+            </a:prstGeom>
+          </p:spPr>
+        </p:pic>
+      </p:grpSp>
+      <p:pic>
+        <p:nvPicPr>
+          <p:cNvPr id="52" name="Picture 51" descr="A close-up of several different colored objects&#10;&#10;Description automatically generated">
+            <a:extLst>
+              <a:ext uri="{FF2B5EF4-FFF2-40B4-BE49-F238E27FC236}">
+                <a16:creationId xmlns:a16="http://schemas.microsoft.com/office/drawing/2014/main" id="{9D3588A4-E5F2-F585-5FA6-356436162EC6}"/>
+              </a:ext>
+            </a:extLst>
+          </p:cNvPr>
+          <p:cNvPicPr>
+            <a:picLocks noChangeAspect="1"/>
+          </p:cNvPicPr>
+          <p:nvPr/>
+        </p:nvPicPr>
+        <p:blipFill>
+          <a:blip r:embed="rId4">
+            <a:extLst>
+              <a:ext uri="{28A0092B-C50C-407E-A947-70E740481C1C}">
+                <a14:useLocalDpi xmlns:a14="http://schemas.microsoft.com/office/drawing/2010/main" val="0"/>
+              </a:ext>
+            </a:extLst>
+          </a:blip>
+          <a:stretch>
+            <a:fillRect/>
+          </a:stretch>
+        </p:blipFill>
+        <p:spPr>
+          <a:xfrm>
+            <a:off x="20661125" y="4882366"/>
+            <a:ext cx="1828800" cy="1828800"/>
+          </a:xfrm>
+          <a:prstGeom prst="rect">
+            <a:avLst/>
+          </a:prstGeom>
+        </p:spPr>
+      </p:pic>
+    </p:spTree>
+    <p:extLst>
+      <p:ext uri="{BB962C8B-B14F-4D97-AF65-F5344CB8AC3E}">
+        <p14:creationId xmlns:p14="http://schemas.microsoft.com/office/powerpoint/2010/main" val="58562744"/>
+      </p:ext>
+    </p:extLst>
+  </p:cSld>
+  <p:clrMapOvr>
+    <a:masterClrMapping/>
+  </p:clrMapOvr>
+</p:sld>
+</file>
+
+<file path=ppt/slides/slide3.xml><?xml version="1.0" encoding="utf-8"?>
+<p:sld xmlns:a="http://schemas.openxmlformats.org/drawingml/2006/main" xmlns:r="http://schemas.openxmlformats.org/officeDocument/2006/relationships" xmlns:p="http://schemas.openxmlformats.org/presentationml/2006/main">
+  <p:cSld>
+    <p:spTree>
+      <p:nvGrpSpPr>
+        <p:cNvPr id="1" name=""/>
+        <p:cNvGrpSpPr/>
+        <p:nvPr/>
+      </p:nvGrpSpPr>
+      <p:grpSpPr>
+        <a:xfrm>
+          <a:off x="0" y="0"/>
+          <a:ext cx="0" cy="0"/>
+          <a:chOff x="0" y="0"/>
+          <a:chExt cx="0" cy="0"/>
+        </a:xfrm>
+      </p:grpSpPr>
+      <p:grpSp>
+        <p:nvGrpSpPr>
+          <p:cNvPr id="100" name="Group 99">
+            <a:extLst>
+              <a:ext uri="{FF2B5EF4-FFF2-40B4-BE49-F238E27FC236}">
+                <a16:creationId xmlns:a16="http://schemas.microsoft.com/office/drawing/2014/main" id="{D28CCAE3-560A-8D47-2FEE-CE92202F9C51}"/>
+              </a:ext>
+            </a:extLst>
+          </p:cNvPr>
+          <p:cNvGrpSpPr/>
+          <p:nvPr/>
+        </p:nvGrpSpPr>
+        <p:grpSpPr>
+          <a:xfrm>
+            <a:off x="11273381" y="6157880"/>
+            <a:ext cx="18589156" cy="4112396"/>
+            <a:chOff x="11273381" y="6157880"/>
+            <a:chExt cx="18589156" cy="4112396"/>
           </a:xfrm>
         </p:grpSpPr>
         <p:sp>
           <p:nvSpPr>
-            <p:cNvPr id="21" name="Rectangle: Rounded Corners 20">
+            <p:cNvPr id="5" name="Rectangle: Rounded Corners 4">
               <a:extLst>
                 <a:ext uri="{FF2B5EF4-FFF2-40B4-BE49-F238E27FC236}">
-                  <a16:creationId xmlns:a16="http://schemas.microsoft.com/office/drawing/2014/main" id="{2658D007-751C-FEFB-BF76-E0BF1C5A655E}"/>
+                  <a16:creationId xmlns:a16="http://schemas.microsoft.com/office/drawing/2014/main" id="{87783C88-F30B-13A3-9FCF-39D8D4801BA6}"/>
                 </a:ext>
               </a:extLst>
             </p:cNvPr>
@@ -3015,18 +6731,18 @@
           </p:nvSpPr>
           <p:spPr>
             <a:xfrm>
-              <a:off x="12833874" y="13624526"/>
+              <a:off x="11273381" y="7615553"/>
               <a:ext cx="2462981" cy="1156273"/>
             </a:xfrm>
             <a:prstGeom prst="roundRect">
               <a:avLst/>
             </a:prstGeom>
             <a:solidFill>
-              <a:srgbClr val="E59A32"/>
+              <a:srgbClr val="EAF3F8"/>
             </a:solidFill>
-            <a:ln>
+            <a:ln w="63500">
               <a:solidFill>
-                <a:srgbClr val="94A3B8"/>
+                <a:srgbClr val="176B87"/>
               </a:solidFill>
             </a:ln>
           </p:spPr>
@@ -3052,26 +6768,27 @@
             <a:p>
               <a:pPr algn="ctr"/>
               <a:r>
-                <a:rPr lang="en-US" sz="2770" dirty="0"/>
-                <a:t>Bottleneck</a:t>
+                <a:rPr lang="zh-CN" altLang="en-US" sz="2770" dirty="0">
+                  <a:solidFill>
+                    <a:srgbClr val="263238"/>
+                  </a:solidFill>
+                </a:rPr>
+                <a:t>采样器</a:t>
               </a:r>
-            </a:p>
-            <a:p>
-              <a:pPr algn="ctr"/>
-              <a:r>
-                <a:rPr lang="en-US" altLang="zh-CN" sz="2770" dirty="0"/>
-                <a:t>512×16×16</a:t>
-              </a:r>
-              <a:endParaRPr lang="en-US" sz="2770" dirty="0"/>
+              <a:endParaRPr lang="en-US" sz="2770" dirty="0">
+                <a:solidFill>
+                  <a:srgbClr val="263238"/>
+                </a:solidFill>
+              </a:endParaRPr>
             </a:p>
           </p:txBody>
         </p:sp>
         <p:sp>
           <p:nvSpPr>
-            <p:cNvPr id="8" name="Rectangle: Rounded Corners 7">
+            <p:cNvPr id="6" name="Rectangle: Rounded Corners 5">
               <a:extLst>
                 <a:ext uri="{FF2B5EF4-FFF2-40B4-BE49-F238E27FC236}">
-                  <a16:creationId xmlns:a16="http://schemas.microsoft.com/office/drawing/2014/main" id="{9762C9A5-3786-B606-3515-21FB63706234}"/>
+                  <a16:creationId xmlns:a16="http://schemas.microsoft.com/office/drawing/2014/main" id="{8661A55B-EFA6-7978-A319-44E2F4938902}"/>
                 </a:ext>
               </a:extLst>
             </p:cNvPr>
@@ -3080,15 +6797,18 @@
           </p:nvSpPr>
           <p:spPr>
             <a:xfrm>
-              <a:off x="9747774" y="5507504"/>
+              <a:off x="17298216" y="7616571"/>
               <a:ext cx="2462981" cy="1156273"/>
             </a:xfrm>
             <a:prstGeom prst="roundRect">
               <a:avLst/>
             </a:prstGeom>
-            <a:ln>
+            <a:solidFill>
+              <a:srgbClr val="EAF3F8"/>
+            </a:solidFill>
+            <a:ln w="63500">
               <a:solidFill>
-                <a:srgbClr val="94A3B8"/>
+                <a:srgbClr val="176B87"/>
               </a:solidFill>
             </a:ln>
           </p:spPr>
@@ -3114,31 +6834,22 @@
             <a:p>
               <a:pPr algn="ctr"/>
               <a:r>
-                <a:rPr lang="en-US" sz="2770" dirty="0" err="1"/>
-                <a:t>ResBlock</a:t>
+                <a:rPr lang="en-US" sz="2770" dirty="0">
+                  <a:solidFill>
+                    <a:srgbClr val="263238"/>
+                  </a:solidFill>
+                </a:rPr>
+                <a:t>K-Top</a:t>
               </a:r>
-              <a:endParaRPr lang="en-US" sz="2770" dirty="0"/>
-            </a:p>
-            <a:p>
-              <a:pPr algn="ctr"/>
-              <a:r>
-                <a:rPr lang="en-US" sz="2770" dirty="0"/>
-                <a:t>32</a:t>
-              </a:r>
-              <a:r>
-                <a:rPr lang="en-US" altLang="zh-CN" sz="2770" dirty="0"/>
-                <a:t>×256×256</a:t>
-              </a:r>
-              <a:endParaRPr lang="en-US" sz="2770" dirty="0"/>
             </a:p>
           </p:txBody>
         </p:sp>
         <p:sp>
           <p:nvSpPr>
-            <p:cNvPr id="17" name="Rectangle: Rounded Corners 16">
+            <p:cNvPr id="8" name="Rectangle: Rounded Corners 7">
               <a:extLst>
                 <a:ext uri="{FF2B5EF4-FFF2-40B4-BE49-F238E27FC236}">
-                  <a16:creationId xmlns:a16="http://schemas.microsoft.com/office/drawing/2014/main" id="{C746DF68-8F5E-8383-69CE-84D3BE533045}"/>
+                  <a16:creationId xmlns:a16="http://schemas.microsoft.com/office/drawing/2014/main" id="{CC9DCB69-FFBE-CD45-EB91-96CC3D2E7383}"/>
                 </a:ext>
               </a:extLst>
             </p:cNvPr>
@@ -3147,18 +6858,18 @@
           </p:nvSpPr>
           <p:spPr>
             <a:xfrm>
-              <a:off x="9747774" y="7095169"/>
+              <a:off x="27399556" y="7615552"/>
               <a:ext cx="2462981" cy="1156273"/>
             </a:xfrm>
             <a:prstGeom prst="roundRect">
               <a:avLst/>
             </a:prstGeom>
             <a:solidFill>
-              <a:srgbClr val="356D9A"/>
+              <a:srgbClr val="EAF3F8"/>
             </a:solidFill>
-            <a:ln>
+            <a:ln w="63500">
               <a:solidFill>
-                <a:srgbClr val="94A3B8"/>
+                <a:srgbClr val="176B87"/>
               </a:solidFill>
             </a:ln>
           </p:spPr>
@@ -3184,26 +6895,171 @@
             <a:p>
               <a:pPr algn="ctr"/>
               <a:r>
-                <a:rPr lang="en-US" sz="2770" dirty="0"/>
-                <a:t>Encoder1</a:t>
+                <a:rPr lang="zh-CN" altLang="en-US" sz="2770" dirty="0">
+                  <a:solidFill>
+                    <a:srgbClr val="263238"/>
+                  </a:solidFill>
+                </a:rPr>
+                <a:t>重建器</a:t>
               </a:r>
-            </a:p>
-            <a:p>
-              <a:pPr algn="ctr"/>
-              <a:r>
-                <a:rPr lang="en-US" altLang="zh-CN" sz="2770" dirty="0"/>
-                <a:t>64×128×128</a:t>
-              </a:r>
-              <a:endParaRPr lang="en-US" sz="2770" dirty="0"/>
+              <a:endParaRPr lang="en-US" sz="2770" dirty="0">
+                <a:solidFill>
+                  <a:srgbClr val="263238"/>
+                </a:solidFill>
+              </a:endParaRPr>
             </a:p>
           </p:txBody>
         </p:sp>
+        <p:pic>
+          <p:nvPicPr>
+            <p:cNvPr id="9" name="Picture 8" descr="A close-up of several different colored objects&#10;&#10;Description automatically generated">
+              <a:extLst>
+                <a:ext uri="{FF2B5EF4-FFF2-40B4-BE49-F238E27FC236}">
+                  <a16:creationId xmlns:a16="http://schemas.microsoft.com/office/drawing/2014/main" id="{53B2007F-EF21-93CC-FB8A-42A373BCBA79}"/>
+                </a:ext>
+              </a:extLst>
+            </p:cNvPr>
+            <p:cNvPicPr>
+              <a:picLocks noChangeAspect="1"/>
+            </p:cNvPicPr>
+            <p:nvPr/>
+          </p:nvPicPr>
+          <p:blipFill>
+            <a:blip r:embed="rId2">
+              <a:extLst>
+                <a:ext uri="{28A0092B-C50C-407E-A947-70E740481C1C}">
+                  <a14:useLocalDpi xmlns:a14="http://schemas.microsoft.com/office/drawing/2010/main" val="0"/>
+                </a:ext>
+              </a:extLst>
+            </a:blip>
+            <a:stretch>
+              <a:fillRect/>
+            </a:stretch>
+          </p:blipFill>
+          <p:spPr>
+            <a:xfrm>
+              <a:off x="14602327" y="7279290"/>
+              <a:ext cx="1828800" cy="1828800"/>
+            </a:xfrm>
+            <a:prstGeom prst="rect">
+              <a:avLst/>
+            </a:prstGeom>
+          </p:spPr>
+        </p:pic>
+        <p:pic>
+          <p:nvPicPr>
+            <p:cNvPr id="11" name="Picture 10" descr="A colorful image of a building&#10;&#10;Description automatically generated with medium confidence">
+              <a:extLst>
+                <a:ext uri="{FF2B5EF4-FFF2-40B4-BE49-F238E27FC236}">
+                  <a16:creationId xmlns:a16="http://schemas.microsoft.com/office/drawing/2014/main" id="{FF27F9F3-510B-37B4-35BB-82031C8C1D5F}"/>
+                </a:ext>
+              </a:extLst>
+            </p:cNvPr>
+            <p:cNvPicPr>
+              <a:picLocks noChangeAspect="1"/>
+            </p:cNvPicPr>
+            <p:nvPr/>
+          </p:nvPicPr>
+          <p:blipFill>
+            <a:blip r:embed="rId3">
+              <a:extLst>
+                <a:ext uri="{28A0092B-C50C-407E-A947-70E740481C1C}">
+                  <a14:useLocalDpi xmlns:a14="http://schemas.microsoft.com/office/drawing/2010/main" val="0"/>
+                </a:ext>
+              </a:extLst>
+            </a:blip>
+            <a:stretch>
+              <a:fillRect/>
+            </a:stretch>
+          </p:blipFill>
+          <p:spPr>
+            <a:xfrm>
+              <a:off x="21086688" y="6157880"/>
+              <a:ext cx="1828800" cy="1828800"/>
+            </a:xfrm>
+            <a:prstGeom prst="rect">
+              <a:avLst/>
+            </a:prstGeom>
+          </p:spPr>
+        </p:pic>
+        <p:pic>
+          <p:nvPicPr>
+            <p:cNvPr id="13" name="Picture 12" descr="White particles in the sky with Gallery Arcturus in the background&#10;&#10;Description automatically generated">
+              <a:extLst>
+                <a:ext uri="{FF2B5EF4-FFF2-40B4-BE49-F238E27FC236}">
+                  <a16:creationId xmlns:a16="http://schemas.microsoft.com/office/drawing/2014/main" id="{BA4CE79C-DC5D-0BF3-7F31-E6D9EDE2A890}"/>
+                </a:ext>
+              </a:extLst>
+            </p:cNvPr>
+            <p:cNvPicPr>
+              <a:picLocks noChangeAspect="1"/>
+            </p:cNvPicPr>
+            <p:nvPr/>
+          </p:nvPicPr>
+          <p:blipFill>
+            <a:blip r:embed="rId4">
+              <a:extLst>
+                <a:ext uri="{28A0092B-C50C-407E-A947-70E740481C1C}">
+                  <a14:useLocalDpi xmlns:a14="http://schemas.microsoft.com/office/drawing/2010/main" val="0"/>
+                </a:ext>
+              </a:extLst>
+            </a:blip>
+            <a:stretch>
+              <a:fillRect/>
+            </a:stretch>
+          </p:blipFill>
+          <p:spPr>
+            <a:xfrm>
+              <a:off x="21086688" y="8441476"/>
+              <a:ext cx="1828800" cy="1828800"/>
+            </a:xfrm>
+            <a:prstGeom prst="rect">
+              <a:avLst/>
+            </a:prstGeom>
+          </p:spPr>
+        </p:pic>
+        <p:pic>
+          <p:nvPicPr>
+            <p:cNvPr id="15" name="Picture 14" descr="A black background with colorful dots&#10;&#10;Description automatically generated">
+              <a:extLst>
+                <a:ext uri="{FF2B5EF4-FFF2-40B4-BE49-F238E27FC236}">
+                  <a16:creationId xmlns:a16="http://schemas.microsoft.com/office/drawing/2014/main" id="{0964E0D1-A37B-3E25-9842-6199B9F7B266}"/>
+                </a:ext>
+              </a:extLst>
+            </p:cNvPr>
+            <p:cNvPicPr>
+              <a:picLocks noChangeAspect="1"/>
+            </p:cNvPicPr>
+            <p:nvPr/>
+          </p:nvPicPr>
+          <p:blipFill>
+            <a:blip r:embed="rId5">
+              <a:extLst>
+                <a:ext uri="{28A0092B-C50C-407E-A947-70E740481C1C}">
+                  <a14:useLocalDpi xmlns:a14="http://schemas.microsoft.com/office/drawing/2010/main" val="0"/>
+                </a:ext>
+              </a:extLst>
+            </a:blip>
+            <a:stretch>
+              <a:fillRect/>
+            </a:stretch>
+          </p:blipFill>
+          <p:spPr>
+            <a:xfrm>
+              <a:off x="24464069" y="7279291"/>
+              <a:ext cx="1828800" cy="1828800"/>
+            </a:xfrm>
+            <a:prstGeom prst="rect">
+              <a:avLst/>
+            </a:prstGeom>
+          </p:spPr>
+        </p:pic>
         <p:sp>
           <p:nvSpPr>
-            <p:cNvPr id="18" name="Rectangle: Rounded Corners 17">
+            <p:cNvPr id="16" name="Flowchart: Summing Junction 15">
               <a:extLst>
                 <a:ext uri="{FF2B5EF4-FFF2-40B4-BE49-F238E27FC236}">
-                  <a16:creationId xmlns:a16="http://schemas.microsoft.com/office/drawing/2014/main" id="{CF18315A-0321-213D-CCDF-E20E5F7A0FDD}"/>
+                  <a16:creationId xmlns:a16="http://schemas.microsoft.com/office/drawing/2014/main" id="{9E97DD37-6491-DF41-0A63-5C9288411FB8}"/>
                 </a:ext>
               </a:extLst>
             </p:cNvPr>
@@ -3212,18 +7068,404 @@
           </p:nvSpPr>
           <p:spPr>
             <a:xfrm>
-              <a:off x="9747774" y="8697582"/>
+              <a:off x="23324176" y="7986680"/>
+              <a:ext cx="445345" cy="416053"/>
+            </a:xfrm>
+            <a:prstGeom prst="flowChartSummingJunction">
+              <a:avLst/>
+            </a:prstGeom>
+            <a:solidFill>
+              <a:srgbClr val="14919B"/>
+            </a:solidFill>
+          </p:spPr>
+          <p:style>
+            <a:lnRef idx="2">
+              <a:schemeClr val="accent1">
+                <a:shade val="15000"/>
+              </a:schemeClr>
+            </a:lnRef>
+            <a:fillRef idx="1">
+              <a:schemeClr val="accent1"/>
+            </a:fillRef>
+            <a:effectRef idx="0">
+              <a:schemeClr val="accent1"/>
+            </a:effectRef>
+            <a:fontRef idx="minor">
+              <a:schemeClr val="lt1"/>
+            </a:fontRef>
+          </p:style>
+          <p:txBody>
+            <a:bodyPr rtlCol="0" anchor="ctr"/>
+            <a:lstStyle/>
+            <a:p>
+              <a:pPr algn="ctr"/>
+              <a:endParaRPr lang="en-US"/>
+            </a:p>
+          </p:txBody>
+        </p:sp>
+        <p:cxnSp>
+          <p:nvCxnSpPr>
+            <p:cNvPr id="27" name="Connector: Elbow 26">
+              <a:extLst>
+                <a:ext uri="{FF2B5EF4-FFF2-40B4-BE49-F238E27FC236}">
+                  <a16:creationId xmlns:a16="http://schemas.microsoft.com/office/drawing/2014/main" id="{9613808F-45FC-D334-27D2-4780F6382DD4}"/>
+                </a:ext>
+              </a:extLst>
+            </p:cNvPr>
+            <p:cNvCxnSpPr>
+              <a:stCxn id="9" idx="3"/>
+              <a:endCxn id="6" idx="1"/>
+            </p:cNvCxnSpPr>
+            <p:nvPr/>
+          </p:nvCxnSpPr>
+          <p:spPr>
+            <a:xfrm>
+              <a:off x="16431127" y="8193690"/>
+              <a:ext cx="867089" cy="1018"/>
+            </a:xfrm>
+            <a:prstGeom prst="bentConnector3">
+              <a:avLst/>
+            </a:prstGeom>
+            <a:ln w="63500">
+              <a:solidFill>
+                <a:srgbClr val="1677B8"/>
+              </a:solidFill>
+              <a:tailEnd type="triangle"/>
+            </a:ln>
+          </p:spPr>
+          <p:style>
+            <a:lnRef idx="2">
+              <a:schemeClr val="accent1"/>
+            </a:lnRef>
+            <a:fillRef idx="0">
+              <a:schemeClr val="accent1"/>
+            </a:fillRef>
+            <a:effectRef idx="1">
+              <a:schemeClr val="accent1"/>
+            </a:effectRef>
+            <a:fontRef idx="minor">
+              <a:schemeClr val="tx1"/>
+            </a:fontRef>
+          </p:style>
+        </p:cxnSp>
+        <p:cxnSp>
+          <p:nvCxnSpPr>
+            <p:cNvPr id="29" name="Connector: Elbow 28">
+              <a:extLst>
+                <a:ext uri="{FF2B5EF4-FFF2-40B4-BE49-F238E27FC236}">
+                  <a16:creationId xmlns:a16="http://schemas.microsoft.com/office/drawing/2014/main" id="{FBB5801B-B6A2-FF3F-7631-60B8DE86B3B2}"/>
+                </a:ext>
+              </a:extLst>
+            </p:cNvPr>
+            <p:cNvCxnSpPr>
+              <a:cxnSpLocks/>
+              <a:stCxn id="6" idx="3"/>
+              <a:endCxn id="13" idx="1"/>
+            </p:cNvCxnSpPr>
+            <p:nvPr/>
+          </p:nvCxnSpPr>
+          <p:spPr>
+            <a:xfrm>
+              <a:off x="19761197" y="8194708"/>
+              <a:ext cx="1325491" cy="1161168"/>
+            </a:xfrm>
+            <a:prstGeom prst="bentConnector3">
+              <a:avLst/>
+            </a:prstGeom>
+            <a:ln w="63500">
+              <a:solidFill>
+                <a:srgbClr val="1677B8"/>
+              </a:solidFill>
+              <a:tailEnd type="triangle"/>
+            </a:ln>
+          </p:spPr>
+          <p:style>
+            <a:lnRef idx="2">
+              <a:schemeClr val="accent1"/>
+            </a:lnRef>
+            <a:fillRef idx="0">
+              <a:schemeClr val="accent1"/>
+            </a:fillRef>
+            <a:effectRef idx="1">
+              <a:schemeClr val="accent1"/>
+            </a:effectRef>
+            <a:fontRef idx="minor">
+              <a:schemeClr val="tx1"/>
+            </a:fontRef>
+          </p:style>
+        </p:cxnSp>
+        <p:cxnSp>
+          <p:nvCxnSpPr>
+            <p:cNvPr id="31" name="Connector: Elbow 30">
+              <a:extLst>
+                <a:ext uri="{FF2B5EF4-FFF2-40B4-BE49-F238E27FC236}">
+                  <a16:creationId xmlns:a16="http://schemas.microsoft.com/office/drawing/2014/main" id="{74CC7E4D-EBFD-CE0A-066C-ACF590279ECE}"/>
+                </a:ext>
+              </a:extLst>
+            </p:cNvPr>
+            <p:cNvCxnSpPr>
+              <a:stCxn id="11" idx="3"/>
+              <a:endCxn id="16" idx="0"/>
+            </p:cNvCxnSpPr>
+            <p:nvPr/>
+          </p:nvCxnSpPr>
+          <p:spPr>
+            <a:xfrm>
+              <a:off x="22915488" y="7072280"/>
+              <a:ext cx="631361" cy="914400"/>
+            </a:xfrm>
+            <a:prstGeom prst="bentConnector2">
+              <a:avLst/>
+            </a:prstGeom>
+            <a:ln w="63500">
+              <a:solidFill>
+                <a:srgbClr val="1677B8"/>
+              </a:solidFill>
+              <a:tailEnd type="triangle"/>
+            </a:ln>
+          </p:spPr>
+          <p:style>
+            <a:lnRef idx="2">
+              <a:schemeClr val="accent1"/>
+            </a:lnRef>
+            <a:fillRef idx="0">
+              <a:schemeClr val="accent1"/>
+            </a:fillRef>
+            <a:effectRef idx="1">
+              <a:schemeClr val="accent1"/>
+            </a:effectRef>
+            <a:fontRef idx="minor">
+              <a:schemeClr val="tx1"/>
+            </a:fontRef>
+          </p:style>
+        </p:cxnSp>
+        <p:cxnSp>
+          <p:nvCxnSpPr>
+            <p:cNvPr id="33" name="Connector: Elbow 32">
+              <a:extLst>
+                <a:ext uri="{FF2B5EF4-FFF2-40B4-BE49-F238E27FC236}">
+                  <a16:creationId xmlns:a16="http://schemas.microsoft.com/office/drawing/2014/main" id="{11C870E8-3EEF-3A8F-AC1B-0704B1045924}"/>
+                </a:ext>
+              </a:extLst>
+            </p:cNvPr>
+            <p:cNvCxnSpPr>
+              <a:stCxn id="13" idx="3"/>
+              <a:endCxn id="16" idx="4"/>
+            </p:cNvCxnSpPr>
+            <p:nvPr/>
+          </p:nvCxnSpPr>
+          <p:spPr>
+            <a:xfrm flipV="1">
+              <a:off x="22915488" y="8402733"/>
+              <a:ext cx="631361" cy="953143"/>
+            </a:xfrm>
+            <a:prstGeom prst="bentConnector2">
+              <a:avLst/>
+            </a:prstGeom>
+            <a:ln w="63500">
+              <a:solidFill>
+                <a:srgbClr val="1677B8"/>
+              </a:solidFill>
+              <a:tailEnd type="triangle"/>
+            </a:ln>
+          </p:spPr>
+          <p:style>
+            <a:lnRef idx="2">
+              <a:schemeClr val="accent1"/>
+            </a:lnRef>
+            <a:fillRef idx="0">
+              <a:schemeClr val="accent1"/>
+            </a:fillRef>
+            <a:effectRef idx="1">
+              <a:schemeClr val="accent1"/>
+            </a:effectRef>
+            <a:fontRef idx="minor">
+              <a:schemeClr val="tx1"/>
+            </a:fontRef>
+          </p:style>
+        </p:cxnSp>
+        <p:cxnSp>
+          <p:nvCxnSpPr>
+            <p:cNvPr id="35" name="Straight Arrow Connector 34">
+              <a:extLst>
+                <a:ext uri="{FF2B5EF4-FFF2-40B4-BE49-F238E27FC236}">
+                  <a16:creationId xmlns:a16="http://schemas.microsoft.com/office/drawing/2014/main" id="{388E01A2-1A65-F5B0-1C4A-AE02E83B3679}"/>
+                </a:ext>
+              </a:extLst>
+            </p:cNvPr>
+            <p:cNvCxnSpPr>
+              <a:stCxn id="16" idx="6"/>
+              <a:endCxn id="15" idx="1"/>
+            </p:cNvCxnSpPr>
+            <p:nvPr/>
+          </p:nvCxnSpPr>
+          <p:spPr>
+            <a:xfrm flipV="1">
+              <a:off x="23769521" y="8193691"/>
+              <a:ext cx="694548" cy="1016"/>
+            </a:xfrm>
+            <a:prstGeom prst="straightConnector1">
+              <a:avLst/>
+            </a:prstGeom>
+            <a:ln w="63500">
+              <a:solidFill>
+                <a:srgbClr val="1677B8"/>
+              </a:solidFill>
+              <a:tailEnd type="triangle"/>
+            </a:ln>
+          </p:spPr>
+          <p:style>
+            <a:lnRef idx="2">
+              <a:schemeClr val="accent1"/>
+            </a:lnRef>
+            <a:fillRef idx="0">
+              <a:schemeClr val="accent1"/>
+            </a:fillRef>
+            <a:effectRef idx="1">
+              <a:schemeClr val="accent1"/>
+            </a:effectRef>
+            <a:fontRef idx="minor">
+              <a:schemeClr val="tx1"/>
+            </a:fontRef>
+          </p:style>
+        </p:cxnSp>
+        <p:cxnSp>
+          <p:nvCxnSpPr>
+            <p:cNvPr id="81" name="Straight Arrow Connector 80">
+              <a:extLst>
+                <a:ext uri="{FF2B5EF4-FFF2-40B4-BE49-F238E27FC236}">
+                  <a16:creationId xmlns:a16="http://schemas.microsoft.com/office/drawing/2014/main" id="{30466E74-031D-C5B2-D001-8C9EC63D41C6}"/>
+                </a:ext>
+              </a:extLst>
+            </p:cNvPr>
+            <p:cNvCxnSpPr>
+              <a:stCxn id="5" idx="3"/>
+              <a:endCxn id="9" idx="1"/>
+            </p:cNvCxnSpPr>
+            <p:nvPr/>
+          </p:nvCxnSpPr>
+          <p:spPr>
+            <a:xfrm>
+              <a:off x="13736362" y="8193690"/>
+              <a:ext cx="865965" cy="0"/>
+            </a:xfrm>
+            <a:prstGeom prst="straightConnector1">
+              <a:avLst/>
+            </a:prstGeom>
+            <a:ln w="63500">
+              <a:solidFill>
+                <a:srgbClr val="1677B8"/>
+              </a:solidFill>
+              <a:tailEnd type="triangle"/>
+            </a:ln>
+          </p:spPr>
+          <p:style>
+            <a:lnRef idx="2">
+              <a:schemeClr val="accent1"/>
+            </a:lnRef>
+            <a:fillRef idx="0">
+              <a:schemeClr val="accent1"/>
+            </a:fillRef>
+            <a:effectRef idx="1">
+              <a:schemeClr val="accent1"/>
+            </a:effectRef>
+            <a:fontRef idx="minor">
+              <a:schemeClr val="tx1"/>
+            </a:fontRef>
+          </p:style>
+        </p:cxnSp>
+        <p:cxnSp>
+          <p:nvCxnSpPr>
+            <p:cNvPr id="85" name="Straight Arrow Connector 84">
+              <a:extLst>
+                <a:ext uri="{FF2B5EF4-FFF2-40B4-BE49-F238E27FC236}">
+                  <a16:creationId xmlns:a16="http://schemas.microsoft.com/office/drawing/2014/main" id="{CDD5B0F8-EC0D-63C5-1F5F-CE44D557565A}"/>
+                </a:ext>
+              </a:extLst>
+            </p:cNvPr>
+            <p:cNvCxnSpPr>
+              <a:stCxn id="15" idx="3"/>
+              <a:endCxn id="8" idx="1"/>
+            </p:cNvCxnSpPr>
+            <p:nvPr/>
+          </p:nvCxnSpPr>
+          <p:spPr>
+            <a:xfrm flipV="1">
+              <a:off x="26292869" y="8193689"/>
+              <a:ext cx="1106687" cy="2"/>
+            </a:xfrm>
+            <a:prstGeom prst="straightConnector1">
+              <a:avLst/>
+            </a:prstGeom>
+            <a:ln w="63500">
+              <a:solidFill>
+                <a:srgbClr val="1677B8"/>
+              </a:solidFill>
+              <a:tailEnd type="triangle"/>
+            </a:ln>
+          </p:spPr>
+          <p:style>
+            <a:lnRef idx="2">
+              <a:schemeClr val="accent1"/>
+            </a:lnRef>
+            <a:fillRef idx="0">
+              <a:schemeClr val="accent1"/>
+            </a:fillRef>
+            <a:effectRef idx="1">
+              <a:schemeClr val="accent1"/>
+            </a:effectRef>
+            <a:fontRef idx="minor">
+              <a:schemeClr val="tx1"/>
+            </a:fontRef>
+          </p:style>
+        </p:cxnSp>
+      </p:grpSp>
+      <p:grpSp>
+        <p:nvGrpSpPr>
+          <p:cNvPr id="101" name="Group 100">
+            <a:extLst>
+              <a:ext uri="{FF2B5EF4-FFF2-40B4-BE49-F238E27FC236}">
+                <a16:creationId xmlns:a16="http://schemas.microsoft.com/office/drawing/2014/main" id="{89BA2DCE-EEC9-1B84-7ACD-A534348137AE}"/>
+              </a:ext>
+            </a:extLst>
+          </p:cNvPr>
+          <p:cNvGrpSpPr/>
+          <p:nvPr/>
+        </p:nvGrpSpPr>
+        <p:grpSpPr>
+          <a:xfrm>
+            <a:off x="14901780" y="13428862"/>
+            <a:ext cx="11814255" cy="1287468"/>
+            <a:chOff x="14901780" y="13428862"/>
+            <a:chExt cx="11814255" cy="1287468"/>
+          </a:xfrm>
+        </p:grpSpPr>
+        <p:sp>
+          <p:nvSpPr>
+            <p:cNvPr id="7" name="Rectangle: Rounded Corners 6">
+              <a:extLst>
+                <a:ext uri="{FF2B5EF4-FFF2-40B4-BE49-F238E27FC236}">
+                  <a16:creationId xmlns:a16="http://schemas.microsoft.com/office/drawing/2014/main" id="{03793948-0BF5-053E-AE62-23A07E3CAB3D}"/>
+                </a:ext>
+              </a:extLst>
+            </p:cNvPr>
+            <p:cNvSpPr/>
+            <p:nvPr/>
+          </p:nvSpPr>
+          <p:spPr>
+            <a:xfrm>
+              <a:off x="19577417" y="13494460"/>
               <a:ext cx="2462981" cy="1156273"/>
             </a:xfrm>
             <a:prstGeom prst="roundRect">
               <a:avLst/>
             </a:prstGeom>
             <a:solidFill>
-              <a:srgbClr val="356D9A"/>
+              <a:srgbClr val="EAF3F8"/>
             </a:solidFill>
-            <a:ln>
+            <a:ln w="63500">
               <a:solidFill>
-                <a:srgbClr val="94A3B8"/>
+                <a:srgbClr val="176B87"/>
               </a:solidFill>
             </a:ln>
           </p:spPr>
@@ -3249,26 +7491,312 @@
             <a:p>
               <a:pPr algn="ctr"/>
               <a:r>
-                <a:rPr lang="en-US" sz="2770" dirty="0"/>
-                <a:t>Encoder2</a:t>
+                <a:rPr lang="en-US" sz="2770" dirty="0">
+                  <a:solidFill>
+                    <a:srgbClr val="263238"/>
+                  </a:solidFill>
+                </a:rPr>
+                <a:t>Soft K-Top</a:t>
               </a:r>
-            </a:p>
-            <a:p>
-              <a:pPr algn="ctr"/>
-              <a:r>
-                <a:rPr lang="en-US" altLang="zh-CN" sz="2770" dirty="0"/>
-                <a:t>128×64×64</a:t>
-              </a:r>
-              <a:endParaRPr lang="en-US" sz="2770" dirty="0"/>
             </a:p>
           </p:txBody>
         </p:sp>
+        <mc:AlternateContent xmlns:mc="http://schemas.openxmlformats.org/markup-compatibility/2006">
+          <mc:Choice xmlns:a14="http://schemas.microsoft.com/office/drawing/2010/main" Requires="a14">
+            <p:sp>
+              <p:nvSpPr>
+                <p:cNvPr id="55" name="TextBox 54">
+                  <a:extLst>
+                    <a:ext uri="{FF2B5EF4-FFF2-40B4-BE49-F238E27FC236}">
+                      <a16:creationId xmlns:a16="http://schemas.microsoft.com/office/drawing/2014/main" id="{6BCCBD30-8158-EDC5-234F-113AECD0518F}"/>
+                    </a:ext>
+                  </a:extLst>
+                </p:cNvPr>
+                <p:cNvSpPr txBox="1"/>
+                <p:nvPr/>
+              </p:nvSpPr>
+              <p:spPr>
+                <a:xfrm>
+                  <a:off x="22742866" y="13428862"/>
+                  <a:ext cx="807720" cy="1287468"/>
+                </a:xfrm>
+                <a:prstGeom prst="rect">
+                  <a:avLst/>
+                </a:prstGeom>
+                <a:noFill/>
+              </p:spPr>
+              <p:txBody>
+                <a:bodyPr wrap="square" lIns="0" tIns="0" rIns="0" bIns="0" rtlCol="0">
+                  <a:spAutoFit/>
+                </a:bodyPr>
+                <a:lstStyle/>
+                <a:p>
+                  <a14:m>
+                    <m:oMathPara xmlns:m="http://schemas.openxmlformats.org/officeDocument/2006/math">
+                      <m:oMathParaPr>
+                        <m:jc m:val="centerGroup"/>
+                      </m:oMathParaPr>
+                      <m:oMath xmlns:m="http://schemas.openxmlformats.org/officeDocument/2006/math">
+                        <m:f>
+                          <m:fPr>
+                            <m:ctrlPr>
+                              <a:rPr lang="en-US" sz="4400" i="1" smtClean="0">
+                                <a:solidFill>
+                                  <a:schemeClr val="tx1"/>
+                                </a:solidFill>
+                                <a:latin typeface="Cambria Math" panose="02040503050406030204" pitchFamily="18" charset="0"/>
+                              </a:rPr>
+                            </m:ctrlPr>
+                          </m:fPr>
+                          <m:num>
+                            <m:r>
+                              <a:rPr lang="en-US" sz="4400" i="1" smtClean="0">
+                                <a:solidFill>
+                                  <a:schemeClr val="tx1"/>
+                                </a:solidFill>
+                                <a:latin typeface="Cambria Math" panose="02040503050406030204" pitchFamily="18" charset="0"/>
+                              </a:rPr>
+                              <m:t>𝜕</m:t>
+                            </m:r>
+                            <m:r>
+                              <a:rPr lang="en-US" sz="4400" b="0" i="1" smtClean="0">
+                                <a:solidFill>
+                                  <a:schemeClr val="tx1"/>
+                                </a:solidFill>
+                                <a:latin typeface="Cambria Math" panose="02040503050406030204" pitchFamily="18" charset="0"/>
+                              </a:rPr>
+                              <m:t>𝐿</m:t>
+                            </m:r>
+                          </m:num>
+                          <m:den>
+                            <m:r>
+                              <a:rPr lang="en-US" sz="4400" i="1" smtClean="0">
+                                <a:solidFill>
+                                  <a:schemeClr val="tx1"/>
+                                </a:solidFill>
+                                <a:latin typeface="Cambria Math" panose="02040503050406030204" pitchFamily="18" charset="0"/>
+                              </a:rPr>
+                              <m:t>𝜕</m:t>
+                            </m:r>
+                            <m:r>
+                              <a:rPr lang="en-US" sz="4400" b="0" i="1" smtClean="0">
+                                <a:solidFill>
+                                  <a:schemeClr val="tx1"/>
+                                </a:solidFill>
+                                <a:latin typeface="Cambria Math" panose="02040503050406030204" pitchFamily="18" charset="0"/>
+                              </a:rPr>
+                              <m:t>𝑀</m:t>
+                            </m:r>
+                          </m:den>
+                        </m:f>
+                      </m:oMath>
+                    </m:oMathPara>
+                  </a14:m>
+                  <a:endParaRPr lang="en-US" sz="4400" dirty="0">
+                    <a:solidFill>
+                      <a:schemeClr val="tx1"/>
+                    </a:solidFill>
+                  </a:endParaRPr>
+                </a:p>
+              </p:txBody>
+            </p:sp>
+          </mc:Choice>
+          <mc:Fallback>
+            <p:sp>
+              <p:nvSpPr>
+                <p:cNvPr id="55" name="TextBox 54">
+                  <a:extLst>
+                    <a:ext uri="{FF2B5EF4-FFF2-40B4-BE49-F238E27FC236}">
+                      <a16:creationId xmlns:a16="http://schemas.microsoft.com/office/drawing/2014/main" id="{6BCCBD30-8158-EDC5-234F-113AECD0518F}"/>
+                    </a:ext>
+                  </a:extLst>
+                </p:cNvPr>
+                <p:cNvSpPr txBox="1">
+                  <a:spLocks noRot="1" noChangeAspect="1" noMove="1" noResize="1" noEditPoints="1" noAdjustHandles="1" noChangeArrowheads="1" noChangeShapeType="1" noTextEdit="1"/>
+                </p:cNvSpPr>
+                <p:nvPr/>
+              </p:nvSpPr>
+              <p:spPr>
+                <a:xfrm>
+                  <a:off x="22742866" y="13428862"/>
+                  <a:ext cx="807720" cy="1287468"/>
+                </a:xfrm>
+                <a:prstGeom prst="rect">
+                  <a:avLst/>
+                </a:prstGeom>
+                <a:blipFill>
+                  <a:blip r:embed="rId6"/>
+                  <a:stretch>
+                    <a:fillRect l="-758"/>
+                  </a:stretch>
+                </a:blipFill>
+              </p:spPr>
+              <p:txBody>
+                <a:bodyPr/>
+                <a:lstStyle/>
+                <a:p>
+                  <a:r>
+                    <a:rPr lang="en-US">
+                      <a:noFill/>
+                    </a:rPr>
+                    <a:t> </a:t>
+                  </a:r>
+                </a:p>
+              </p:txBody>
+            </p:sp>
+          </mc:Fallback>
+        </mc:AlternateContent>
+        <mc:AlternateContent xmlns:mc="http://schemas.openxmlformats.org/markup-compatibility/2006">
+          <mc:Choice xmlns:a14="http://schemas.microsoft.com/office/drawing/2010/main" Requires="a14">
+            <p:sp>
+              <p:nvSpPr>
+                <p:cNvPr id="56" name="TextBox 55">
+                  <a:extLst>
+                    <a:ext uri="{FF2B5EF4-FFF2-40B4-BE49-F238E27FC236}">
+                      <a16:creationId xmlns:a16="http://schemas.microsoft.com/office/drawing/2014/main" id="{5E07E4C6-19BC-D175-3F98-31E563048288}"/>
+                    </a:ext>
+                  </a:extLst>
+                </p:cNvPr>
+                <p:cNvSpPr txBox="1"/>
+                <p:nvPr/>
+              </p:nvSpPr>
+              <p:spPr>
+                <a:xfrm>
+                  <a:off x="18067229" y="13428862"/>
+                  <a:ext cx="807720" cy="1287468"/>
+                </a:xfrm>
+                <a:prstGeom prst="rect">
+                  <a:avLst/>
+                </a:prstGeom>
+                <a:noFill/>
+              </p:spPr>
+              <p:txBody>
+                <a:bodyPr wrap="square" lIns="0" tIns="0" rIns="0" bIns="0" rtlCol="0">
+                  <a:spAutoFit/>
+                </a:bodyPr>
+                <a:lstStyle/>
+                <a:p>
+                  <a14:m>
+                    <m:oMathPara xmlns:m="http://schemas.openxmlformats.org/officeDocument/2006/math">
+                      <m:oMathParaPr>
+                        <m:jc m:val="centerGroup"/>
+                      </m:oMathParaPr>
+                      <m:oMath xmlns:m="http://schemas.openxmlformats.org/officeDocument/2006/math">
+                        <m:f>
+                          <m:fPr>
+                            <m:ctrlPr>
+                              <a:rPr lang="en-US" sz="4400" i="1" smtClean="0">
+                                <a:solidFill>
+                                  <a:schemeClr val="tx1"/>
+                                </a:solidFill>
+                                <a:latin typeface="Cambria Math" panose="02040503050406030204" pitchFamily="18" charset="0"/>
+                              </a:rPr>
+                            </m:ctrlPr>
+                          </m:fPr>
+                          <m:num>
+                            <m:r>
+                              <a:rPr lang="en-US" sz="4400" i="1" smtClean="0">
+                                <a:solidFill>
+                                  <a:schemeClr val="tx1"/>
+                                </a:solidFill>
+                                <a:latin typeface="Cambria Math" panose="02040503050406030204" pitchFamily="18" charset="0"/>
+                              </a:rPr>
+                              <m:t>𝜕</m:t>
+                            </m:r>
+                            <m:r>
+                              <a:rPr lang="en-US" sz="4400" b="0" i="1" smtClean="0">
+                                <a:solidFill>
+                                  <a:schemeClr val="tx1"/>
+                                </a:solidFill>
+                                <a:latin typeface="Cambria Math" panose="02040503050406030204" pitchFamily="18" charset="0"/>
+                              </a:rPr>
+                              <m:t>𝐿</m:t>
+                            </m:r>
+                          </m:num>
+                          <m:den>
+                            <m:r>
+                              <a:rPr lang="en-US" sz="4400" i="1" smtClean="0">
+                                <a:solidFill>
+                                  <a:schemeClr val="tx1"/>
+                                </a:solidFill>
+                                <a:latin typeface="Cambria Math" panose="02040503050406030204" pitchFamily="18" charset="0"/>
+                              </a:rPr>
+                              <m:t>𝜕</m:t>
+                            </m:r>
+                            <m:r>
+                              <a:rPr lang="en-US" sz="4400" b="0" i="1" smtClean="0">
+                                <a:solidFill>
+                                  <a:schemeClr val="tx1"/>
+                                </a:solidFill>
+                                <a:latin typeface="Cambria Math" panose="02040503050406030204" pitchFamily="18" charset="0"/>
+                              </a:rPr>
+                              <m:t>𝑆</m:t>
+                            </m:r>
+                          </m:den>
+                        </m:f>
+                      </m:oMath>
+                    </m:oMathPara>
+                  </a14:m>
+                  <a:endParaRPr lang="en-US" sz="4400" dirty="0">
+                    <a:solidFill>
+                      <a:schemeClr val="tx1"/>
+                    </a:solidFill>
+                  </a:endParaRPr>
+                </a:p>
+              </p:txBody>
+            </p:sp>
+          </mc:Choice>
+          <mc:Fallback>
+            <p:sp>
+              <p:nvSpPr>
+                <p:cNvPr id="56" name="TextBox 55">
+                  <a:extLst>
+                    <a:ext uri="{FF2B5EF4-FFF2-40B4-BE49-F238E27FC236}">
+                      <a16:creationId xmlns:a16="http://schemas.microsoft.com/office/drawing/2014/main" id="{5E07E4C6-19BC-D175-3F98-31E563048288}"/>
+                    </a:ext>
+                  </a:extLst>
+                </p:cNvPr>
+                <p:cNvSpPr txBox="1">
+                  <a:spLocks noRot="1" noChangeAspect="1" noMove="1" noResize="1" noEditPoints="1" noAdjustHandles="1" noChangeArrowheads="1" noChangeShapeType="1" noTextEdit="1"/>
+                </p:cNvSpPr>
+                <p:nvPr/>
+              </p:nvSpPr>
+              <p:spPr>
+                <a:xfrm>
+                  <a:off x="18067229" y="13428862"/>
+                  <a:ext cx="807720" cy="1287468"/>
+                </a:xfrm>
+                <a:prstGeom prst="rect">
+                  <a:avLst/>
+                </a:prstGeom>
+                <a:blipFill>
+                  <a:blip r:embed="rId7"/>
+                  <a:stretch>
+                    <a:fillRect/>
+                  </a:stretch>
+                </a:blipFill>
+              </p:spPr>
+              <p:txBody>
+                <a:bodyPr/>
+                <a:lstStyle/>
+                <a:p>
+                  <a:r>
+                    <a:rPr lang="en-US">
+                      <a:noFill/>
+                    </a:rPr>
+                    <a:t> </a:t>
+                  </a:r>
+                </a:p>
+              </p:txBody>
+            </p:sp>
+          </mc:Fallback>
+        </mc:AlternateContent>
         <p:sp>
           <p:nvSpPr>
-            <p:cNvPr id="19" name="Rectangle: Rounded Corners 18">
+            <p:cNvPr id="71" name="Rectangle: Rounded Corners 70">
               <a:extLst>
                 <a:ext uri="{FF2B5EF4-FFF2-40B4-BE49-F238E27FC236}">
-                  <a16:creationId xmlns:a16="http://schemas.microsoft.com/office/drawing/2014/main" id="{BB1CD5E3-FAB7-8FE5-EC95-3739011B1A0F}"/>
+                  <a16:creationId xmlns:a16="http://schemas.microsoft.com/office/drawing/2014/main" id="{CE92C805-DC35-02C3-0442-739EB9F5765A}"/>
                 </a:ext>
               </a:extLst>
             </p:cNvPr>
@@ -3277,18 +7805,18 @@
           </p:nvSpPr>
           <p:spPr>
             <a:xfrm>
-              <a:off x="9747774" y="10299995"/>
-              <a:ext cx="2462980" cy="1156273"/>
+              <a:off x="24253054" y="13494460"/>
+              <a:ext cx="2462981" cy="1156273"/>
             </a:xfrm>
             <a:prstGeom prst="roundRect">
               <a:avLst/>
             </a:prstGeom>
             <a:solidFill>
-              <a:srgbClr val="356D9A"/>
+              <a:srgbClr val="EAF3F8"/>
             </a:solidFill>
-            <a:ln>
+            <a:ln w="63500">
               <a:solidFill>
-                <a:srgbClr val="94A3B8"/>
+                <a:srgbClr val="176B87"/>
               </a:solidFill>
             </a:ln>
           </p:spPr>
@@ -3314,26 +7842,27 @@
             <a:p>
               <a:pPr algn="ctr"/>
               <a:r>
-                <a:rPr lang="en-US" sz="2770" dirty="0"/>
-                <a:t>Encoder3</a:t>
+                <a:rPr lang="zh-CN" altLang="en-US" sz="2770" dirty="0">
+                  <a:solidFill>
+                    <a:srgbClr val="263238"/>
+                  </a:solidFill>
+                </a:rPr>
+                <a:t>重建器</a:t>
               </a:r>
-            </a:p>
-            <a:p>
-              <a:pPr algn="ctr"/>
-              <a:r>
-                <a:rPr lang="en-US" altLang="zh-CN" sz="2770" dirty="0"/>
-                <a:t>256×32×32</a:t>
-              </a:r>
-              <a:endParaRPr lang="en-US" sz="2770" dirty="0"/>
+              <a:endParaRPr lang="en-US" sz="2770" dirty="0">
+                <a:solidFill>
+                  <a:srgbClr val="263238"/>
+                </a:solidFill>
+              </a:endParaRPr>
             </a:p>
           </p:txBody>
         </p:sp>
         <p:sp>
           <p:nvSpPr>
-            <p:cNvPr id="20" name="Rectangle: Rounded Corners 19">
+            <p:cNvPr id="89" name="Rectangle: Rounded Corners 88">
               <a:extLst>
                 <a:ext uri="{FF2B5EF4-FFF2-40B4-BE49-F238E27FC236}">
-                  <a16:creationId xmlns:a16="http://schemas.microsoft.com/office/drawing/2014/main" id="{25DDD7B7-EFCF-6E57-AD4A-C3F11647216D}"/>
+                  <a16:creationId xmlns:a16="http://schemas.microsoft.com/office/drawing/2014/main" id="{88F37DEF-18B2-A557-6EFC-BAE0AC00035E}"/>
                 </a:ext>
               </a:extLst>
             </p:cNvPr>
@@ -3342,18 +7871,18 @@
           </p:nvSpPr>
           <p:spPr>
             <a:xfrm>
-              <a:off x="9747774" y="11902406"/>
+              <a:off x="14901780" y="13494460"/>
               <a:ext cx="2462981" cy="1156273"/>
             </a:xfrm>
             <a:prstGeom prst="roundRect">
               <a:avLst/>
             </a:prstGeom>
             <a:solidFill>
-              <a:srgbClr val="356D9A"/>
+              <a:srgbClr val="EAF3F8"/>
             </a:solidFill>
-            <a:ln>
+            <a:ln w="63500">
               <a:solidFill>
-                <a:srgbClr val="94A3B8"/>
+                <a:srgbClr val="176B87"/>
               </a:solidFill>
             </a:ln>
           </p:spPr>
@@ -3379,45 +7908,47 @@
             <a:p>
               <a:pPr algn="ctr"/>
               <a:r>
-                <a:rPr lang="en-US" sz="2770" dirty="0"/>
-                <a:t>Encoder4</a:t>
+                <a:rPr lang="zh-CN" altLang="en-US" sz="2770" dirty="0">
+                  <a:solidFill>
+                    <a:srgbClr val="263238"/>
+                  </a:solidFill>
+                </a:rPr>
+                <a:t>采样器</a:t>
               </a:r>
-            </a:p>
-            <a:p>
-              <a:pPr algn="ctr"/>
-              <a:r>
-                <a:rPr lang="en-US" altLang="zh-CN" sz="2770" dirty="0"/>
-                <a:t>512×16×16</a:t>
-              </a:r>
-              <a:endParaRPr lang="en-US" sz="2770" dirty="0"/>
+              <a:endParaRPr lang="en-US" sz="2770" dirty="0">
+                <a:solidFill>
+                  <a:srgbClr val="263238"/>
+                </a:solidFill>
+              </a:endParaRPr>
             </a:p>
           </p:txBody>
         </p:sp>
         <p:cxnSp>
           <p:nvCxnSpPr>
-            <p:cNvPr id="36" name="Straight Arrow Connector 35">
+            <p:cNvPr id="93" name="Straight Arrow Connector 92">
               <a:extLst>
                 <a:ext uri="{FF2B5EF4-FFF2-40B4-BE49-F238E27FC236}">
-                  <a16:creationId xmlns:a16="http://schemas.microsoft.com/office/drawing/2014/main" id="{53B2067C-C040-0F99-ED00-C7FC67A110EE}"/>
+                  <a16:creationId xmlns:a16="http://schemas.microsoft.com/office/drawing/2014/main" id="{4D14990E-C2B9-8237-E675-4E1468C27E6E}"/>
                 </a:ext>
               </a:extLst>
             </p:cNvPr>
             <p:cNvCxnSpPr>
-              <a:cxnSpLocks/>
+              <a:stCxn id="71" idx="1"/>
+              <a:endCxn id="55" idx="3"/>
             </p:cNvCxnSpPr>
             <p:nvPr/>
           </p:nvCxnSpPr>
           <p:spPr>
-            <a:xfrm>
-              <a:off x="10979264" y="6658247"/>
-              <a:ext cx="0" cy="442452"/>
+            <a:xfrm flipH="1" flipV="1">
+              <a:off x="23550586" y="14072596"/>
+              <a:ext cx="702468" cy="1"/>
             </a:xfrm>
             <a:prstGeom prst="straightConnector1">
               <a:avLst/>
             </a:prstGeom>
             <a:ln w="63500">
               <a:solidFill>
-                <a:srgbClr val="94A3B8"/>
+                <a:srgbClr val="D97706"/>
               </a:solidFill>
               <a:tailEnd type="triangle"/>
             </a:ln>
@@ -3439,29 +7970,30 @@
         </p:cxnSp>
         <p:cxnSp>
           <p:nvCxnSpPr>
-            <p:cNvPr id="37" name="Straight Arrow Connector 36">
+            <p:cNvPr id="95" name="Straight Arrow Connector 94">
               <a:extLst>
                 <a:ext uri="{FF2B5EF4-FFF2-40B4-BE49-F238E27FC236}">
-                  <a16:creationId xmlns:a16="http://schemas.microsoft.com/office/drawing/2014/main" id="{38CFD7DD-1759-65C7-4FBC-F3E59188FB00}"/>
+                  <a16:creationId xmlns:a16="http://schemas.microsoft.com/office/drawing/2014/main" id="{5E62CE54-07B6-BD9B-761D-61DE075DBE9F}"/>
                 </a:ext>
               </a:extLst>
             </p:cNvPr>
             <p:cNvCxnSpPr>
-              <a:cxnSpLocks/>
+              <a:stCxn id="55" idx="1"/>
+              <a:endCxn id="7" idx="3"/>
             </p:cNvCxnSpPr>
             <p:nvPr/>
           </p:nvCxnSpPr>
           <p:spPr>
-            <a:xfrm>
-              <a:off x="10979264" y="8245912"/>
-              <a:ext cx="0" cy="457200"/>
+            <a:xfrm flipH="1">
+              <a:off x="22040398" y="14072596"/>
+              <a:ext cx="702468" cy="1"/>
             </a:xfrm>
             <a:prstGeom prst="straightConnector1">
               <a:avLst/>
             </a:prstGeom>
             <a:ln w="63500">
               <a:solidFill>
-                <a:srgbClr val="94A3B8"/>
+                <a:srgbClr val="D97706"/>
               </a:solidFill>
               <a:tailEnd type="triangle"/>
             </a:ln>
@@ -3483,29 +8015,29 @@
         </p:cxnSp>
         <p:cxnSp>
           <p:nvCxnSpPr>
-            <p:cNvPr id="38" name="Straight Arrow Connector 37">
+            <p:cNvPr id="97" name="Straight Arrow Connector 96">
               <a:extLst>
                 <a:ext uri="{FF2B5EF4-FFF2-40B4-BE49-F238E27FC236}">
-                  <a16:creationId xmlns:a16="http://schemas.microsoft.com/office/drawing/2014/main" id="{F5D66311-C533-B03A-45E2-523BAD7BC62A}"/>
+                  <a16:creationId xmlns:a16="http://schemas.microsoft.com/office/drawing/2014/main" id="{75A3B7D3-CA92-B99A-B461-5F164316DC6F}"/>
                 </a:ext>
               </a:extLst>
             </p:cNvPr>
             <p:cNvCxnSpPr>
-              <a:cxnSpLocks/>
+              <a:stCxn id="7" idx="1"/>
             </p:cNvCxnSpPr>
             <p:nvPr/>
           </p:nvCxnSpPr>
           <p:spPr>
-            <a:xfrm>
-              <a:off x="10979264" y="9848325"/>
-              <a:ext cx="0" cy="457200"/>
+            <a:xfrm flipH="1" flipV="1">
+              <a:off x="18779800" y="14072596"/>
+              <a:ext cx="797617" cy="1"/>
             </a:xfrm>
             <a:prstGeom prst="straightConnector1">
               <a:avLst/>
             </a:prstGeom>
             <a:ln w="63500">
               <a:solidFill>
-                <a:srgbClr val="94A3B8"/>
+                <a:srgbClr val="D97706"/>
               </a:solidFill>
               <a:tailEnd type="triangle"/>
             </a:ln>
@@ -3527,1326 +8059,30 @@
         </p:cxnSp>
         <p:cxnSp>
           <p:nvCxnSpPr>
-            <p:cNvPr id="39" name="Straight Arrow Connector 38">
+            <p:cNvPr id="99" name="Straight Arrow Connector 98">
               <a:extLst>
                 <a:ext uri="{FF2B5EF4-FFF2-40B4-BE49-F238E27FC236}">
-                  <a16:creationId xmlns:a16="http://schemas.microsoft.com/office/drawing/2014/main" id="{409F9340-68CB-272A-B67C-90C4D706DF73}"/>
+                  <a16:creationId xmlns:a16="http://schemas.microsoft.com/office/drawing/2014/main" id="{779B7E1D-BBB0-57EF-7B9D-308C445F6568}"/>
                 </a:ext>
               </a:extLst>
             </p:cNvPr>
             <p:cNvCxnSpPr>
-              <a:cxnSpLocks/>
+              <a:stCxn id="56" idx="1"/>
+              <a:endCxn id="89" idx="3"/>
             </p:cNvCxnSpPr>
             <p:nvPr/>
           </p:nvCxnSpPr>
           <p:spPr>
-            <a:xfrm>
-              <a:off x="10979264" y="11450738"/>
-              <a:ext cx="0" cy="457200"/>
+            <a:xfrm flipH="1">
+              <a:off x="17364761" y="14072596"/>
+              <a:ext cx="702468" cy="1"/>
             </a:xfrm>
             <a:prstGeom prst="straightConnector1">
               <a:avLst/>
             </a:prstGeom>
             <a:ln w="63500">
               <a:solidFill>
-                <a:srgbClr val="94A3B8"/>
-              </a:solidFill>
-              <a:tailEnd type="triangle"/>
-            </a:ln>
-          </p:spPr>
-          <p:style>
-            <a:lnRef idx="2">
-              <a:schemeClr val="accent1"/>
-            </a:lnRef>
-            <a:fillRef idx="0">
-              <a:schemeClr val="accent1"/>
-            </a:fillRef>
-            <a:effectRef idx="1">
-              <a:schemeClr val="accent1"/>
-            </a:effectRef>
-            <a:fontRef idx="minor">
-              <a:schemeClr val="tx1"/>
-            </a:fontRef>
-          </p:style>
-        </p:cxnSp>
-        <p:sp>
-          <p:nvSpPr>
-            <p:cNvPr id="22" name="Rectangle: Rounded Corners 21">
-              <a:extLst>
-                <a:ext uri="{FF2B5EF4-FFF2-40B4-BE49-F238E27FC236}">
-                  <a16:creationId xmlns:a16="http://schemas.microsoft.com/office/drawing/2014/main" id="{E019B51D-160C-EA71-C4B9-900F6E435A87}"/>
-                </a:ext>
-              </a:extLst>
-            </p:cNvPr>
-            <p:cNvSpPr/>
-            <p:nvPr/>
-          </p:nvSpPr>
-          <p:spPr>
-            <a:xfrm>
-              <a:off x="15919974" y="5507504"/>
-              <a:ext cx="2462981" cy="1156273"/>
-            </a:xfrm>
-            <a:prstGeom prst="roundRect">
-              <a:avLst/>
-            </a:prstGeom>
-            <a:solidFill>
-              <a:srgbClr val="5266A8"/>
-            </a:solidFill>
-            <a:ln>
-              <a:solidFill>
-                <a:srgbClr val="94A3B8"/>
-              </a:solidFill>
-            </a:ln>
-          </p:spPr>
-          <p:style>
-            <a:lnRef idx="2">
-              <a:schemeClr val="accent1">
-                <a:shade val="15000"/>
-              </a:schemeClr>
-            </a:lnRef>
-            <a:fillRef idx="1">
-              <a:schemeClr val="accent1"/>
-            </a:fillRef>
-            <a:effectRef idx="0">
-              <a:schemeClr val="accent1"/>
-            </a:effectRef>
-            <a:fontRef idx="minor">
-              <a:schemeClr val="lt1"/>
-            </a:fontRef>
-          </p:style>
-          <p:txBody>
-            <a:bodyPr rtlCol="0" anchor="ctr"/>
-            <a:lstStyle/>
-            <a:p>
-              <a:pPr algn="ctr"/>
-              <a:r>
-                <a:rPr lang="en-US" sz="2770" dirty="0"/>
-                <a:t>CNN</a:t>
-              </a:r>
-            </a:p>
-            <a:p>
-              <a:pPr algn="ctr"/>
-              <a:r>
-                <a:rPr lang="en-US" sz="2770" dirty="0"/>
-                <a:t>1</a:t>
-              </a:r>
-              <a:r>
-                <a:rPr lang="en-US" altLang="zh-CN" sz="2770" dirty="0"/>
-                <a:t>×1×1</a:t>
-              </a:r>
-              <a:endParaRPr lang="en-US" sz="2770" dirty="0"/>
-            </a:p>
-          </p:txBody>
-        </p:sp>
-        <p:sp>
-          <p:nvSpPr>
-            <p:cNvPr id="23" name="Rectangle: Rounded Corners 22">
-              <a:extLst>
-                <a:ext uri="{FF2B5EF4-FFF2-40B4-BE49-F238E27FC236}">
-                  <a16:creationId xmlns:a16="http://schemas.microsoft.com/office/drawing/2014/main" id="{69643496-F24F-DEF2-84FA-F35569DEF956}"/>
-                </a:ext>
-              </a:extLst>
-            </p:cNvPr>
-            <p:cNvSpPr/>
-            <p:nvPr/>
-          </p:nvSpPr>
-          <p:spPr>
-            <a:xfrm>
-              <a:off x="15919974" y="7106229"/>
-              <a:ext cx="2462981" cy="1156273"/>
-            </a:xfrm>
-            <a:prstGeom prst="roundRect">
-              <a:avLst/>
-            </a:prstGeom>
-            <a:solidFill>
-              <a:srgbClr val="238A8D"/>
-            </a:solidFill>
-            <a:ln>
-              <a:solidFill>
-                <a:srgbClr val="94A3B8"/>
-              </a:solidFill>
-            </a:ln>
-          </p:spPr>
-          <p:style>
-            <a:lnRef idx="2">
-              <a:schemeClr val="accent1">
-                <a:shade val="15000"/>
-              </a:schemeClr>
-            </a:lnRef>
-            <a:fillRef idx="1">
-              <a:schemeClr val="accent1"/>
-            </a:fillRef>
-            <a:effectRef idx="0">
-              <a:schemeClr val="accent1"/>
-            </a:effectRef>
-            <a:fontRef idx="minor">
-              <a:schemeClr val="lt1"/>
-            </a:fontRef>
-          </p:style>
-          <p:txBody>
-            <a:bodyPr rtlCol="0" anchor="ctr"/>
-            <a:lstStyle/>
-            <a:p>
-              <a:pPr algn="ctr"/>
-              <a:r>
-                <a:rPr lang="en-US" sz="2770" dirty="0"/>
-                <a:t>Decoder4</a:t>
-              </a:r>
-            </a:p>
-            <a:p>
-              <a:pPr algn="ctr"/>
-              <a:r>
-                <a:rPr lang="en-US" altLang="zh-CN" sz="2770" dirty="0"/>
-                <a:t>64×128×128</a:t>
-              </a:r>
-              <a:endParaRPr lang="en-US" sz="2770" dirty="0"/>
-            </a:p>
-          </p:txBody>
-        </p:sp>
-        <p:sp>
-          <p:nvSpPr>
-            <p:cNvPr id="24" name="Rectangle: Rounded Corners 23">
-              <a:extLst>
-                <a:ext uri="{FF2B5EF4-FFF2-40B4-BE49-F238E27FC236}">
-                  <a16:creationId xmlns:a16="http://schemas.microsoft.com/office/drawing/2014/main" id="{4E7FA3A8-BC71-C8D8-F566-1832F78860BC}"/>
-                </a:ext>
-              </a:extLst>
-            </p:cNvPr>
-            <p:cNvSpPr/>
-            <p:nvPr/>
-          </p:nvSpPr>
-          <p:spPr>
-            <a:xfrm>
-              <a:off x="15919974" y="8704954"/>
-              <a:ext cx="2462981" cy="1156273"/>
-            </a:xfrm>
-            <a:prstGeom prst="roundRect">
-              <a:avLst/>
-            </a:prstGeom>
-            <a:solidFill>
-              <a:srgbClr val="238A8D"/>
-            </a:solidFill>
-            <a:ln>
-              <a:solidFill>
-                <a:srgbClr val="94A3B8"/>
-              </a:solidFill>
-            </a:ln>
-          </p:spPr>
-          <p:style>
-            <a:lnRef idx="2">
-              <a:schemeClr val="accent1">
-                <a:shade val="15000"/>
-              </a:schemeClr>
-            </a:lnRef>
-            <a:fillRef idx="1">
-              <a:schemeClr val="accent1"/>
-            </a:fillRef>
-            <a:effectRef idx="0">
-              <a:schemeClr val="accent1"/>
-            </a:effectRef>
-            <a:fontRef idx="minor">
-              <a:schemeClr val="lt1"/>
-            </a:fontRef>
-          </p:style>
-          <p:txBody>
-            <a:bodyPr rtlCol="0" anchor="ctr"/>
-            <a:lstStyle/>
-            <a:p>
-              <a:pPr algn="ctr"/>
-              <a:r>
-                <a:rPr lang="en-US" sz="2770" dirty="0"/>
-                <a:t>Decoder3</a:t>
-              </a:r>
-            </a:p>
-            <a:p>
-              <a:pPr algn="ctr"/>
-              <a:r>
-                <a:rPr lang="en-US" altLang="zh-CN" sz="2770" dirty="0"/>
-                <a:t>128×64×64</a:t>
-              </a:r>
-              <a:endParaRPr lang="en-US" sz="2770" dirty="0"/>
-            </a:p>
-          </p:txBody>
-        </p:sp>
-        <p:sp>
-          <p:nvSpPr>
-            <p:cNvPr id="25" name="Rectangle: Rounded Corners 24">
-              <a:extLst>
-                <a:ext uri="{FF2B5EF4-FFF2-40B4-BE49-F238E27FC236}">
-                  <a16:creationId xmlns:a16="http://schemas.microsoft.com/office/drawing/2014/main" id="{5701B72B-D8C9-988A-CE31-DDD975B0B1F0}"/>
-                </a:ext>
-              </a:extLst>
-            </p:cNvPr>
-            <p:cNvSpPr/>
-            <p:nvPr/>
-          </p:nvSpPr>
-          <p:spPr>
-            <a:xfrm>
-              <a:off x="15919975" y="10303679"/>
-              <a:ext cx="2462980" cy="1156273"/>
-            </a:xfrm>
-            <a:prstGeom prst="roundRect">
-              <a:avLst/>
-            </a:prstGeom>
-            <a:solidFill>
-              <a:srgbClr val="238A8D"/>
-            </a:solidFill>
-            <a:ln>
-              <a:solidFill>
-                <a:srgbClr val="94A3B8"/>
-              </a:solidFill>
-            </a:ln>
-          </p:spPr>
-          <p:style>
-            <a:lnRef idx="2">
-              <a:schemeClr val="accent1">
-                <a:shade val="15000"/>
-              </a:schemeClr>
-            </a:lnRef>
-            <a:fillRef idx="1">
-              <a:schemeClr val="accent1"/>
-            </a:fillRef>
-            <a:effectRef idx="0">
-              <a:schemeClr val="accent1"/>
-            </a:effectRef>
-            <a:fontRef idx="minor">
-              <a:schemeClr val="lt1"/>
-            </a:fontRef>
-          </p:style>
-          <p:txBody>
-            <a:bodyPr rtlCol="0" anchor="ctr"/>
-            <a:lstStyle/>
-            <a:p>
-              <a:pPr algn="ctr"/>
-              <a:r>
-                <a:rPr lang="en-US" sz="2770" dirty="0"/>
-                <a:t>Decoder2</a:t>
-              </a:r>
-            </a:p>
-            <a:p>
-              <a:pPr algn="ctr"/>
-              <a:r>
-                <a:rPr lang="en-US" altLang="zh-CN" sz="2770" dirty="0"/>
-                <a:t>256×32×32</a:t>
-              </a:r>
-              <a:endParaRPr lang="en-US" sz="2770" dirty="0"/>
-            </a:p>
-          </p:txBody>
-        </p:sp>
-        <p:sp>
-          <p:nvSpPr>
-            <p:cNvPr id="26" name="Rectangle: Rounded Corners 25">
-              <a:extLst>
-                <a:ext uri="{FF2B5EF4-FFF2-40B4-BE49-F238E27FC236}">
-                  <a16:creationId xmlns:a16="http://schemas.microsoft.com/office/drawing/2014/main" id="{22051E0F-C3FC-E1A1-7BAA-A5193C7F47C5}"/>
-                </a:ext>
-              </a:extLst>
-            </p:cNvPr>
-            <p:cNvSpPr/>
-            <p:nvPr/>
-          </p:nvSpPr>
-          <p:spPr>
-            <a:xfrm>
-              <a:off x="15919974" y="11902406"/>
-              <a:ext cx="2462981" cy="1156273"/>
-            </a:xfrm>
-            <a:prstGeom prst="roundRect">
-              <a:avLst/>
-            </a:prstGeom>
-            <a:solidFill>
-              <a:srgbClr val="238A8D"/>
-            </a:solidFill>
-            <a:ln>
-              <a:solidFill>
-                <a:srgbClr val="94A3B8"/>
-              </a:solidFill>
-            </a:ln>
-          </p:spPr>
-          <p:style>
-            <a:lnRef idx="2">
-              <a:schemeClr val="accent1">
-                <a:shade val="15000"/>
-              </a:schemeClr>
-            </a:lnRef>
-            <a:fillRef idx="1">
-              <a:schemeClr val="accent1"/>
-            </a:fillRef>
-            <a:effectRef idx="0">
-              <a:schemeClr val="accent1"/>
-            </a:effectRef>
-            <a:fontRef idx="minor">
-              <a:schemeClr val="lt1"/>
-            </a:fontRef>
-          </p:style>
-          <p:txBody>
-            <a:bodyPr rtlCol="0" anchor="ctr"/>
-            <a:lstStyle/>
-            <a:p>
-              <a:pPr algn="ctr"/>
-              <a:r>
-                <a:rPr lang="en-US" sz="2770" dirty="0"/>
-                <a:t>Decoder1</a:t>
-              </a:r>
-            </a:p>
-            <a:p>
-              <a:pPr algn="ctr"/>
-              <a:r>
-                <a:rPr lang="en-US" altLang="zh-CN" sz="2770" dirty="0"/>
-                <a:t>512×16×16</a:t>
-              </a:r>
-              <a:endParaRPr lang="en-US" sz="2770" dirty="0"/>
-            </a:p>
-          </p:txBody>
-        </p:sp>
-        <p:cxnSp>
-          <p:nvCxnSpPr>
-            <p:cNvPr id="40" name="Straight Arrow Connector 39">
-              <a:extLst>
-                <a:ext uri="{FF2B5EF4-FFF2-40B4-BE49-F238E27FC236}">
-                  <a16:creationId xmlns:a16="http://schemas.microsoft.com/office/drawing/2014/main" id="{0C42977B-1B22-6283-987C-E8DBBC0423B5}"/>
-                </a:ext>
-              </a:extLst>
-            </p:cNvPr>
-            <p:cNvCxnSpPr>
-              <a:cxnSpLocks/>
-            </p:cNvCxnSpPr>
-            <p:nvPr/>
-          </p:nvCxnSpPr>
-          <p:spPr>
-            <a:xfrm rot="10800000">
-              <a:off x="17151464" y="6663777"/>
-              <a:ext cx="0" cy="457200"/>
-            </a:xfrm>
-            <a:prstGeom prst="straightConnector1">
-              <a:avLst/>
-            </a:prstGeom>
-            <a:ln w="63500">
-              <a:solidFill>
-                <a:srgbClr val="94A3B8"/>
-              </a:solidFill>
-              <a:tailEnd type="triangle"/>
-            </a:ln>
-          </p:spPr>
-          <p:style>
-            <a:lnRef idx="2">
-              <a:schemeClr val="accent1"/>
-            </a:lnRef>
-            <a:fillRef idx="0">
-              <a:schemeClr val="accent1"/>
-            </a:fillRef>
-            <a:effectRef idx="1">
-              <a:schemeClr val="accent1"/>
-            </a:effectRef>
-            <a:fontRef idx="minor">
-              <a:schemeClr val="tx1"/>
-            </a:fontRef>
-          </p:style>
-        </p:cxnSp>
-        <p:cxnSp>
-          <p:nvCxnSpPr>
-            <p:cNvPr id="41" name="Straight Arrow Connector 40">
-              <a:extLst>
-                <a:ext uri="{FF2B5EF4-FFF2-40B4-BE49-F238E27FC236}">
-                  <a16:creationId xmlns:a16="http://schemas.microsoft.com/office/drawing/2014/main" id="{F9A1680C-CCDD-268A-DA04-48977EF681AD}"/>
-                </a:ext>
-              </a:extLst>
-            </p:cNvPr>
-            <p:cNvCxnSpPr>
-              <a:cxnSpLocks/>
-            </p:cNvCxnSpPr>
-            <p:nvPr/>
-          </p:nvCxnSpPr>
-          <p:spPr>
-            <a:xfrm rot="10800000">
-              <a:off x="17151464" y="8247754"/>
-              <a:ext cx="0" cy="457200"/>
-            </a:xfrm>
-            <a:prstGeom prst="straightConnector1">
-              <a:avLst/>
-            </a:prstGeom>
-            <a:ln w="63500">
-              <a:solidFill>
-                <a:srgbClr val="94A3B8"/>
-              </a:solidFill>
-              <a:tailEnd type="triangle"/>
-            </a:ln>
-          </p:spPr>
-          <p:style>
-            <a:lnRef idx="2">
-              <a:schemeClr val="accent1"/>
-            </a:lnRef>
-            <a:fillRef idx="0">
-              <a:schemeClr val="accent1"/>
-            </a:fillRef>
-            <a:effectRef idx="1">
-              <a:schemeClr val="accent1"/>
-            </a:effectRef>
-            <a:fontRef idx="minor">
-              <a:schemeClr val="tx1"/>
-            </a:fontRef>
-          </p:style>
-        </p:cxnSp>
-        <p:cxnSp>
-          <p:nvCxnSpPr>
-            <p:cNvPr id="42" name="Straight Arrow Connector 41">
-              <a:extLst>
-                <a:ext uri="{FF2B5EF4-FFF2-40B4-BE49-F238E27FC236}">
-                  <a16:creationId xmlns:a16="http://schemas.microsoft.com/office/drawing/2014/main" id="{3287A2E5-B9CC-9971-1DBF-CA0C36FA7E91}"/>
-                </a:ext>
-              </a:extLst>
-            </p:cNvPr>
-            <p:cNvCxnSpPr>
-              <a:cxnSpLocks/>
-            </p:cNvCxnSpPr>
-            <p:nvPr/>
-          </p:nvCxnSpPr>
-          <p:spPr>
-            <a:xfrm rot="10800000">
-              <a:off x="17151464" y="9861227"/>
-              <a:ext cx="0" cy="457200"/>
-            </a:xfrm>
-            <a:prstGeom prst="straightConnector1">
-              <a:avLst/>
-            </a:prstGeom>
-            <a:ln w="63500">
-              <a:solidFill>
-                <a:srgbClr val="94A3B8"/>
-              </a:solidFill>
-              <a:tailEnd type="triangle"/>
-            </a:ln>
-          </p:spPr>
-          <p:style>
-            <a:lnRef idx="2">
-              <a:schemeClr val="accent1"/>
-            </a:lnRef>
-            <a:fillRef idx="0">
-              <a:schemeClr val="accent1"/>
-            </a:fillRef>
-            <a:effectRef idx="1">
-              <a:schemeClr val="accent1"/>
-            </a:effectRef>
-            <a:fontRef idx="minor">
-              <a:schemeClr val="tx1"/>
-            </a:fontRef>
-          </p:style>
-        </p:cxnSp>
-        <p:cxnSp>
-          <p:nvCxnSpPr>
-            <p:cNvPr id="43" name="Straight Arrow Connector 42">
-              <a:extLst>
-                <a:ext uri="{FF2B5EF4-FFF2-40B4-BE49-F238E27FC236}">
-                  <a16:creationId xmlns:a16="http://schemas.microsoft.com/office/drawing/2014/main" id="{E013238F-1101-E6C6-D61F-8E4DF5DA8A8C}"/>
-                </a:ext>
-              </a:extLst>
-            </p:cNvPr>
-            <p:cNvCxnSpPr>
-              <a:cxnSpLocks/>
-            </p:cNvCxnSpPr>
-            <p:nvPr/>
-          </p:nvCxnSpPr>
-          <p:spPr>
-            <a:xfrm rot="10800000">
-              <a:off x="17151464" y="11459952"/>
-              <a:ext cx="0" cy="457200"/>
-            </a:xfrm>
-            <a:prstGeom prst="straightConnector1">
-              <a:avLst/>
-            </a:prstGeom>
-            <a:ln w="63500">
-              <a:solidFill>
-                <a:srgbClr val="94A3B8"/>
-              </a:solidFill>
-              <a:tailEnd type="triangle"/>
-            </a:ln>
-          </p:spPr>
-          <p:style>
-            <a:lnRef idx="2">
-              <a:schemeClr val="accent1"/>
-            </a:lnRef>
-            <a:fillRef idx="0">
-              <a:schemeClr val="accent1"/>
-            </a:fillRef>
-            <a:effectRef idx="1">
-              <a:schemeClr val="accent1"/>
-            </a:effectRef>
-            <a:fontRef idx="minor">
-              <a:schemeClr val="tx1"/>
-            </a:fontRef>
-          </p:style>
-        </p:cxnSp>
-        <p:cxnSp>
-          <p:nvCxnSpPr>
-            <p:cNvPr id="47" name="Connector: Elbow 46">
-              <a:extLst>
-                <a:ext uri="{FF2B5EF4-FFF2-40B4-BE49-F238E27FC236}">
-                  <a16:creationId xmlns:a16="http://schemas.microsoft.com/office/drawing/2014/main" id="{8910A8F6-7195-4E13-EE1A-BDBDF2203E3C}"/>
-                </a:ext>
-              </a:extLst>
-            </p:cNvPr>
-            <p:cNvCxnSpPr>
-              <a:stCxn id="20" idx="2"/>
-              <a:endCxn id="21" idx="1"/>
-            </p:cNvCxnSpPr>
-            <p:nvPr/>
-          </p:nvCxnSpPr>
-          <p:spPr>
-            <a:xfrm rot="16200000" flipH="1">
-              <a:off x="11334577" y="12703366"/>
-              <a:ext cx="1143984" cy="1854609"/>
-            </a:xfrm>
-            <a:prstGeom prst="bentConnector2">
-              <a:avLst/>
-            </a:prstGeom>
-            <a:ln w="63500">
-              <a:solidFill>
-                <a:srgbClr val="94A3B8"/>
-              </a:solidFill>
-              <a:tailEnd type="triangle"/>
-            </a:ln>
-          </p:spPr>
-          <p:style>
-            <a:lnRef idx="2">
-              <a:schemeClr val="accent1"/>
-            </a:lnRef>
-            <a:fillRef idx="0">
-              <a:schemeClr val="accent1"/>
-            </a:fillRef>
-            <a:effectRef idx="1">
-              <a:schemeClr val="accent1"/>
-            </a:effectRef>
-            <a:fontRef idx="minor">
-              <a:schemeClr val="tx1"/>
-            </a:fontRef>
-          </p:style>
-        </p:cxnSp>
-        <p:cxnSp>
-          <p:nvCxnSpPr>
-            <p:cNvPr id="48" name="Connector: Elbow 47">
-              <a:extLst>
-                <a:ext uri="{FF2B5EF4-FFF2-40B4-BE49-F238E27FC236}">
-                  <a16:creationId xmlns:a16="http://schemas.microsoft.com/office/drawing/2014/main" id="{379D1BE7-6228-3D8B-4BC4-12ADFD83FEC5}"/>
-                </a:ext>
-              </a:extLst>
-            </p:cNvPr>
-            <p:cNvCxnSpPr>
-              <a:cxnSpLocks/>
-              <a:stCxn id="21" idx="3"/>
-              <a:endCxn id="26" idx="2"/>
-            </p:cNvCxnSpPr>
-            <p:nvPr/>
-          </p:nvCxnSpPr>
-          <p:spPr>
-            <a:xfrm flipV="1">
-              <a:off x="15296855" y="13058679"/>
-              <a:ext cx="1854610" cy="1143984"/>
-            </a:xfrm>
-            <a:prstGeom prst="bentConnector2">
-              <a:avLst/>
-            </a:prstGeom>
-            <a:ln w="63500">
-              <a:solidFill>
-                <a:srgbClr val="94A3B8"/>
-              </a:solidFill>
-              <a:tailEnd type="triangle"/>
-            </a:ln>
-          </p:spPr>
-          <p:style>
-            <a:lnRef idx="2">
-              <a:schemeClr val="accent1"/>
-            </a:lnRef>
-            <a:fillRef idx="0">
-              <a:schemeClr val="accent1"/>
-            </a:fillRef>
-            <a:effectRef idx="1">
-              <a:schemeClr val="accent1"/>
-            </a:effectRef>
-            <a:fontRef idx="minor">
-              <a:schemeClr val="tx1"/>
-            </a:fontRef>
-          </p:style>
-        </p:cxnSp>
-        <p:cxnSp>
-          <p:nvCxnSpPr>
-            <p:cNvPr id="52" name="Straight Arrow Connector 51">
-              <a:extLst>
-                <a:ext uri="{FF2B5EF4-FFF2-40B4-BE49-F238E27FC236}">
-                  <a16:creationId xmlns:a16="http://schemas.microsoft.com/office/drawing/2014/main" id="{757F07D8-8F4F-B13B-754E-AFA6FEA3F9DA}"/>
-                </a:ext>
-              </a:extLst>
-            </p:cNvPr>
-            <p:cNvCxnSpPr>
-              <a:stCxn id="20" idx="3"/>
-              <a:endCxn id="26" idx="1"/>
-            </p:cNvCxnSpPr>
-            <p:nvPr/>
-          </p:nvCxnSpPr>
-          <p:spPr>
-            <a:xfrm>
-              <a:off x="12210755" y="12480543"/>
-              <a:ext cx="3709219" cy="0"/>
-            </a:xfrm>
-            <a:prstGeom prst="straightConnector1">
-              <a:avLst/>
-            </a:prstGeom>
-            <a:ln w="63500">
-              <a:solidFill>
-                <a:srgbClr val="94A3B8"/>
-              </a:solidFill>
-              <a:tailEnd type="triangle"/>
-            </a:ln>
-          </p:spPr>
-          <p:style>
-            <a:lnRef idx="2">
-              <a:schemeClr val="accent1"/>
-            </a:lnRef>
-            <a:fillRef idx="0">
-              <a:schemeClr val="accent1"/>
-            </a:fillRef>
-            <a:effectRef idx="1">
-              <a:schemeClr val="accent1"/>
-            </a:effectRef>
-            <a:fontRef idx="minor">
-              <a:schemeClr val="tx1"/>
-            </a:fontRef>
-          </p:style>
-        </p:cxnSp>
-        <p:cxnSp>
-          <p:nvCxnSpPr>
-            <p:cNvPr id="53" name="Straight Arrow Connector 52">
-              <a:extLst>
-                <a:ext uri="{FF2B5EF4-FFF2-40B4-BE49-F238E27FC236}">
-                  <a16:creationId xmlns:a16="http://schemas.microsoft.com/office/drawing/2014/main" id="{6E38F242-0485-DE60-0054-7AA409B11259}"/>
-                </a:ext>
-              </a:extLst>
-            </p:cNvPr>
-            <p:cNvCxnSpPr/>
-            <p:nvPr/>
-          </p:nvCxnSpPr>
-          <p:spPr>
-            <a:xfrm>
-              <a:off x="12210753" y="10878131"/>
-              <a:ext cx="3709219" cy="0"/>
-            </a:xfrm>
-            <a:prstGeom prst="straightConnector1">
-              <a:avLst/>
-            </a:prstGeom>
-            <a:ln w="63500">
-              <a:solidFill>
-                <a:srgbClr val="94A3B8"/>
-              </a:solidFill>
-              <a:tailEnd type="triangle"/>
-            </a:ln>
-          </p:spPr>
-          <p:style>
-            <a:lnRef idx="2">
-              <a:schemeClr val="accent1"/>
-            </a:lnRef>
-            <a:fillRef idx="0">
-              <a:schemeClr val="accent1"/>
-            </a:fillRef>
-            <a:effectRef idx="1">
-              <a:schemeClr val="accent1"/>
-            </a:effectRef>
-            <a:fontRef idx="minor">
-              <a:schemeClr val="tx1"/>
-            </a:fontRef>
-          </p:style>
-        </p:cxnSp>
-        <p:cxnSp>
-          <p:nvCxnSpPr>
-            <p:cNvPr id="54" name="Straight Arrow Connector 53">
-              <a:extLst>
-                <a:ext uri="{FF2B5EF4-FFF2-40B4-BE49-F238E27FC236}">
-                  <a16:creationId xmlns:a16="http://schemas.microsoft.com/office/drawing/2014/main" id="{7D0EEA6A-ABAC-D4CB-3FE3-27D09E5A6978}"/>
-                </a:ext>
-              </a:extLst>
-            </p:cNvPr>
-            <p:cNvCxnSpPr/>
-            <p:nvPr/>
-          </p:nvCxnSpPr>
-          <p:spPr>
-            <a:xfrm>
-              <a:off x="12210754" y="9275718"/>
-              <a:ext cx="3709219" cy="0"/>
-            </a:xfrm>
-            <a:prstGeom prst="straightConnector1">
-              <a:avLst/>
-            </a:prstGeom>
-            <a:ln w="63500">
-              <a:solidFill>
-                <a:srgbClr val="94A3B8"/>
-              </a:solidFill>
-              <a:tailEnd type="triangle"/>
-            </a:ln>
-          </p:spPr>
-          <p:style>
-            <a:lnRef idx="2">
-              <a:schemeClr val="accent1"/>
-            </a:lnRef>
-            <a:fillRef idx="0">
-              <a:schemeClr val="accent1"/>
-            </a:fillRef>
-            <a:effectRef idx="1">
-              <a:schemeClr val="accent1"/>
-            </a:effectRef>
-            <a:fontRef idx="minor">
-              <a:schemeClr val="tx1"/>
-            </a:fontRef>
-          </p:style>
-        </p:cxnSp>
-        <p:cxnSp>
-          <p:nvCxnSpPr>
-            <p:cNvPr id="55" name="Straight Arrow Connector 54">
-              <a:extLst>
-                <a:ext uri="{FF2B5EF4-FFF2-40B4-BE49-F238E27FC236}">
-                  <a16:creationId xmlns:a16="http://schemas.microsoft.com/office/drawing/2014/main" id="{CB6D47B4-04E6-2011-1AC0-CAE60F1D0443}"/>
-                </a:ext>
-              </a:extLst>
-            </p:cNvPr>
-            <p:cNvCxnSpPr/>
-            <p:nvPr/>
-          </p:nvCxnSpPr>
-          <p:spPr>
-            <a:xfrm>
-              <a:off x="12210754" y="7684365"/>
-              <a:ext cx="3709219" cy="0"/>
-            </a:xfrm>
-            <a:prstGeom prst="straightConnector1">
-              <a:avLst/>
-            </a:prstGeom>
-            <a:ln w="63500">
-              <a:solidFill>
-                <a:srgbClr val="94A3B8"/>
-              </a:solidFill>
-              <a:tailEnd type="triangle"/>
-            </a:ln>
-          </p:spPr>
-          <p:style>
-            <a:lnRef idx="2">
-              <a:schemeClr val="accent1"/>
-            </a:lnRef>
-            <a:fillRef idx="0">
-              <a:schemeClr val="accent1"/>
-            </a:fillRef>
-            <a:effectRef idx="1">
-              <a:schemeClr val="accent1"/>
-            </a:effectRef>
-            <a:fontRef idx="minor">
-              <a:schemeClr val="tx1"/>
-            </a:fontRef>
-          </p:style>
-        </p:cxnSp>
-        <p:cxnSp>
-          <p:nvCxnSpPr>
-            <p:cNvPr id="56" name="Straight Arrow Connector 55">
-              <a:extLst>
-                <a:ext uri="{FF2B5EF4-FFF2-40B4-BE49-F238E27FC236}">
-                  <a16:creationId xmlns:a16="http://schemas.microsoft.com/office/drawing/2014/main" id="{C491CCB5-AB85-EFEC-2E93-D0A4B8A2CFDD}"/>
-                </a:ext>
-              </a:extLst>
-            </p:cNvPr>
-            <p:cNvCxnSpPr/>
-            <p:nvPr/>
-          </p:nvCxnSpPr>
-          <p:spPr>
-            <a:xfrm>
-              <a:off x="12210752" y="6085640"/>
-              <a:ext cx="3709219" cy="0"/>
-            </a:xfrm>
-            <a:prstGeom prst="straightConnector1">
-              <a:avLst/>
-            </a:prstGeom>
-            <a:ln w="63500">
-              <a:solidFill>
-                <a:srgbClr val="94A3B8"/>
-              </a:solidFill>
-              <a:tailEnd type="triangle"/>
-            </a:ln>
-          </p:spPr>
-          <p:style>
-            <a:lnRef idx="2">
-              <a:schemeClr val="accent1"/>
-            </a:lnRef>
-            <a:fillRef idx="0">
-              <a:schemeClr val="accent1"/>
-            </a:fillRef>
-            <a:effectRef idx="1">
-              <a:schemeClr val="accent1"/>
-            </a:effectRef>
-            <a:fontRef idx="minor">
-              <a:schemeClr val="tx1"/>
-            </a:fontRef>
-          </p:style>
-        </p:cxnSp>
-        <p:sp>
-          <p:nvSpPr>
-            <p:cNvPr id="58" name="TextBox 57">
-              <a:extLst>
-                <a:ext uri="{FF2B5EF4-FFF2-40B4-BE49-F238E27FC236}">
-                  <a16:creationId xmlns:a16="http://schemas.microsoft.com/office/drawing/2014/main" id="{7858F297-0164-CEC0-799D-35C54468F236}"/>
-                </a:ext>
-              </a:extLst>
-            </p:cNvPr>
-            <p:cNvSpPr txBox="1"/>
-            <p:nvPr/>
-          </p:nvSpPr>
-          <p:spPr>
-            <a:xfrm>
-              <a:off x="12968268" y="5500132"/>
-              <a:ext cx="2194190" cy="523220"/>
-            </a:xfrm>
-            <a:prstGeom prst="rect">
-              <a:avLst/>
-            </a:prstGeom>
-            <a:noFill/>
-          </p:spPr>
-          <p:txBody>
-            <a:bodyPr wrap="none" rtlCol="0">
-              <a:spAutoFit/>
-            </a:bodyPr>
-            <a:lstStyle/>
-            <a:p>
-              <a:r>
-                <a:rPr lang="en-US" sz="2770" dirty="0">
-                  <a:solidFill>
-                    <a:srgbClr val="64748B"/>
-                  </a:solidFill>
-                </a:rPr>
-                <a:t>Concatenate</a:t>
-              </a:r>
-            </a:p>
-          </p:txBody>
-        </p:sp>
-        <p:cxnSp>
-          <p:nvCxnSpPr>
-            <p:cNvPr id="72" name="Connector: Elbow 71">
-              <a:extLst>
-                <a:ext uri="{FF2B5EF4-FFF2-40B4-BE49-F238E27FC236}">
-                  <a16:creationId xmlns:a16="http://schemas.microsoft.com/office/drawing/2014/main" id="{78896FF7-A696-1F27-CF76-2FAD06C10940}"/>
-                </a:ext>
-              </a:extLst>
-            </p:cNvPr>
-            <p:cNvCxnSpPr>
-              <a:cxnSpLocks/>
-              <a:stCxn id="103" idx="3"/>
-              <a:endCxn id="8" idx="0"/>
-            </p:cNvCxnSpPr>
-            <p:nvPr/>
-          </p:nvCxnSpPr>
-          <p:spPr>
-            <a:xfrm>
-              <a:off x="9093540" y="4410489"/>
-              <a:ext cx="1885725" cy="1097015"/>
-            </a:xfrm>
-            <a:prstGeom prst="bentConnector2">
-              <a:avLst/>
-            </a:prstGeom>
-            <a:ln w="63500">
-              <a:solidFill>
-                <a:srgbClr val="94A3B8"/>
-              </a:solidFill>
-              <a:tailEnd type="triangle"/>
-            </a:ln>
-          </p:spPr>
-          <p:style>
-            <a:lnRef idx="2">
-              <a:schemeClr val="accent1"/>
-            </a:lnRef>
-            <a:fillRef idx="0">
-              <a:schemeClr val="accent1"/>
-            </a:fillRef>
-            <a:effectRef idx="1">
-              <a:schemeClr val="accent1"/>
-            </a:effectRef>
-            <a:fontRef idx="minor">
-              <a:schemeClr val="tx1"/>
-            </a:fontRef>
-          </p:style>
-        </p:cxnSp>
-        <p:sp>
-          <p:nvSpPr>
-            <p:cNvPr id="75" name="TextBox 74">
-              <a:extLst>
-                <a:ext uri="{FF2B5EF4-FFF2-40B4-BE49-F238E27FC236}">
-                  <a16:creationId xmlns:a16="http://schemas.microsoft.com/office/drawing/2014/main" id="{440C12B5-E80B-2FCC-B3F6-597FD387197A}"/>
-                </a:ext>
-              </a:extLst>
-            </p:cNvPr>
-            <p:cNvSpPr txBox="1"/>
-            <p:nvPr/>
-          </p:nvSpPr>
-          <p:spPr>
-            <a:xfrm>
-              <a:off x="12968268" y="7120977"/>
-              <a:ext cx="2194190" cy="523220"/>
-            </a:xfrm>
-            <a:prstGeom prst="rect">
-              <a:avLst/>
-            </a:prstGeom>
-            <a:noFill/>
-          </p:spPr>
-          <p:txBody>
-            <a:bodyPr wrap="none" rtlCol="0">
-              <a:spAutoFit/>
-            </a:bodyPr>
-            <a:lstStyle/>
-            <a:p>
-              <a:r>
-                <a:rPr lang="en-US" sz="2770" dirty="0">
-                  <a:solidFill>
-                    <a:srgbClr val="64748B"/>
-                  </a:solidFill>
-                </a:rPr>
-                <a:t>Concatenate</a:t>
-              </a:r>
-            </a:p>
-          </p:txBody>
-        </p:sp>
-        <p:sp>
-          <p:nvSpPr>
-            <p:cNvPr id="76" name="TextBox 75">
-              <a:extLst>
-                <a:ext uri="{FF2B5EF4-FFF2-40B4-BE49-F238E27FC236}">
-                  <a16:creationId xmlns:a16="http://schemas.microsoft.com/office/drawing/2014/main" id="{2139DCE6-ED10-D476-E457-487D6AFEA05D}"/>
-                </a:ext>
-              </a:extLst>
-            </p:cNvPr>
-            <p:cNvSpPr txBox="1"/>
-            <p:nvPr/>
-          </p:nvSpPr>
-          <p:spPr>
-            <a:xfrm>
-              <a:off x="12968268" y="8719701"/>
-              <a:ext cx="2194190" cy="523220"/>
-            </a:xfrm>
-            <a:prstGeom prst="rect">
-              <a:avLst/>
-            </a:prstGeom>
-            <a:noFill/>
-          </p:spPr>
-          <p:txBody>
-            <a:bodyPr wrap="none" rtlCol="0">
-              <a:spAutoFit/>
-            </a:bodyPr>
-            <a:lstStyle/>
-            <a:p>
-              <a:r>
-                <a:rPr lang="en-US" sz="2770" dirty="0">
-                  <a:solidFill>
-                    <a:srgbClr val="64748B"/>
-                  </a:solidFill>
-                </a:rPr>
-                <a:t>Concatenate</a:t>
-              </a:r>
-            </a:p>
-          </p:txBody>
-        </p:sp>
-        <p:sp>
-          <p:nvSpPr>
-            <p:cNvPr id="77" name="TextBox 76">
-              <a:extLst>
-                <a:ext uri="{FF2B5EF4-FFF2-40B4-BE49-F238E27FC236}">
-                  <a16:creationId xmlns:a16="http://schemas.microsoft.com/office/drawing/2014/main" id="{1574E929-D4DE-2BBB-89F4-C5F300AAA7DA}"/>
-                </a:ext>
-              </a:extLst>
-            </p:cNvPr>
-            <p:cNvSpPr txBox="1"/>
-            <p:nvPr/>
-          </p:nvSpPr>
-          <p:spPr>
-            <a:xfrm>
-              <a:off x="12968268" y="10351223"/>
-              <a:ext cx="2194190" cy="523220"/>
-            </a:xfrm>
-            <a:prstGeom prst="rect">
-              <a:avLst/>
-            </a:prstGeom>
-            <a:noFill/>
-          </p:spPr>
-          <p:txBody>
-            <a:bodyPr wrap="none" rtlCol="0">
-              <a:spAutoFit/>
-            </a:bodyPr>
-            <a:lstStyle/>
-            <a:p>
-              <a:r>
-                <a:rPr lang="en-US" sz="2770" dirty="0">
-                  <a:solidFill>
-                    <a:srgbClr val="64748B"/>
-                  </a:solidFill>
-                </a:rPr>
-                <a:t>Concatenate</a:t>
-              </a:r>
-            </a:p>
-          </p:txBody>
-        </p:sp>
-        <p:sp>
-          <p:nvSpPr>
-            <p:cNvPr id="78" name="TextBox 77">
-              <a:extLst>
-                <a:ext uri="{FF2B5EF4-FFF2-40B4-BE49-F238E27FC236}">
-                  <a16:creationId xmlns:a16="http://schemas.microsoft.com/office/drawing/2014/main" id="{687762A2-F363-C31E-CDC1-EC02EEDBCAA1}"/>
-                </a:ext>
-              </a:extLst>
-            </p:cNvPr>
-            <p:cNvSpPr txBox="1"/>
-            <p:nvPr/>
-          </p:nvSpPr>
-          <p:spPr>
-            <a:xfrm>
-              <a:off x="12968268" y="11949947"/>
-              <a:ext cx="2194190" cy="523220"/>
-            </a:xfrm>
-            <a:prstGeom prst="rect">
-              <a:avLst/>
-            </a:prstGeom>
-            <a:noFill/>
-          </p:spPr>
-          <p:txBody>
-            <a:bodyPr wrap="none" rtlCol="0">
-              <a:spAutoFit/>
-            </a:bodyPr>
-            <a:lstStyle/>
-            <a:p>
-              <a:r>
-                <a:rPr lang="en-US" sz="2770" dirty="0">
-                  <a:solidFill>
-                    <a:srgbClr val="64748B"/>
-                  </a:solidFill>
-                </a:rPr>
-                <a:t>Concatenate</a:t>
-              </a:r>
-            </a:p>
-          </p:txBody>
-        </p:sp>
-        <p:grpSp>
-          <p:nvGrpSpPr>
-            <p:cNvPr id="112" name="Group 111">
-              <a:extLst>
-                <a:ext uri="{FF2B5EF4-FFF2-40B4-BE49-F238E27FC236}">
-                  <a16:creationId xmlns:a16="http://schemas.microsoft.com/office/drawing/2014/main" id="{46EDCFDC-58A5-444D-60D3-393E84E8FCB3}"/>
-                </a:ext>
-              </a:extLst>
-            </p:cNvPr>
-            <p:cNvGrpSpPr/>
-            <p:nvPr/>
-          </p:nvGrpSpPr>
-          <p:grpSpPr>
-            <a:xfrm>
-              <a:off x="6942531" y="3177407"/>
-              <a:ext cx="2151009" cy="2147482"/>
-              <a:chOff x="3960955" y="5881915"/>
-              <a:chExt cx="2151009" cy="2147482"/>
-            </a:xfrm>
-          </p:grpSpPr>
-          <p:pic>
-            <p:nvPicPr>
-              <p:cNvPr id="105" name="Picture 104" descr="A colorful dots on a black background&#10;&#10;Description automatically generated">
-                <a:extLst>
-                  <a:ext uri="{FF2B5EF4-FFF2-40B4-BE49-F238E27FC236}">
-                    <a16:creationId xmlns:a16="http://schemas.microsoft.com/office/drawing/2014/main" id="{EB2C7843-B592-84C5-8E11-8E88FC90C24F}"/>
-                  </a:ext>
-                </a:extLst>
-              </p:cNvPr>
-              <p:cNvPicPr>
-                <a:picLocks noChangeAspect="1"/>
-              </p:cNvPicPr>
-              <p:nvPr/>
-            </p:nvPicPr>
-            <p:blipFill>
-              <a:blip r:embed="rId2">
-                <a:extLst>
-                  <a:ext uri="{28A0092B-C50C-407E-A947-70E740481C1C}">
-                    <a14:useLocalDpi xmlns:a14="http://schemas.microsoft.com/office/drawing/2010/main" val="0"/>
-                  </a:ext>
-                </a:extLst>
-              </a:blip>
-              <a:stretch>
-                <a:fillRect/>
-              </a:stretch>
-            </p:blipFill>
-            <p:spPr>
-              <a:xfrm>
-                <a:off x="3960955" y="5881915"/>
-                <a:ext cx="1828800" cy="1828800"/>
-              </a:xfrm>
-              <a:prstGeom prst="rect">
-                <a:avLst/>
-              </a:prstGeom>
-            </p:spPr>
-          </p:pic>
-          <p:pic>
-            <p:nvPicPr>
-              <p:cNvPr id="107" name="Picture 106" descr="A black and white speckled background&#10;&#10;Description automatically generated">
-                <a:extLst>
-                  <a:ext uri="{FF2B5EF4-FFF2-40B4-BE49-F238E27FC236}">
-                    <a16:creationId xmlns:a16="http://schemas.microsoft.com/office/drawing/2014/main" id="{B4F202AD-EA3B-7678-FFF1-2B7E984AED13}"/>
-                  </a:ext>
-                </a:extLst>
-              </p:cNvPr>
-              <p:cNvPicPr>
-                <a:picLocks noChangeAspect="1"/>
-              </p:cNvPicPr>
-              <p:nvPr/>
-            </p:nvPicPr>
-            <p:blipFill>
-              <a:blip r:embed="rId3">
-                <a:extLst>
-                  <a:ext uri="{28A0092B-C50C-407E-A947-70E740481C1C}">
-                    <a14:useLocalDpi xmlns:a14="http://schemas.microsoft.com/office/drawing/2010/main" val="0"/>
-                  </a:ext>
-                </a:extLst>
-              </a:blip>
-              <a:stretch>
-                <a:fillRect/>
-              </a:stretch>
-            </p:blipFill>
-            <p:spPr>
-              <a:xfrm>
-                <a:off x="4068358" y="5988142"/>
-                <a:ext cx="1828800" cy="1828800"/>
-              </a:xfrm>
-              <a:prstGeom prst="rect">
-                <a:avLst/>
-              </a:prstGeom>
-            </p:spPr>
-          </p:pic>
-          <p:pic>
-            <p:nvPicPr>
-              <p:cNvPr id="109" name="Picture 108" descr="A map of a city&#10;&#10;Description automatically generated">
-                <a:extLst>
-                  <a:ext uri="{FF2B5EF4-FFF2-40B4-BE49-F238E27FC236}">
-                    <a16:creationId xmlns:a16="http://schemas.microsoft.com/office/drawing/2014/main" id="{7F68C620-1047-B982-1ACF-82AAFADBD487}"/>
-                  </a:ext>
-                </a:extLst>
-              </p:cNvPr>
-              <p:cNvPicPr>
-                <a:picLocks noChangeAspect="1"/>
-              </p:cNvPicPr>
-              <p:nvPr/>
-            </p:nvPicPr>
-            <p:blipFill>
-              <a:blip r:embed="rId4">
-                <a:extLst>
-                  <a:ext uri="{28A0092B-C50C-407E-A947-70E740481C1C}">
-                    <a14:useLocalDpi xmlns:a14="http://schemas.microsoft.com/office/drawing/2010/main" val="0"/>
-                  </a:ext>
-                </a:extLst>
-              </a:blip>
-              <a:stretch>
-                <a:fillRect/>
-              </a:stretch>
-            </p:blipFill>
-            <p:spPr>
-              <a:xfrm>
-                <a:off x="4175761" y="6094369"/>
-                <a:ext cx="1828800" cy="1828800"/>
-              </a:xfrm>
-              <a:prstGeom prst="rect">
-                <a:avLst/>
-              </a:prstGeom>
-            </p:spPr>
-          </p:pic>
-          <p:pic>
-            <p:nvPicPr>
-              <p:cNvPr id="103" name="Picture 102" descr="A black and white image of a grid&#10;&#10;Description automatically generated with medium confidence">
-                <a:extLst>
-                  <a:ext uri="{FF2B5EF4-FFF2-40B4-BE49-F238E27FC236}">
-                    <a16:creationId xmlns:a16="http://schemas.microsoft.com/office/drawing/2014/main" id="{AFFF8F49-1746-4DC7-04F2-20291270E705}"/>
-                  </a:ext>
-                </a:extLst>
-              </p:cNvPr>
-              <p:cNvPicPr>
-                <a:picLocks noChangeAspect="1"/>
-              </p:cNvPicPr>
-              <p:nvPr/>
-            </p:nvPicPr>
-            <p:blipFill>
-              <a:blip r:embed="rId5">
-                <a:extLst>
-                  <a:ext uri="{28A0092B-C50C-407E-A947-70E740481C1C}">
-                    <a14:useLocalDpi xmlns:a14="http://schemas.microsoft.com/office/drawing/2010/main" val="0"/>
-                  </a:ext>
-                </a:extLst>
-              </a:blip>
-              <a:stretch>
-                <a:fillRect/>
-              </a:stretch>
-            </p:blipFill>
-            <p:spPr>
-              <a:xfrm>
-                <a:off x="4283164" y="6200597"/>
-                <a:ext cx="1828800" cy="1828800"/>
-              </a:xfrm>
-              <a:prstGeom prst="rect">
-                <a:avLst/>
-              </a:prstGeom>
-            </p:spPr>
-          </p:pic>
-        </p:grpSp>
-        <p:pic>
-          <p:nvPicPr>
-            <p:cNvPr id="116" name="Picture 115" descr="A colorful image of a building&#10;&#10;Description automatically generated with medium confidence">
-              <a:extLst>
-                <a:ext uri="{FF2B5EF4-FFF2-40B4-BE49-F238E27FC236}">
-                  <a16:creationId xmlns:a16="http://schemas.microsoft.com/office/drawing/2014/main" id="{749793FC-BCA2-D16D-1927-43F8F471F41D}"/>
-                </a:ext>
-              </a:extLst>
-            </p:cNvPr>
-            <p:cNvPicPr>
-              <a:picLocks noChangeAspect="1"/>
-            </p:cNvPicPr>
-            <p:nvPr/>
-          </p:nvPicPr>
-          <p:blipFill>
-            <a:blip r:embed="rId6">
-              <a:extLst>
-                <a:ext uri="{28A0092B-C50C-407E-A947-70E740481C1C}">
-                  <a14:useLocalDpi xmlns:a14="http://schemas.microsoft.com/office/drawing/2010/main" val="0"/>
-                </a:ext>
-              </a:extLst>
-            </a:blip>
-            <a:stretch>
-              <a:fillRect/>
-            </a:stretch>
-          </p:blipFill>
-          <p:spPr>
-            <a:xfrm>
-              <a:off x="18851950" y="3496089"/>
-              <a:ext cx="1828800" cy="1828800"/>
-            </a:xfrm>
-            <a:prstGeom prst="rect">
-              <a:avLst/>
-            </a:prstGeom>
-          </p:spPr>
-        </p:pic>
-        <p:cxnSp>
-          <p:nvCxnSpPr>
-            <p:cNvPr id="117" name="Connector: Elbow 116">
-              <a:extLst>
-                <a:ext uri="{FF2B5EF4-FFF2-40B4-BE49-F238E27FC236}">
-                  <a16:creationId xmlns:a16="http://schemas.microsoft.com/office/drawing/2014/main" id="{5A791787-1AAA-DA55-6465-57F1D0D2AD0B}"/>
-                </a:ext>
-              </a:extLst>
-            </p:cNvPr>
-            <p:cNvCxnSpPr>
-              <a:cxnSpLocks/>
-              <a:stCxn id="22" idx="0"/>
-              <a:endCxn id="116" idx="1"/>
-            </p:cNvCxnSpPr>
-            <p:nvPr/>
-          </p:nvCxnSpPr>
-          <p:spPr>
-            <a:xfrm rot="5400000" flipH="1" flipV="1">
-              <a:off x="17453200" y="4108755"/>
-              <a:ext cx="1097015" cy="1700485"/>
-            </a:xfrm>
-            <a:prstGeom prst="bentConnector2">
-              <a:avLst/>
-            </a:prstGeom>
-            <a:ln w="63500">
-              <a:solidFill>
-                <a:srgbClr val="94A3B8"/>
+                <a:srgbClr val="D97706"/>
               </a:solidFill>
               <a:tailEnd type="triangle"/>
             </a:ln>
@@ -4870,7 +8106,7 @@
     </p:spTree>
     <p:extLst>
       <p:ext uri="{BB962C8B-B14F-4D97-AF65-F5344CB8AC3E}">
-        <p14:creationId xmlns:p14="http://schemas.microsoft.com/office/powerpoint/2010/main" val="2889124335"/>
+        <p14:creationId xmlns:p14="http://schemas.microsoft.com/office/powerpoint/2010/main" val="2488822040"/>
       </p:ext>
     </p:extLst>
   </p:cSld>

--- a/weekly_report/8_31/架构图.pptx
+++ b/weekly_report/8_31/架构图.pptx
@@ -6699,10 +6699,10 @@
       </p:grpSpPr>
       <p:grpSp>
         <p:nvGrpSpPr>
-          <p:cNvPr id="100" name="Group 99">
+          <p:cNvPr id="2" name="Group 1">
             <a:extLst>
               <a:ext uri="{FF2B5EF4-FFF2-40B4-BE49-F238E27FC236}">
-                <a16:creationId xmlns:a16="http://schemas.microsoft.com/office/drawing/2014/main" id="{D28CCAE3-560A-8D47-2FEE-CE92202F9C51}"/>
+                <a16:creationId xmlns:a16="http://schemas.microsoft.com/office/drawing/2014/main" id="{B76C488E-272A-F98F-24B2-4E77A5AD1823}"/>
               </a:ext>
             </a:extLst>
           </p:cNvPr>
@@ -6839,7 +6839,7 @@
                     <a:srgbClr val="263238"/>
                   </a:solidFill>
                 </a:rPr>
-                <a:t>K-Top</a:t>
+                <a:t>Top-K</a:t>
               </a:r>
             </a:p>
           </p:txBody>
@@ -7496,13 +7496,13 @@
                     <a:srgbClr val="263238"/>
                   </a:solidFill>
                 </a:rPr>
-                <a:t>Soft K-Top</a:t>
+                <a:t>Soft Top-K</a:t>
               </a:r>
             </a:p>
           </p:txBody>
         </p:sp>
-        <mc:AlternateContent xmlns:mc="http://schemas.openxmlformats.org/markup-compatibility/2006">
-          <mc:Choice xmlns:a14="http://schemas.microsoft.com/office/drawing/2010/main" Requires="a14">
+        <mc:AlternateContent xmlns:mc="http://schemas.openxmlformats.org/markup-compatibility/2006" xmlns:a14="http://schemas.microsoft.com/office/drawing/2010/main">
+          <mc:Choice Requires="a14">
             <p:sp>
               <p:nvSpPr>
                 <p:cNvPr id="55" name="TextBox 54">
@@ -7531,6 +7531,7 @@
                 </a:bodyPr>
                 <a:lstStyle/>
                 <a:p>
+                  <a:pPr/>
                   <a14:m>
                     <m:oMathPara xmlns:m="http://schemas.openxmlformats.org/officeDocument/2006/math">
                       <m:oMathParaPr>
@@ -7601,7 +7602,7 @@
               </p:txBody>
             </p:sp>
           </mc:Choice>
-          <mc:Fallback>
+          <mc:Fallback xmlns="">
             <p:sp>
               <p:nvSpPr>
                 <p:cNvPr id="55" name="TextBox 54">
@@ -7646,8 +7647,8 @@
             </p:sp>
           </mc:Fallback>
         </mc:AlternateContent>
-        <mc:AlternateContent xmlns:mc="http://schemas.openxmlformats.org/markup-compatibility/2006">
-          <mc:Choice xmlns:a14="http://schemas.microsoft.com/office/drawing/2010/main" Requires="a14">
+        <mc:AlternateContent xmlns:mc="http://schemas.openxmlformats.org/markup-compatibility/2006" xmlns:a14="http://schemas.microsoft.com/office/drawing/2010/main">
+          <mc:Choice Requires="a14">
             <p:sp>
               <p:nvSpPr>
                 <p:cNvPr id="56" name="TextBox 55">
@@ -7676,6 +7677,7 @@
                 </a:bodyPr>
                 <a:lstStyle/>
                 <a:p>
+                  <a:pPr/>
                   <a14:m>
                     <m:oMathPara xmlns:m="http://schemas.openxmlformats.org/officeDocument/2006/math">
                       <m:oMathParaPr>
@@ -7746,7 +7748,7 @@
               </p:txBody>
             </p:sp>
           </mc:Choice>
-          <mc:Fallback>
+          <mc:Fallback xmlns="">
             <p:sp>
               <p:nvSpPr>
                 <p:cNvPr id="56" name="TextBox 55">
